--- a/submission/TCS_AMD_AI_Hackathon_Submission_TruthLine.pptx
+++ b/submission/TCS_AMD_AI_Hackathon_Submission_TruthLine.pptx
@@ -1909,7 +1909,7 @@
                 <a:ea typeface="Calibri" pitchFamily="34" charset="-122"/>
                 <a:cs typeface="Calibri" pitchFamily="34" charset="-120"/>
               </a:rPr>
-              <a:t>Prashant Patil   (Emp ID: &lt;fill your employee ID&gt;)</a:t>
+              <a:t>Prashant Patil   (Emp ID: 2437783)</a:t>
             </a:r>
             <a:endParaRPr lang="en-US" sz="1250" dirty="0"/>
           </a:p>
@@ -2233,7 +2233,7 @@
                 <a:ea typeface="Calibri" pitchFamily="34" charset="-122"/>
                 <a:cs typeface="Calibri" pitchFamily="34" charset="-120"/>
               </a:rPr>
-              <a:t>We fine-tuned Qwen3-14B on AMD Instinct MI300X so proprietary telecom knowledge — internal billing codes, router hardware, error codes — lives in the model's weights, wrapped in an agentic pipeline (guardrails, clarity gate, semantic cache, hybrid RAG, model router, trust gate, MCP enterprise tools, data flywheel). Measured held-out accuracy rose from 22% (base) to 94% (fine-tuned), at 74% fewer tokens per answer.</a:t>
+              <a:t>A domain-expert telecom support LLM. We fine-tuned Qwen3-14B on AMD Instinct MI300X so proprietary knowledge — internal billing codes, router hardware, error codes — lives in the model's weights, wrapped in an agentic pipeline: guardrails, clarity gate, semantic cache, hybrid RAG, model router, trust gate, MCP enterprise tools, and a data flywheel. Result: held-out accuracy 22% → 94%, at 74% fewer tokens per answer — on one AMD GPU, with zero external API calls.</a:t>
             </a:r>
             <a:endParaRPr lang="en-US" sz="1250" dirty="0"/>
           </a:p>
@@ -2391,7 +2391,7 @@
                 <a:ea typeface="Georgia" pitchFamily="34" charset="-122"/>
                 <a:cs typeface="Georgia" pitchFamily="34" charset="-120"/>
               </a:rPr>
-              <a:t>The problem we set out to solve</a:t>
+              <a:t>Generic LLMs hallucinate on proprietary telecom knowledge</a:t>
             </a:r>
             <a:endParaRPr lang="en-US" sz="3000" dirty="0"/>
           </a:p>
@@ -3126,7 +3126,7 @@
                 <a:ea typeface="Georgia" pitchFamily="34" charset="-122"/>
                 <a:cs typeface="Georgia" pitchFamily="34" charset="-120"/>
               </a:rPr>
-              <a:t>Eight-stage agentic pipeline — every query earns its way to the GPU</a:t>
+              <a:t>Eight-stage agentic pipeline, fully on AMD MI300X</a:t>
             </a:r>
             <a:endParaRPr lang="en-US" sz="3000" dirty="0"/>
           </a:p>
@@ -4982,7 +4982,7 @@
                 <a:ea typeface="Georgia" pitchFamily="34" charset="-122"/>
                 <a:cs typeface="Georgia" pitchFamily="34" charset="-120"/>
               </a:rPr>
-              <a:t>Measured results, base vs fine-tuned</a:t>
+              <a:t>22% → 94% accuracy · 74% fewer tokens · ~60s retrain</a:t>
             </a:r>
             <a:endParaRPr lang="en-US" sz="3000" dirty="0"/>
           </a:p>
@@ -6033,7 +6033,7 @@
                 <a:ea typeface="Georgia" pitchFamily="34" charset="-122"/>
                 <a:cs typeface="Georgia" pitchFamily="34" charset="-120"/>
               </a:rPr>
-              <a:t>Why it matters, and what the jury will see</a:t>
+              <a:t>Trusted deflection that gets smarter every night</a:t>
             </a:r>
             <a:endParaRPr lang="en-US" sz="3000" dirty="0"/>
           </a:p>
@@ -6141,7 +6141,7 @@
                 <a:ea typeface="Calibri" pitchFamily="34" charset="-122"/>
                 <a:cs typeface="Calibri" pitchFamily="34" charset="-120"/>
               </a:rPr>
-              <a:t>Trusted deflection: low-trust answers escalate to the right on-call expert via MCP (with an auto ITSM ticket) instead of reaching the customer.</a:t>
+              <a:t>22% → 94% accuracy and 74% fewer tokens (~4x throughput per GPU).</a:t>
             </a:r>
             <a:endParaRPr lang="en-US" sz="1200" dirty="0"/>
           </a:p>
@@ -6170,7 +6170,7 @@
                 <a:ea typeface="Calibri" pitchFamily="34" charset="-122"/>
                 <a:cs typeface="Calibri" pitchFamily="34" charset="-120"/>
               </a:rPr>
-              <a:t>74% fewer tokens ≈ 4x throughput per GPU. Repeat questions become zero-GPU cache hits. The model improves nightly from human feedback in ~60s of GPU time — no ML team in the loop.</a:t>
+              <a:t>Low-trust answers escalate to the right on-call expert via MCP with an auto ITSM ticket — never reaching the customer. Repeat questions become zero-GPU cache hits, and the model improves nightly from human feedback in ~60s of GPU time, with no ML team in the loop.</a:t>
             </a:r>
             <a:endParaRPr lang="en-US" sz="1200" dirty="0"/>
           </a:p>
@@ -6404,7 +6404,7 @@
                 <a:ea typeface="Calibri" pitchFamily="34" charset="-122"/>
                 <a:cs typeface="Calibri" pitchFamily="34" charset="-120"/>
               </a:rPr>
-              <a:t>DEMO FLOW  (what the jury should notice)</a:t>
+              <a:t>DEMO FLOW — LIVE HIGHLIGHTS</a:t>
             </a:r>
             <a:endParaRPr lang="en-US" sz="1200" dirty="0"/>
           </a:p>

--- a/submission/TCS_AMD_AI_Hackathon_Submission_TruthLine.pptx
+++ b/submission/TCS_AMD_AI_Hackathon_Submission_TruthLine.pptx
@@ -12,9 +12,15 @@
     <p:sldId id="260" r:id="rId6"/>
     <p:sldId id="261" r:id="rId7"/>
     <p:sldId id="262" r:id="rId8"/>
+    <p:sldId id="263" r:id="rId9"/>
+    <p:sldId id="264" r:id="rId10"/>
+    <p:sldId id="265" r:id="rId11"/>
+    <p:sldId id="266" r:id="rId12"/>
+    <p:sldId id="267" r:id="rId13"/>
+    <p:sldId id="268" r:id="rId14"/>
   </p:sldIdLst>
   <p:notesMasterIdLst>
-    <p:notesMasterId r:id="rId9"/>
+    <p:notesMasterId r:id="rId15"/>
   </p:notesMasterIdLst>
   <p:sldSz cx="12191695" cy="6858000"/>
   <p:notesSz cx="6858000" cy="12191695"/>
@@ -550,6 +556,358 @@
 </p:notes>
 </file>
 
+<file path=ppt/notesSlides/notesSlide10.xml><?xml version="1.0" encoding="utf-8"?>
+<p:notes xmlns:a="http://schemas.openxmlformats.org/drawingml/2006/main" xmlns:r="http://schemas.openxmlformats.org/officeDocument/2006/relationships" xmlns:p="http://schemas.openxmlformats.org/presentationml/2006/main">
+  <p:cSld>
+    <p:spTree>
+      <p:nvGrpSpPr>
+        <p:cNvPr id="1" name=""/>
+        <p:cNvGrpSpPr/>
+        <p:nvPr/>
+      </p:nvGrpSpPr>
+      <p:grpSpPr>
+        <a:xfrm>
+          <a:off x="0" y="0"/>
+          <a:ext cx="0" cy="0"/>
+          <a:chOff x="0" y="0"/>
+          <a:chExt cx="0" cy="0"/>
+        </a:xfrm>
+      </p:grpSpPr>
+      <p:sp>
+        <p:nvSpPr>
+          <p:cNvPr id="2" name="Slide Image Placeholder 1"/>
+          <p:cNvSpPr>
+            <a:spLocks noGrp="1" noRot="1" noChangeAspect="1"/>
+          </p:cNvSpPr>
+          <p:nvPr>
+            <p:ph type="sldImg"/>
+          </p:nvPr>
+        </p:nvSpPr>
+        <p:spPr/>
+      </p:sp>
+      <p:sp>
+        <p:nvSpPr>
+          <p:cNvPr id="3" name="Notes Placeholder 2"/>
+          <p:cNvSpPr>
+            <a:spLocks noGrp="1"/>
+          </p:cNvSpPr>
+          <p:nvPr>
+            <p:ph type="body" idx="1"/>
+          </p:nvPr>
+        </p:nvSpPr>
+        <p:spPr/>
+        <p:txBody>
+          <a:bodyPr/>
+          <a:lstStyle/>
+          <a:p>
+            <a:r>
+              <a:rPr lang="en-US" dirty="0"/>
+              <a:t/>
+            </a:r>
+            <a:endParaRPr lang="en-US" dirty="0"/>
+          </a:p>
+        </p:txBody>
+      </p:sp>
+      <p:sp>
+        <p:nvSpPr>
+          <p:cNvPr id="4" name="Slide Number Placeholder 3"/>
+          <p:cNvSpPr>
+            <a:spLocks noGrp="1"/>
+          </p:cNvSpPr>
+          <p:nvPr>
+            <p:ph type="sldNum" sz="quarter" idx="10"/>
+          </p:nvPr>
+        </p:nvSpPr>
+        <p:spPr/>
+        <p:txBody>
+          <a:bodyPr/>
+          <a:lstStyle/>
+          <a:p>
+            <a:fld id="{F7021451-1387-4CA6-816F-3879F97B5CBC}" type="slidenum">
+              <a:rPr lang="en-US"/>
+              <a:t>10</a:t>
+            </a:fld>
+            <a:endParaRPr lang="en-US"/>
+          </a:p>
+        </p:txBody>
+      </p:sp>
+    </p:spTree>
+    <p:extLst>
+      <p:ext uri="{BB962C8B-B14F-4D97-AF65-F5344CB8AC3E}">
+        <p14:creationId xmlns:p14="http://schemas.microsoft.com/office/powerpoint/2010/main" val="1024086991"/>
+      </p:ext>
+    </p:extLst>
+  </p:cSld>
+  <p:clrMapOvr>
+    <a:masterClrMapping/>
+  </p:clrMapOvr>
+</p:notes>
+</file>
+
+<file path=ppt/notesSlides/notesSlide11.xml><?xml version="1.0" encoding="utf-8"?>
+<p:notes xmlns:a="http://schemas.openxmlformats.org/drawingml/2006/main" xmlns:r="http://schemas.openxmlformats.org/officeDocument/2006/relationships" xmlns:p="http://schemas.openxmlformats.org/presentationml/2006/main">
+  <p:cSld>
+    <p:spTree>
+      <p:nvGrpSpPr>
+        <p:cNvPr id="1" name=""/>
+        <p:cNvGrpSpPr/>
+        <p:nvPr/>
+      </p:nvGrpSpPr>
+      <p:grpSpPr>
+        <a:xfrm>
+          <a:off x="0" y="0"/>
+          <a:ext cx="0" cy="0"/>
+          <a:chOff x="0" y="0"/>
+          <a:chExt cx="0" cy="0"/>
+        </a:xfrm>
+      </p:grpSpPr>
+      <p:sp>
+        <p:nvSpPr>
+          <p:cNvPr id="2" name="Slide Image Placeholder 1"/>
+          <p:cNvSpPr>
+            <a:spLocks noGrp="1" noRot="1" noChangeAspect="1"/>
+          </p:cNvSpPr>
+          <p:nvPr>
+            <p:ph type="sldImg"/>
+          </p:nvPr>
+        </p:nvSpPr>
+        <p:spPr/>
+      </p:sp>
+      <p:sp>
+        <p:nvSpPr>
+          <p:cNvPr id="3" name="Notes Placeholder 2"/>
+          <p:cNvSpPr>
+            <a:spLocks noGrp="1"/>
+          </p:cNvSpPr>
+          <p:nvPr>
+            <p:ph type="body" idx="1"/>
+          </p:nvPr>
+        </p:nvSpPr>
+        <p:spPr/>
+        <p:txBody>
+          <a:bodyPr/>
+          <a:lstStyle/>
+          <a:p>
+            <a:r>
+              <a:rPr lang="en-US" dirty="0"/>
+              <a:t/>
+            </a:r>
+            <a:endParaRPr lang="en-US" dirty="0"/>
+          </a:p>
+        </p:txBody>
+      </p:sp>
+      <p:sp>
+        <p:nvSpPr>
+          <p:cNvPr id="4" name="Slide Number Placeholder 3"/>
+          <p:cNvSpPr>
+            <a:spLocks noGrp="1"/>
+          </p:cNvSpPr>
+          <p:nvPr>
+            <p:ph type="sldNum" sz="quarter" idx="10"/>
+          </p:nvPr>
+        </p:nvSpPr>
+        <p:spPr/>
+        <p:txBody>
+          <a:bodyPr/>
+          <a:lstStyle/>
+          <a:p>
+            <a:fld id="{F7021451-1387-4CA6-816F-3879F97B5CBC}" type="slidenum">
+              <a:rPr lang="en-US"/>
+              <a:t>11</a:t>
+            </a:fld>
+            <a:endParaRPr lang="en-US"/>
+          </a:p>
+        </p:txBody>
+      </p:sp>
+    </p:spTree>
+    <p:extLst>
+      <p:ext uri="{BB962C8B-B14F-4D97-AF65-F5344CB8AC3E}">
+        <p14:creationId xmlns:p14="http://schemas.microsoft.com/office/powerpoint/2010/main" val="1024086991"/>
+      </p:ext>
+    </p:extLst>
+  </p:cSld>
+  <p:clrMapOvr>
+    <a:masterClrMapping/>
+  </p:clrMapOvr>
+</p:notes>
+</file>
+
+<file path=ppt/notesSlides/notesSlide12.xml><?xml version="1.0" encoding="utf-8"?>
+<p:notes xmlns:a="http://schemas.openxmlformats.org/drawingml/2006/main" xmlns:r="http://schemas.openxmlformats.org/officeDocument/2006/relationships" xmlns:p="http://schemas.openxmlformats.org/presentationml/2006/main">
+  <p:cSld>
+    <p:spTree>
+      <p:nvGrpSpPr>
+        <p:cNvPr id="1" name=""/>
+        <p:cNvGrpSpPr/>
+        <p:nvPr/>
+      </p:nvGrpSpPr>
+      <p:grpSpPr>
+        <a:xfrm>
+          <a:off x="0" y="0"/>
+          <a:ext cx="0" cy="0"/>
+          <a:chOff x="0" y="0"/>
+          <a:chExt cx="0" cy="0"/>
+        </a:xfrm>
+      </p:grpSpPr>
+      <p:sp>
+        <p:nvSpPr>
+          <p:cNvPr id="2" name="Slide Image Placeholder 1"/>
+          <p:cNvSpPr>
+            <a:spLocks noGrp="1" noRot="1" noChangeAspect="1"/>
+          </p:cNvSpPr>
+          <p:nvPr>
+            <p:ph type="sldImg"/>
+          </p:nvPr>
+        </p:nvSpPr>
+        <p:spPr/>
+      </p:sp>
+      <p:sp>
+        <p:nvSpPr>
+          <p:cNvPr id="3" name="Notes Placeholder 2"/>
+          <p:cNvSpPr>
+            <a:spLocks noGrp="1"/>
+          </p:cNvSpPr>
+          <p:nvPr>
+            <p:ph type="body" idx="1"/>
+          </p:nvPr>
+        </p:nvSpPr>
+        <p:spPr/>
+        <p:txBody>
+          <a:bodyPr/>
+          <a:lstStyle/>
+          <a:p>
+            <a:r>
+              <a:rPr lang="en-US" dirty="0"/>
+              <a:t/>
+            </a:r>
+            <a:endParaRPr lang="en-US" dirty="0"/>
+          </a:p>
+        </p:txBody>
+      </p:sp>
+      <p:sp>
+        <p:nvSpPr>
+          <p:cNvPr id="4" name="Slide Number Placeholder 3"/>
+          <p:cNvSpPr>
+            <a:spLocks noGrp="1"/>
+          </p:cNvSpPr>
+          <p:nvPr>
+            <p:ph type="sldNum" sz="quarter" idx="10"/>
+          </p:nvPr>
+        </p:nvSpPr>
+        <p:spPr/>
+        <p:txBody>
+          <a:bodyPr/>
+          <a:lstStyle/>
+          <a:p>
+            <a:fld id="{F7021451-1387-4CA6-816F-3879F97B5CBC}" type="slidenum">
+              <a:rPr lang="en-US"/>
+              <a:t>12</a:t>
+            </a:fld>
+            <a:endParaRPr lang="en-US"/>
+          </a:p>
+        </p:txBody>
+      </p:sp>
+    </p:spTree>
+    <p:extLst>
+      <p:ext uri="{BB962C8B-B14F-4D97-AF65-F5344CB8AC3E}">
+        <p14:creationId xmlns:p14="http://schemas.microsoft.com/office/powerpoint/2010/main" val="1024086991"/>
+      </p:ext>
+    </p:extLst>
+  </p:cSld>
+  <p:clrMapOvr>
+    <a:masterClrMapping/>
+  </p:clrMapOvr>
+</p:notes>
+</file>
+
+<file path=ppt/notesSlides/notesSlide13.xml><?xml version="1.0" encoding="utf-8"?>
+<p:notes xmlns:a="http://schemas.openxmlformats.org/drawingml/2006/main" xmlns:r="http://schemas.openxmlformats.org/officeDocument/2006/relationships" xmlns:p="http://schemas.openxmlformats.org/presentationml/2006/main">
+  <p:cSld>
+    <p:spTree>
+      <p:nvGrpSpPr>
+        <p:cNvPr id="1" name=""/>
+        <p:cNvGrpSpPr/>
+        <p:nvPr/>
+      </p:nvGrpSpPr>
+      <p:grpSpPr>
+        <a:xfrm>
+          <a:off x="0" y="0"/>
+          <a:ext cx="0" cy="0"/>
+          <a:chOff x="0" y="0"/>
+          <a:chExt cx="0" cy="0"/>
+        </a:xfrm>
+      </p:grpSpPr>
+      <p:sp>
+        <p:nvSpPr>
+          <p:cNvPr id="2" name="Slide Image Placeholder 1"/>
+          <p:cNvSpPr>
+            <a:spLocks noGrp="1" noRot="1" noChangeAspect="1"/>
+          </p:cNvSpPr>
+          <p:nvPr>
+            <p:ph type="sldImg"/>
+          </p:nvPr>
+        </p:nvSpPr>
+        <p:spPr/>
+      </p:sp>
+      <p:sp>
+        <p:nvSpPr>
+          <p:cNvPr id="3" name="Notes Placeholder 2"/>
+          <p:cNvSpPr>
+            <a:spLocks noGrp="1"/>
+          </p:cNvSpPr>
+          <p:nvPr>
+            <p:ph type="body" idx="1"/>
+          </p:nvPr>
+        </p:nvSpPr>
+        <p:spPr/>
+        <p:txBody>
+          <a:bodyPr/>
+          <a:lstStyle/>
+          <a:p>
+            <a:r>
+              <a:rPr lang="en-US" dirty="0"/>
+              <a:t/>
+            </a:r>
+            <a:endParaRPr lang="en-US" dirty="0"/>
+          </a:p>
+        </p:txBody>
+      </p:sp>
+      <p:sp>
+        <p:nvSpPr>
+          <p:cNvPr id="4" name="Slide Number Placeholder 3"/>
+          <p:cNvSpPr>
+            <a:spLocks noGrp="1"/>
+          </p:cNvSpPr>
+          <p:nvPr>
+            <p:ph type="sldNum" sz="quarter" idx="10"/>
+          </p:nvPr>
+        </p:nvSpPr>
+        <p:spPr/>
+        <p:txBody>
+          <a:bodyPr/>
+          <a:lstStyle/>
+          <a:p>
+            <a:fld id="{F7021451-1387-4CA6-816F-3879F97B5CBC}" type="slidenum">
+              <a:rPr lang="en-US"/>
+              <a:t>13</a:t>
+            </a:fld>
+            <a:endParaRPr lang="en-US"/>
+          </a:p>
+        </p:txBody>
+      </p:sp>
+    </p:spTree>
+    <p:extLst>
+      <p:ext uri="{BB962C8B-B14F-4D97-AF65-F5344CB8AC3E}">
+        <p14:creationId xmlns:p14="http://schemas.microsoft.com/office/powerpoint/2010/main" val="1024086991"/>
+      </p:ext>
+    </p:extLst>
+  </p:cSld>
+  <p:clrMapOvr>
+    <a:masterClrMapping/>
+  </p:clrMapOvr>
+</p:notes>
+</file>
+
 <file path=ppt/notesSlides/notesSlide2.xml><?xml version="1.0" encoding="utf-8"?>
 <p:notes xmlns:a="http://schemas.openxmlformats.org/drawingml/2006/main" xmlns:r="http://schemas.openxmlformats.org/officeDocument/2006/relationships" xmlns:p="http://schemas.openxmlformats.org/presentationml/2006/main">
   <p:cSld>
@@ -1060,6 +1418,182 @@
             <a:fld id="{F7021451-1387-4CA6-816F-3879F97B5CBC}" type="slidenum">
               <a:rPr lang="en-US"/>
               <a:t>7</a:t>
+            </a:fld>
+            <a:endParaRPr lang="en-US"/>
+          </a:p>
+        </p:txBody>
+      </p:sp>
+    </p:spTree>
+    <p:extLst>
+      <p:ext uri="{BB962C8B-B14F-4D97-AF65-F5344CB8AC3E}">
+        <p14:creationId xmlns:p14="http://schemas.microsoft.com/office/powerpoint/2010/main" val="1024086991"/>
+      </p:ext>
+    </p:extLst>
+  </p:cSld>
+  <p:clrMapOvr>
+    <a:masterClrMapping/>
+  </p:clrMapOvr>
+</p:notes>
+</file>
+
+<file path=ppt/notesSlides/notesSlide8.xml><?xml version="1.0" encoding="utf-8"?>
+<p:notes xmlns:a="http://schemas.openxmlformats.org/drawingml/2006/main" xmlns:r="http://schemas.openxmlformats.org/officeDocument/2006/relationships" xmlns:p="http://schemas.openxmlformats.org/presentationml/2006/main">
+  <p:cSld>
+    <p:spTree>
+      <p:nvGrpSpPr>
+        <p:cNvPr id="1" name=""/>
+        <p:cNvGrpSpPr/>
+        <p:nvPr/>
+      </p:nvGrpSpPr>
+      <p:grpSpPr>
+        <a:xfrm>
+          <a:off x="0" y="0"/>
+          <a:ext cx="0" cy="0"/>
+          <a:chOff x="0" y="0"/>
+          <a:chExt cx="0" cy="0"/>
+        </a:xfrm>
+      </p:grpSpPr>
+      <p:sp>
+        <p:nvSpPr>
+          <p:cNvPr id="2" name="Slide Image Placeholder 1"/>
+          <p:cNvSpPr>
+            <a:spLocks noGrp="1" noRot="1" noChangeAspect="1"/>
+          </p:cNvSpPr>
+          <p:nvPr>
+            <p:ph type="sldImg"/>
+          </p:nvPr>
+        </p:nvSpPr>
+        <p:spPr/>
+      </p:sp>
+      <p:sp>
+        <p:nvSpPr>
+          <p:cNvPr id="3" name="Notes Placeholder 2"/>
+          <p:cNvSpPr>
+            <a:spLocks noGrp="1"/>
+          </p:cNvSpPr>
+          <p:nvPr>
+            <p:ph type="body" idx="1"/>
+          </p:nvPr>
+        </p:nvSpPr>
+        <p:spPr/>
+        <p:txBody>
+          <a:bodyPr/>
+          <a:lstStyle/>
+          <a:p>
+            <a:r>
+              <a:rPr lang="en-US" dirty="0"/>
+              <a:t/>
+            </a:r>
+            <a:endParaRPr lang="en-US" dirty="0"/>
+          </a:p>
+        </p:txBody>
+      </p:sp>
+      <p:sp>
+        <p:nvSpPr>
+          <p:cNvPr id="4" name="Slide Number Placeholder 3"/>
+          <p:cNvSpPr>
+            <a:spLocks noGrp="1"/>
+          </p:cNvSpPr>
+          <p:nvPr>
+            <p:ph type="sldNum" sz="quarter" idx="10"/>
+          </p:nvPr>
+        </p:nvSpPr>
+        <p:spPr/>
+        <p:txBody>
+          <a:bodyPr/>
+          <a:lstStyle/>
+          <a:p>
+            <a:fld id="{F7021451-1387-4CA6-816F-3879F97B5CBC}" type="slidenum">
+              <a:rPr lang="en-US"/>
+              <a:t>8</a:t>
+            </a:fld>
+            <a:endParaRPr lang="en-US"/>
+          </a:p>
+        </p:txBody>
+      </p:sp>
+    </p:spTree>
+    <p:extLst>
+      <p:ext uri="{BB962C8B-B14F-4D97-AF65-F5344CB8AC3E}">
+        <p14:creationId xmlns:p14="http://schemas.microsoft.com/office/powerpoint/2010/main" val="1024086991"/>
+      </p:ext>
+    </p:extLst>
+  </p:cSld>
+  <p:clrMapOvr>
+    <a:masterClrMapping/>
+  </p:clrMapOvr>
+</p:notes>
+</file>
+
+<file path=ppt/notesSlides/notesSlide9.xml><?xml version="1.0" encoding="utf-8"?>
+<p:notes xmlns:a="http://schemas.openxmlformats.org/drawingml/2006/main" xmlns:r="http://schemas.openxmlformats.org/officeDocument/2006/relationships" xmlns:p="http://schemas.openxmlformats.org/presentationml/2006/main">
+  <p:cSld>
+    <p:spTree>
+      <p:nvGrpSpPr>
+        <p:cNvPr id="1" name=""/>
+        <p:cNvGrpSpPr/>
+        <p:nvPr/>
+      </p:nvGrpSpPr>
+      <p:grpSpPr>
+        <a:xfrm>
+          <a:off x="0" y="0"/>
+          <a:ext cx="0" cy="0"/>
+          <a:chOff x="0" y="0"/>
+          <a:chExt cx="0" cy="0"/>
+        </a:xfrm>
+      </p:grpSpPr>
+      <p:sp>
+        <p:nvSpPr>
+          <p:cNvPr id="2" name="Slide Image Placeholder 1"/>
+          <p:cNvSpPr>
+            <a:spLocks noGrp="1" noRot="1" noChangeAspect="1"/>
+          </p:cNvSpPr>
+          <p:nvPr>
+            <p:ph type="sldImg"/>
+          </p:nvPr>
+        </p:nvSpPr>
+        <p:spPr/>
+      </p:sp>
+      <p:sp>
+        <p:nvSpPr>
+          <p:cNvPr id="3" name="Notes Placeholder 2"/>
+          <p:cNvSpPr>
+            <a:spLocks noGrp="1"/>
+          </p:cNvSpPr>
+          <p:nvPr>
+            <p:ph type="body" idx="1"/>
+          </p:nvPr>
+        </p:nvSpPr>
+        <p:spPr/>
+        <p:txBody>
+          <a:bodyPr/>
+          <a:lstStyle/>
+          <a:p>
+            <a:r>
+              <a:rPr lang="en-US" dirty="0"/>
+              <a:t/>
+            </a:r>
+            <a:endParaRPr lang="en-US" dirty="0"/>
+          </a:p>
+        </p:txBody>
+      </p:sp>
+      <p:sp>
+        <p:nvSpPr>
+          <p:cNvPr id="4" name="Slide Number Placeholder 3"/>
+          <p:cNvSpPr>
+            <a:spLocks noGrp="1"/>
+          </p:cNvSpPr>
+          <p:nvPr>
+            <p:ph type="sldNum" sz="quarter" idx="10"/>
+          </p:nvPr>
+        </p:nvSpPr>
+        <p:spPr/>
+        <p:txBody>
+          <a:bodyPr/>
+          <a:lstStyle/>
+          <a:p>
+            <a:fld id="{F7021451-1387-4CA6-816F-3879F97B5CBC}" type="slidenum">
+              <a:rPr lang="en-US"/>
+              <a:t>9</a:t>
             </a:fld>
             <a:endParaRPr lang="en-US"/>
           </a:p>
@@ -1657,6 +2191,4018 @@
 </p:sld>
 </file>
 
+<file path=ppt/slides/slide10.xml><?xml version="1.0" encoding="utf-8"?>
+<p:sld xmlns:a="http://schemas.openxmlformats.org/drawingml/2006/main" xmlns:r="http://schemas.openxmlformats.org/officeDocument/2006/relationships" xmlns:p="http://schemas.openxmlformats.org/presentationml/2006/main">
+  <p:cSld name="Slide 10">
+    <p:bg>
+      <p:bgPr>
+        <a:solidFill>
+          <a:srgbClr val="121212"/>
+        </a:solidFill>
+      </p:bgPr>
+    </p:bg>
+    <p:spTree>
+      <p:nvGrpSpPr>
+        <p:cNvPr id="1" name=""/>
+        <p:cNvGrpSpPr/>
+        <p:nvPr/>
+      </p:nvGrpSpPr>
+      <p:grpSpPr>
+        <a:xfrm>
+          <a:off x="0" y="0"/>
+          <a:ext cx="0" cy="0"/>
+          <a:chOff x="0" y="0"/>
+          <a:chExt cx="0" cy="0"/>
+        </a:xfrm>
+      </p:grpSpPr>
+      <p:sp>
+        <p:nvSpPr>
+          <p:cNvPr id="2" name="Shape 0"/>
+          <p:cNvSpPr/>
+          <p:nvPr/>
+        </p:nvSpPr>
+        <p:spPr>
+          <a:xfrm>
+            <a:off x="502920" y="429768"/>
+            <a:ext cx="128016" cy="128016"/>
+          </a:xfrm>
+          <a:prstGeom prst="rect">
+            <a:avLst/>
+          </a:prstGeom>
+          <a:solidFill>
+            <a:srgbClr val="ED1C24"/>
+          </a:solidFill>
+          <a:ln/>
+        </p:spPr>
+      </p:sp>
+      <p:sp>
+        <p:nvSpPr>
+          <p:cNvPr id="3" name="Text 1"/>
+          <p:cNvSpPr/>
+          <p:nvPr/>
+        </p:nvSpPr>
+        <p:spPr>
+          <a:xfrm>
+            <a:off x="722376" y="329184"/>
+            <a:ext cx="10058400" cy="310896"/>
+          </a:xfrm>
+          <a:prstGeom prst="rect">
+            <a:avLst/>
+          </a:prstGeom>
+          <a:noFill/>
+          <a:ln/>
+        </p:spPr>
+        <p:txBody>
+          <a:bodyPr wrap="square" rtlCol="0" anchor="ctr"/>
+          <a:lstStyle/>
+          <a:p>
+            <a:pPr indent="0" marL="0">
+              <a:buNone/>
+            </a:pPr>
+            <a:r>
+              <a:rPr lang="en-US" sz="1150" b="1" spc="300" kern="0" dirty="0">
+                <a:solidFill>
+                  <a:srgbClr val="A9A399"/>
+                </a:solidFill>
+                <a:latin typeface="Calibri" pitchFamily="34" charset="0"/>
+                <a:ea typeface="Calibri" pitchFamily="34" charset="-122"/>
+                <a:cs typeface="Calibri" pitchFamily="34" charset="-120"/>
+              </a:rPr>
+              <a:t>ARCHITECTURE · STEP 4 OF 6</a:t>
+            </a:r>
+            <a:endParaRPr lang="en-US" sz="1150" dirty="0"/>
+          </a:p>
+        </p:txBody>
+      </p:sp>
+      <p:sp>
+        <p:nvSpPr>
+          <p:cNvPr id="4" name="Text 2"/>
+          <p:cNvSpPr/>
+          <p:nvPr/>
+        </p:nvSpPr>
+        <p:spPr>
+          <a:xfrm>
+            <a:off x="457200" y="658368"/>
+            <a:ext cx="11247120" cy="548640"/>
+          </a:xfrm>
+          <a:prstGeom prst="rect">
+            <a:avLst/>
+          </a:prstGeom>
+          <a:noFill/>
+          <a:ln/>
+        </p:spPr>
+        <p:txBody>
+          <a:bodyPr wrap="square" rtlCol="0" anchor="ctr"/>
+          <a:lstStyle/>
+          <a:p>
+            <a:pPr indent="0" marL="0">
+              <a:buNone/>
+            </a:pPr>
+            <a:r>
+              <a:rPr lang="en-US" sz="2500" b="1" dirty="0">
+                <a:solidFill>
+                  <a:srgbClr val="F4F1EA"/>
+                </a:solidFill>
+                <a:latin typeface="Arial Black" pitchFamily="34" charset="0"/>
+                <a:ea typeface="Arial Black" pitchFamily="34" charset="-122"/>
+                <a:cs typeface="Arial Black" pitchFamily="34" charset="-120"/>
+              </a:rPr>
+              <a:t>Six decisions that kill hallucination</a:t>
+            </a:r>
+            <a:endParaRPr lang="en-US" sz="2500" dirty="0"/>
+          </a:p>
+        </p:txBody>
+      </p:sp>
+      <p:sp>
+        <p:nvSpPr>
+          <p:cNvPr id="5" name="Shape 3"/>
+          <p:cNvSpPr/>
+          <p:nvPr/>
+        </p:nvSpPr>
+        <p:spPr>
+          <a:xfrm>
+            <a:off x="457200" y="2286000"/>
+            <a:ext cx="1207008" cy="868680"/>
+          </a:xfrm>
+          <a:prstGeom prst="roundRect">
+            <a:avLst>
+              <a:gd name="adj" fmla="val 7368"/>
+            </a:avLst>
+          </a:prstGeom>
+          <a:solidFill>
+            <a:srgbClr val="1D1D1D"/>
+          </a:solidFill>
+          <a:ln w="12700">
+            <a:solidFill>
+              <a:srgbClr val="3A3A3A"/>
+            </a:solidFill>
+            <a:prstDash val="solid"/>
+          </a:ln>
+        </p:spPr>
+      </p:sp>
+      <p:sp>
+        <p:nvSpPr>
+          <p:cNvPr id="6" name="Text 4"/>
+          <p:cNvSpPr/>
+          <p:nvPr/>
+        </p:nvSpPr>
+        <p:spPr>
+          <a:xfrm>
+            <a:off x="512064" y="2340864"/>
+            <a:ext cx="1097280" cy="758952"/>
+          </a:xfrm>
+          <a:prstGeom prst="rect">
+            <a:avLst/>
+          </a:prstGeom>
+          <a:noFill/>
+          <a:ln/>
+        </p:spPr>
+        <p:txBody>
+          <a:bodyPr wrap="square" rtlCol="0" anchor="ctr"/>
+          <a:lstStyle/>
+          <a:p>
+            <a:pPr algn="ctr" indent="0" marL="0">
+              <a:lnSpc>
+                <a:spcPts val="1300"/>
+              </a:lnSpc>
+              <a:buNone/>
+            </a:pPr>
+            <a:r>
+              <a:rPr lang="en-US" sz="1250" b="1" dirty="0">
+                <a:solidFill>
+                  <a:srgbClr val="F4F1EA"/>
+                </a:solidFill>
+                <a:latin typeface="Calibri" pitchFamily="34" charset="0"/>
+                <a:ea typeface="Calibri" pitchFamily="34" charset="-122"/>
+                <a:cs typeface="Calibri" pitchFamily="34" charset="-120"/>
+              </a:rPr>
+              <a:t>Customer
+</a:t>
+            </a:r>
+            <a:pPr algn="ctr" indent="0" marL="0">
+              <a:lnSpc>
+                <a:spcPts val="1300"/>
+              </a:lnSpc>
+              <a:buNone/>
+            </a:pPr>
+            <a:r>
+              <a:rPr lang="en-US" sz="1000" dirty="0">
+                <a:solidFill>
+                  <a:srgbClr val="A9A399"/>
+                </a:solidFill>
+                <a:latin typeface="Calibri" pitchFamily="34" charset="0"/>
+                <a:ea typeface="Calibri" pitchFamily="34" charset="-122"/>
+                <a:cs typeface="Calibri" pitchFamily="34" charset="-120"/>
+              </a:rPr>
+              <a:t>query</a:t>
+            </a:r>
+            <a:endParaRPr lang="en-US" sz="1250" dirty="0"/>
+          </a:p>
+        </p:txBody>
+      </p:sp>
+      <p:sp>
+        <p:nvSpPr>
+          <p:cNvPr id="7" name="Shape 5"/>
+          <p:cNvSpPr/>
+          <p:nvPr/>
+        </p:nvSpPr>
+        <p:spPr>
+          <a:xfrm>
+            <a:off x="5120640" y="2286000"/>
+            <a:ext cx="1325880" cy="868680"/>
+          </a:xfrm>
+          <a:prstGeom prst="roundRect">
+            <a:avLst>
+              <a:gd name="adj" fmla="val 7368"/>
+            </a:avLst>
+          </a:prstGeom>
+          <a:solidFill>
+            <a:srgbClr val="1D1D1D"/>
+          </a:solidFill>
+          <a:ln w="12700">
+            <a:solidFill>
+              <a:srgbClr val="3A3A3A"/>
+            </a:solidFill>
+            <a:prstDash val="solid"/>
+          </a:ln>
+        </p:spPr>
+      </p:sp>
+      <p:sp>
+        <p:nvSpPr>
+          <p:cNvPr id="8" name="Text 6"/>
+          <p:cNvSpPr/>
+          <p:nvPr/>
+        </p:nvSpPr>
+        <p:spPr>
+          <a:xfrm>
+            <a:off x="5175504" y="2340864"/>
+            <a:ext cx="1216152" cy="758952"/>
+          </a:xfrm>
+          <a:prstGeom prst="rect">
+            <a:avLst/>
+          </a:prstGeom>
+          <a:noFill/>
+          <a:ln/>
+        </p:spPr>
+        <p:txBody>
+          <a:bodyPr wrap="square" rtlCol="0" anchor="ctr"/>
+          <a:lstStyle/>
+          <a:p>
+            <a:pPr algn="ctr" indent="0" marL="0">
+              <a:lnSpc>
+                <a:spcPts val="1300"/>
+              </a:lnSpc>
+              <a:buNone/>
+            </a:pPr>
+            <a:r>
+              <a:rPr lang="en-US" sz="1250" b="1" dirty="0">
+                <a:solidFill>
+                  <a:srgbClr val="F4F1EA"/>
+                </a:solidFill>
+                <a:latin typeface="Calibri" pitchFamily="34" charset="0"/>
+                <a:ea typeface="Calibri" pitchFamily="34" charset="-122"/>
+                <a:cs typeface="Calibri" pitchFamily="34" charset="-120"/>
+              </a:rPr>
+              <a:t>Model router
+</a:t>
+            </a:r>
+            <a:pPr algn="ctr" indent="0" marL="0">
+              <a:lnSpc>
+                <a:spcPts val="1300"/>
+              </a:lnSpc>
+              <a:buNone/>
+            </a:pPr>
+            <a:r>
+              <a:rPr lang="en-US" sz="1000" dirty="0">
+                <a:solidFill>
+                  <a:srgbClr val="A9A399"/>
+                </a:solidFill>
+                <a:latin typeface="Calibri" pitchFamily="34" charset="0"/>
+                <a:ea typeface="Calibri" pitchFamily="34" charset="-122"/>
+                <a:cs typeface="Calibri" pitchFamily="34" charset="-120"/>
+              </a:rPr>
+              <a:t>right-sized</a:t>
+            </a:r>
+            <a:endParaRPr lang="en-US" sz="1250" dirty="0"/>
+          </a:p>
+        </p:txBody>
+      </p:sp>
+      <p:sp>
+        <p:nvSpPr>
+          <p:cNvPr id="9" name="Shape 7"/>
+          <p:cNvSpPr/>
+          <p:nvPr/>
+        </p:nvSpPr>
+        <p:spPr>
+          <a:xfrm>
+            <a:off x="6812280" y="1481328"/>
+            <a:ext cx="1645920" cy="868680"/>
+          </a:xfrm>
+          <a:prstGeom prst="roundRect">
+            <a:avLst>
+              <a:gd name="adj" fmla="val 7368"/>
+            </a:avLst>
+          </a:prstGeom>
+          <a:solidFill>
+            <a:srgbClr val="1D1D1D"/>
+          </a:solidFill>
+          <a:ln w="12700">
+            <a:solidFill>
+              <a:srgbClr val="3A3A3A"/>
+            </a:solidFill>
+            <a:prstDash val="solid"/>
+          </a:ln>
+        </p:spPr>
+      </p:sp>
+      <p:sp>
+        <p:nvSpPr>
+          <p:cNvPr id="10" name="Text 8"/>
+          <p:cNvSpPr/>
+          <p:nvPr/>
+        </p:nvSpPr>
+        <p:spPr>
+          <a:xfrm>
+            <a:off x="6867144" y="1536192"/>
+            <a:ext cx="1536192" cy="758952"/>
+          </a:xfrm>
+          <a:prstGeom prst="rect">
+            <a:avLst/>
+          </a:prstGeom>
+          <a:noFill/>
+          <a:ln/>
+        </p:spPr>
+        <p:txBody>
+          <a:bodyPr wrap="square" rtlCol="0" anchor="ctr"/>
+          <a:lstStyle/>
+          <a:p>
+            <a:pPr algn="ctr" indent="0" marL="0">
+              <a:lnSpc>
+                <a:spcPts val="1300"/>
+              </a:lnSpc>
+              <a:buNone/>
+            </a:pPr>
+            <a:r>
+              <a:rPr lang="en-US" sz="1250" b="1" dirty="0">
+                <a:solidFill>
+                  <a:srgbClr val="F4F1EA"/>
+                </a:solidFill>
+                <a:latin typeface="Calibri" pitchFamily="34" charset="0"/>
+                <a:ea typeface="Calibri" pitchFamily="34" charset="-122"/>
+                <a:cs typeface="Calibri" pitchFamily="34" charset="-120"/>
+              </a:rPr>
+              <a:t>Fast lane
+</a:t>
+            </a:r>
+            <a:pPr algn="ctr" indent="0" marL="0">
+              <a:lnSpc>
+                <a:spcPts val="1300"/>
+              </a:lnSpc>
+              <a:buNone/>
+            </a:pPr>
+            <a:r>
+              <a:rPr lang="en-US" sz="1000" dirty="0">
+                <a:solidFill>
+                  <a:srgbClr val="A9A399"/>
+                </a:solidFill>
+                <a:latin typeface="Calibri" pitchFamily="34" charset="0"/>
+                <a:ea typeface="Calibri" pitchFamily="34" charset="-122"/>
+                <a:cs typeface="Calibri" pitchFamily="34" charset="-120"/>
+              </a:rPr>
+              <a:t>1.5B fine-tuned</a:t>
+            </a:r>
+            <a:endParaRPr lang="en-US" sz="1250" dirty="0"/>
+          </a:p>
+        </p:txBody>
+      </p:sp>
+      <p:sp>
+        <p:nvSpPr>
+          <p:cNvPr id="11" name="Shape 9"/>
+          <p:cNvSpPr/>
+          <p:nvPr/>
+        </p:nvSpPr>
+        <p:spPr>
+          <a:xfrm>
+            <a:off x="6812280" y="3127248"/>
+            <a:ext cx="1645920" cy="868680"/>
+          </a:xfrm>
+          <a:prstGeom prst="roundRect">
+            <a:avLst>
+              <a:gd name="adj" fmla="val 7368"/>
+            </a:avLst>
+          </a:prstGeom>
+          <a:solidFill>
+            <a:srgbClr val="1D1D1D"/>
+          </a:solidFill>
+          <a:ln w="12700">
+            <a:solidFill>
+              <a:srgbClr val="3A3A3A"/>
+            </a:solidFill>
+            <a:prstDash val="solid"/>
+          </a:ln>
+        </p:spPr>
+      </p:sp>
+      <p:sp>
+        <p:nvSpPr>
+          <p:cNvPr id="12" name="Text 10"/>
+          <p:cNvSpPr/>
+          <p:nvPr/>
+        </p:nvSpPr>
+        <p:spPr>
+          <a:xfrm>
+            <a:off x="6867144" y="3182112"/>
+            <a:ext cx="1536192" cy="758952"/>
+          </a:xfrm>
+          <a:prstGeom prst="rect">
+            <a:avLst/>
+          </a:prstGeom>
+          <a:noFill/>
+          <a:ln/>
+        </p:spPr>
+        <p:txBody>
+          <a:bodyPr wrap="square" rtlCol="0" anchor="ctr"/>
+          <a:lstStyle/>
+          <a:p>
+            <a:pPr algn="ctr" indent="0" marL="0">
+              <a:lnSpc>
+                <a:spcPts val="1300"/>
+              </a:lnSpc>
+              <a:buNone/>
+            </a:pPr>
+            <a:r>
+              <a:rPr lang="en-US" sz="1250" b="1" dirty="0">
+                <a:solidFill>
+                  <a:srgbClr val="F4F1EA"/>
+                </a:solidFill>
+                <a:latin typeface="Calibri" pitchFamily="34" charset="0"/>
+                <a:ea typeface="Calibri" pitchFamily="34" charset="-122"/>
+                <a:cs typeface="Calibri" pitchFamily="34" charset="-120"/>
+              </a:rPr>
+              <a:t>Expert lane
+</a:t>
+            </a:r>
+            <a:pPr algn="ctr" indent="0" marL="0">
+              <a:lnSpc>
+                <a:spcPts val="1300"/>
+              </a:lnSpc>
+              <a:buNone/>
+            </a:pPr>
+            <a:r>
+              <a:rPr lang="en-US" sz="1000" dirty="0">
+                <a:solidFill>
+                  <a:srgbClr val="A9A399"/>
+                </a:solidFill>
+                <a:latin typeface="Calibri" pitchFamily="34" charset="0"/>
+                <a:ea typeface="Calibri" pitchFamily="34" charset="-122"/>
+                <a:cs typeface="Calibri" pitchFamily="34" charset="-120"/>
+              </a:rPr>
+              <a:t>14B · vLLM</a:t>
+            </a:r>
+            <a:endParaRPr lang="en-US" sz="1250" dirty="0"/>
+          </a:p>
+        </p:txBody>
+      </p:sp>
+      <p:sp>
+        <p:nvSpPr>
+          <p:cNvPr id="13" name="Shape 11"/>
+          <p:cNvSpPr/>
+          <p:nvPr/>
+        </p:nvSpPr>
+        <p:spPr>
+          <a:xfrm>
+            <a:off x="10469880" y="1481328"/>
+            <a:ext cx="1554480" cy="868680"/>
+          </a:xfrm>
+          <a:prstGeom prst="roundRect">
+            <a:avLst>
+              <a:gd name="adj" fmla="val 7368"/>
+            </a:avLst>
+          </a:prstGeom>
+          <a:solidFill>
+            <a:srgbClr val="1D1D1D"/>
+          </a:solidFill>
+          <a:ln w="12700">
+            <a:solidFill>
+              <a:srgbClr val="3A3A3A"/>
+            </a:solidFill>
+            <a:prstDash val="solid"/>
+          </a:ln>
+        </p:spPr>
+      </p:sp>
+      <p:sp>
+        <p:nvSpPr>
+          <p:cNvPr id="14" name="Text 12"/>
+          <p:cNvSpPr/>
+          <p:nvPr/>
+        </p:nvSpPr>
+        <p:spPr>
+          <a:xfrm>
+            <a:off x="10561320" y="1527048"/>
+            <a:ext cx="1371600" cy="777240"/>
+          </a:xfrm>
+          <a:prstGeom prst="rect">
+            <a:avLst/>
+          </a:prstGeom>
+          <a:noFill/>
+          <a:ln/>
+        </p:spPr>
+        <p:txBody>
+          <a:bodyPr wrap="square" rtlCol="0" anchor="ctr"/>
+          <a:lstStyle/>
+          <a:p>
+            <a:pPr algn="ctr" indent="0" marL="0">
+              <a:buNone/>
+            </a:pPr>
+            <a:r>
+              <a:rPr lang="en-US" sz="1250" b="1" dirty="0">
+                <a:solidFill>
+                  <a:srgbClr val="F4F1EA"/>
+                </a:solidFill>
+                <a:latin typeface="Calibri" pitchFamily="34" charset="0"/>
+                <a:ea typeface="Calibri" pitchFamily="34" charset="-122"/>
+                <a:cs typeface="Calibri" pitchFamily="34" charset="-120"/>
+              </a:rPr>
+              <a:t>Answer</a:t>
+            </a:r>
+            <a:endParaRPr lang="en-US" sz="1250" dirty="0"/>
+          </a:p>
+        </p:txBody>
+      </p:sp>
+      <p:sp>
+        <p:nvSpPr>
+          <p:cNvPr id="15" name="Shape 13"/>
+          <p:cNvSpPr/>
+          <p:nvPr/>
+        </p:nvSpPr>
+        <p:spPr>
+          <a:xfrm>
+            <a:off x="3977640" y="4434840"/>
+            <a:ext cx="5486400" cy="640080"/>
+          </a:xfrm>
+          <a:prstGeom prst="roundRect">
+            <a:avLst>
+              <a:gd name="adj" fmla="val 10000"/>
+            </a:avLst>
+          </a:prstGeom>
+          <a:solidFill>
+            <a:srgbClr val="1D1D1D"/>
+          </a:solidFill>
+          <a:ln w="25400">
+            <a:solidFill>
+              <a:srgbClr val="ED1C24"/>
+            </a:solidFill>
+            <a:prstDash val="solid"/>
+          </a:ln>
+        </p:spPr>
+      </p:sp>
+      <p:sp>
+        <p:nvSpPr>
+          <p:cNvPr id="16" name="Text 14"/>
+          <p:cNvSpPr/>
+          <p:nvPr/>
+        </p:nvSpPr>
+        <p:spPr>
+          <a:xfrm>
+            <a:off x="4069080" y="4480560"/>
+            <a:ext cx="5303520" cy="548640"/>
+          </a:xfrm>
+          <a:prstGeom prst="rect">
+            <a:avLst/>
+          </a:prstGeom>
+          <a:noFill/>
+          <a:ln/>
+        </p:spPr>
+        <p:txBody>
+          <a:bodyPr wrap="square" rtlCol="0" anchor="ctr"/>
+          <a:lstStyle/>
+          <a:p>
+            <a:pPr algn="ctr" indent="0" marL="0">
+              <a:buNone/>
+            </a:pPr>
+            <a:r>
+              <a:rPr lang="en-US" sz="1200" b="1" dirty="0">
+                <a:solidFill>
+                  <a:srgbClr val="F4F1EA"/>
+                </a:solidFill>
+                <a:latin typeface="Calibri" pitchFamily="34" charset="0"/>
+                <a:ea typeface="Calibri" pitchFamily="34" charset="-122"/>
+                <a:cs typeface="Calibri" pitchFamily="34" charset="-120"/>
+              </a:rPr>
+              <a:t>Knowledge fabric — hybrid RAG (BM25 + vector, RRF) · MCP outage feed</a:t>
+            </a:r>
+            <a:endParaRPr lang="en-US" sz="1200" dirty="0"/>
+          </a:p>
+        </p:txBody>
+      </p:sp>
+      <p:sp>
+        <p:nvSpPr>
+          <p:cNvPr id="17" name="Shape 15"/>
+          <p:cNvSpPr/>
+          <p:nvPr/>
+        </p:nvSpPr>
+        <p:spPr>
+          <a:xfrm>
+            <a:off x="1664208" y="2720340"/>
+            <a:ext cx="3456432" cy="914"/>
+          </a:xfrm>
+          <a:prstGeom prst="line">
+            <a:avLst/>
+          </a:prstGeom>
+          <a:noFill/>
+          <a:ln w="19050">
+            <a:solidFill>
+              <a:srgbClr val="4A4A4A"/>
+            </a:solidFill>
+            <a:prstDash val="solid"/>
+            <a:tailEnd type="triangle"/>
+          </a:ln>
+        </p:spPr>
+      </p:sp>
+      <p:sp>
+        <p:nvSpPr>
+          <p:cNvPr id="18" name="Shape 16"/>
+          <p:cNvSpPr/>
+          <p:nvPr/>
+        </p:nvSpPr>
+        <p:spPr>
+          <a:xfrm flipV="1">
+            <a:off x="6446520" y="1915668"/>
+            <a:ext cx="365760" cy="694944"/>
+          </a:xfrm>
+          <a:prstGeom prst="line">
+            <a:avLst/>
+          </a:prstGeom>
+          <a:noFill/>
+          <a:ln w="19050">
+            <a:solidFill>
+              <a:srgbClr val="4A4A4A"/>
+            </a:solidFill>
+            <a:prstDash val="solid"/>
+            <a:tailEnd type="triangle"/>
+          </a:ln>
+        </p:spPr>
+      </p:sp>
+      <p:sp>
+        <p:nvSpPr>
+          <p:cNvPr id="19" name="Shape 17"/>
+          <p:cNvSpPr/>
+          <p:nvPr/>
+        </p:nvSpPr>
+        <p:spPr>
+          <a:xfrm>
+            <a:off x="6446520" y="2830068"/>
+            <a:ext cx="365760" cy="731520"/>
+          </a:xfrm>
+          <a:prstGeom prst="line">
+            <a:avLst/>
+          </a:prstGeom>
+          <a:noFill/>
+          <a:ln w="19050">
+            <a:solidFill>
+              <a:srgbClr val="4A4A4A"/>
+            </a:solidFill>
+            <a:prstDash val="solid"/>
+            <a:tailEnd type="triangle"/>
+          </a:ln>
+        </p:spPr>
+      </p:sp>
+      <p:sp>
+        <p:nvSpPr>
+          <p:cNvPr id="20" name="Shape 18"/>
+          <p:cNvSpPr/>
+          <p:nvPr/>
+        </p:nvSpPr>
+        <p:spPr>
+          <a:xfrm>
+            <a:off x="8458200" y="1915668"/>
+            <a:ext cx="2011680" cy="914"/>
+          </a:xfrm>
+          <a:prstGeom prst="line">
+            <a:avLst/>
+          </a:prstGeom>
+          <a:noFill/>
+          <a:ln w="19050">
+            <a:solidFill>
+              <a:srgbClr val="4A4A4A"/>
+            </a:solidFill>
+            <a:prstDash val="solid"/>
+            <a:tailEnd type="triangle"/>
+          </a:ln>
+        </p:spPr>
+      </p:sp>
+      <p:sp>
+        <p:nvSpPr>
+          <p:cNvPr id="21" name="Shape 19"/>
+          <p:cNvSpPr/>
+          <p:nvPr/>
+        </p:nvSpPr>
+        <p:spPr>
+          <a:xfrm flipV="1">
+            <a:off x="8458200" y="2007108"/>
+            <a:ext cx="2011680" cy="1554480"/>
+          </a:xfrm>
+          <a:prstGeom prst="line">
+            <a:avLst/>
+          </a:prstGeom>
+          <a:noFill/>
+          <a:ln w="19050">
+            <a:solidFill>
+              <a:srgbClr val="4A4A4A"/>
+            </a:solidFill>
+            <a:prstDash val="solid"/>
+            <a:tailEnd type="triangle"/>
+          </a:ln>
+        </p:spPr>
+      </p:sp>
+      <p:sp>
+        <p:nvSpPr>
+          <p:cNvPr id="22" name="Shape 20"/>
+          <p:cNvSpPr/>
+          <p:nvPr/>
+        </p:nvSpPr>
+        <p:spPr>
+          <a:xfrm flipV="1">
+            <a:off x="7635240" y="4014216"/>
+            <a:ext cx="914" cy="420624"/>
+          </a:xfrm>
+          <a:prstGeom prst="line">
+            <a:avLst/>
+          </a:prstGeom>
+          <a:noFill/>
+          <a:ln w="19050">
+            <a:solidFill>
+              <a:srgbClr val="ED1C24"/>
+            </a:solidFill>
+            <a:prstDash val="solid"/>
+            <a:tailEnd type="triangle"/>
+          </a:ln>
+        </p:spPr>
+      </p:sp>
+      <p:sp>
+        <p:nvSpPr>
+          <p:cNvPr id="23" name="Text 21"/>
+          <p:cNvSpPr/>
+          <p:nvPr/>
+        </p:nvSpPr>
+        <p:spPr>
+          <a:xfrm>
+            <a:off x="502920" y="6355080"/>
+            <a:ext cx="11155680" cy="457200"/>
+          </a:xfrm>
+          <a:prstGeom prst="rect">
+            <a:avLst/>
+          </a:prstGeom>
+          <a:noFill/>
+          <a:ln/>
+        </p:spPr>
+        <p:txBody>
+          <a:bodyPr wrap="square" rtlCol="0" anchor="t"/>
+          <a:lstStyle/>
+          <a:p>
+            <a:pPr indent="0" marL="0">
+              <a:buNone/>
+            </a:pPr>
+            <a:r>
+              <a:rPr lang="en-US" sz="1300" b="1" dirty="0">
+                <a:solidFill>
+                  <a:srgbClr val="ED1C24"/>
+                </a:solidFill>
+                <a:latin typeface="Calibri" pitchFamily="34" charset="0"/>
+                <a:ea typeface="Calibri" pitchFamily="34" charset="-122"/>
+                <a:cs typeface="Calibri" pitchFamily="34" charset="-120"/>
+              </a:rPr>
+              <a:t>FACTS IN THE KNOWLEDGE FABRIC   </a:t>
+            </a:r>
+            <a:pPr indent="0" marL="0">
+              <a:buNone/>
+            </a:pPr>
+            <a:r>
+              <a:rPr lang="en-US" sz="1300" dirty="0">
+                <a:solidFill>
+                  <a:srgbClr val="F4F1EA"/>
+                </a:solidFill>
+                <a:latin typeface="Calibri" pitchFamily="34" charset="0"/>
+                <a:ea typeface="Calibri" pitchFamily="34" charset="-122"/>
+                <a:cs typeface="Calibri" pitchFamily="34" charset="-120"/>
+              </a:rPr>
+              <a:t>Hybrid retrieval (BM25 + vector, RRF query fusion) grounds every answer; live enterprise data arrives over our MCP server.</a:t>
+            </a:r>
+            <a:endParaRPr lang="en-US" sz="1300" dirty="0"/>
+          </a:p>
+        </p:txBody>
+      </p:sp>
+    </p:spTree>
+  </p:cSld>
+  <p:clrMapOvr>
+    <a:masterClrMapping/>
+  </p:clrMapOvr>
+</p:sld>
+</file>
+
+<file path=ppt/slides/slide11.xml><?xml version="1.0" encoding="utf-8"?>
+<p:sld xmlns:a="http://schemas.openxmlformats.org/drawingml/2006/main" xmlns:r="http://schemas.openxmlformats.org/officeDocument/2006/relationships" xmlns:p="http://schemas.openxmlformats.org/presentationml/2006/main">
+  <p:cSld name="Slide 11">
+    <p:bg>
+      <p:bgPr>
+        <a:solidFill>
+          <a:srgbClr val="121212"/>
+        </a:solidFill>
+      </p:bgPr>
+    </p:bg>
+    <p:spTree>
+      <p:nvGrpSpPr>
+        <p:cNvPr id="1" name=""/>
+        <p:cNvGrpSpPr/>
+        <p:nvPr/>
+      </p:nvGrpSpPr>
+      <p:grpSpPr>
+        <a:xfrm>
+          <a:off x="0" y="0"/>
+          <a:ext cx="0" cy="0"/>
+          <a:chOff x="0" y="0"/>
+          <a:chExt cx="0" cy="0"/>
+        </a:xfrm>
+      </p:grpSpPr>
+      <p:sp>
+        <p:nvSpPr>
+          <p:cNvPr id="2" name="Shape 0"/>
+          <p:cNvSpPr/>
+          <p:nvPr/>
+        </p:nvSpPr>
+        <p:spPr>
+          <a:xfrm>
+            <a:off x="502920" y="429768"/>
+            <a:ext cx="128016" cy="128016"/>
+          </a:xfrm>
+          <a:prstGeom prst="rect">
+            <a:avLst/>
+          </a:prstGeom>
+          <a:solidFill>
+            <a:srgbClr val="ED1C24"/>
+          </a:solidFill>
+          <a:ln/>
+        </p:spPr>
+      </p:sp>
+      <p:sp>
+        <p:nvSpPr>
+          <p:cNvPr id="3" name="Text 1"/>
+          <p:cNvSpPr/>
+          <p:nvPr/>
+        </p:nvSpPr>
+        <p:spPr>
+          <a:xfrm>
+            <a:off x="722376" y="329184"/>
+            <a:ext cx="10058400" cy="310896"/>
+          </a:xfrm>
+          <a:prstGeom prst="rect">
+            <a:avLst/>
+          </a:prstGeom>
+          <a:noFill/>
+          <a:ln/>
+        </p:spPr>
+        <p:txBody>
+          <a:bodyPr wrap="square" rtlCol="0" anchor="ctr"/>
+          <a:lstStyle/>
+          <a:p>
+            <a:pPr indent="0" marL="0">
+              <a:buNone/>
+            </a:pPr>
+            <a:r>
+              <a:rPr lang="en-US" sz="1150" b="1" spc="300" kern="0" dirty="0">
+                <a:solidFill>
+                  <a:srgbClr val="A9A399"/>
+                </a:solidFill>
+                <a:latin typeface="Calibri" pitchFamily="34" charset="0"/>
+                <a:ea typeface="Calibri" pitchFamily="34" charset="-122"/>
+                <a:cs typeface="Calibri" pitchFamily="34" charset="-120"/>
+              </a:rPr>
+              <a:t>ARCHITECTURE · STEP 5 OF 6</a:t>
+            </a:r>
+            <a:endParaRPr lang="en-US" sz="1150" dirty="0"/>
+          </a:p>
+        </p:txBody>
+      </p:sp>
+      <p:sp>
+        <p:nvSpPr>
+          <p:cNvPr id="4" name="Text 2"/>
+          <p:cNvSpPr/>
+          <p:nvPr/>
+        </p:nvSpPr>
+        <p:spPr>
+          <a:xfrm>
+            <a:off x="457200" y="658368"/>
+            <a:ext cx="11247120" cy="548640"/>
+          </a:xfrm>
+          <a:prstGeom prst="rect">
+            <a:avLst/>
+          </a:prstGeom>
+          <a:noFill/>
+          <a:ln/>
+        </p:spPr>
+        <p:txBody>
+          <a:bodyPr wrap="square" rtlCol="0" anchor="ctr"/>
+          <a:lstStyle/>
+          <a:p>
+            <a:pPr indent="0" marL="0">
+              <a:buNone/>
+            </a:pPr>
+            <a:r>
+              <a:rPr lang="en-US" sz="2500" b="1" dirty="0">
+                <a:solidFill>
+                  <a:srgbClr val="F4F1EA"/>
+                </a:solidFill>
+                <a:latin typeface="Arial Black" pitchFamily="34" charset="0"/>
+                <a:ea typeface="Arial Black" pitchFamily="34" charset="-122"/>
+                <a:cs typeface="Arial Black" pitchFamily="34" charset="-120"/>
+              </a:rPr>
+              <a:t>Six decisions that kill hallucination</a:t>
+            </a:r>
+            <a:endParaRPr lang="en-US" sz="2500" dirty="0"/>
+          </a:p>
+        </p:txBody>
+      </p:sp>
+      <p:sp>
+        <p:nvSpPr>
+          <p:cNvPr id="5" name="Shape 3"/>
+          <p:cNvSpPr/>
+          <p:nvPr/>
+        </p:nvSpPr>
+        <p:spPr>
+          <a:xfrm>
+            <a:off x="457200" y="2286000"/>
+            <a:ext cx="1207008" cy="868680"/>
+          </a:xfrm>
+          <a:prstGeom prst="roundRect">
+            <a:avLst>
+              <a:gd name="adj" fmla="val 7368"/>
+            </a:avLst>
+          </a:prstGeom>
+          <a:solidFill>
+            <a:srgbClr val="1D1D1D"/>
+          </a:solidFill>
+          <a:ln w="12700">
+            <a:solidFill>
+              <a:srgbClr val="3A3A3A"/>
+            </a:solidFill>
+            <a:prstDash val="solid"/>
+          </a:ln>
+        </p:spPr>
+      </p:sp>
+      <p:sp>
+        <p:nvSpPr>
+          <p:cNvPr id="6" name="Text 4"/>
+          <p:cNvSpPr/>
+          <p:nvPr/>
+        </p:nvSpPr>
+        <p:spPr>
+          <a:xfrm>
+            <a:off x="512064" y="2340864"/>
+            <a:ext cx="1097280" cy="758952"/>
+          </a:xfrm>
+          <a:prstGeom prst="rect">
+            <a:avLst/>
+          </a:prstGeom>
+          <a:noFill/>
+          <a:ln/>
+        </p:spPr>
+        <p:txBody>
+          <a:bodyPr wrap="square" rtlCol="0" anchor="ctr"/>
+          <a:lstStyle/>
+          <a:p>
+            <a:pPr algn="ctr" indent="0" marL="0">
+              <a:lnSpc>
+                <a:spcPts val="1300"/>
+              </a:lnSpc>
+              <a:buNone/>
+            </a:pPr>
+            <a:r>
+              <a:rPr lang="en-US" sz="1250" b="1" dirty="0">
+                <a:solidFill>
+                  <a:srgbClr val="F4F1EA"/>
+                </a:solidFill>
+                <a:latin typeface="Calibri" pitchFamily="34" charset="0"/>
+                <a:ea typeface="Calibri" pitchFamily="34" charset="-122"/>
+                <a:cs typeface="Calibri" pitchFamily="34" charset="-120"/>
+              </a:rPr>
+              <a:t>Customer
+</a:t>
+            </a:r>
+            <a:pPr algn="ctr" indent="0" marL="0">
+              <a:lnSpc>
+                <a:spcPts val="1300"/>
+              </a:lnSpc>
+              <a:buNone/>
+            </a:pPr>
+            <a:r>
+              <a:rPr lang="en-US" sz="1000" dirty="0">
+                <a:solidFill>
+                  <a:srgbClr val="A9A399"/>
+                </a:solidFill>
+                <a:latin typeface="Calibri" pitchFamily="34" charset="0"/>
+                <a:ea typeface="Calibri" pitchFamily="34" charset="-122"/>
+                <a:cs typeface="Calibri" pitchFamily="34" charset="-120"/>
+              </a:rPr>
+              <a:t>query</a:t>
+            </a:r>
+            <a:endParaRPr lang="en-US" sz="1250" dirty="0"/>
+          </a:p>
+        </p:txBody>
+      </p:sp>
+      <p:sp>
+        <p:nvSpPr>
+          <p:cNvPr id="7" name="Shape 5"/>
+          <p:cNvSpPr/>
+          <p:nvPr/>
+        </p:nvSpPr>
+        <p:spPr>
+          <a:xfrm>
+            <a:off x="1892808" y="2286000"/>
+            <a:ext cx="1325880" cy="868680"/>
+          </a:xfrm>
+          <a:prstGeom prst="roundRect">
+            <a:avLst>
+              <a:gd name="adj" fmla="val 7368"/>
+            </a:avLst>
+          </a:prstGeom>
+          <a:solidFill>
+            <a:srgbClr val="1D1D1D"/>
+          </a:solidFill>
+          <a:ln w="25400">
+            <a:solidFill>
+              <a:srgbClr val="ED1C24"/>
+            </a:solidFill>
+            <a:prstDash val="solid"/>
+          </a:ln>
+        </p:spPr>
+      </p:sp>
+      <p:sp>
+        <p:nvSpPr>
+          <p:cNvPr id="8" name="Text 6"/>
+          <p:cNvSpPr/>
+          <p:nvPr/>
+        </p:nvSpPr>
+        <p:spPr>
+          <a:xfrm>
+            <a:off x="1947672" y="2340864"/>
+            <a:ext cx="1216152" cy="758952"/>
+          </a:xfrm>
+          <a:prstGeom prst="rect">
+            <a:avLst/>
+          </a:prstGeom>
+          <a:noFill/>
+          <a:ln/>
+        </p:spPr>
+        <p:txBody>
+          <a:bodyPr wrap="square" rtlCol="0" anchor="ctr"/>
+          <a:lstStyle/>
+          <a:p>
+            <a:pPr algn="ctr" indent="0" marL="0">
+              <a:lnSpc>
+                <a:spcPts val="1300"/>
+              </a:lnSpc>
+              <a:buNone/>
+            </a:pPr>
+            <a:r>
+              <a:rPr lang="en-US" sz="1250" b="1" dirty="0">
+                <a:solidFill>
+                  <a:srgbClr val="F4F1EA"/>
+                </a:solidFill>
+                <a:latin typeface="Calibri" pitchFamily="34" charset="0"/>
+                <a:ea typeface="Calibri" pitchFamily="34" charset="-122"/>
+                <a:cs typeface="Calibri" pitchFamily="34" charset="-120"/>
+              </a:rPr>
+              <a:t>Guardrails
+</a:t>
+            </a:r>
+            <a:pPr algn="ctr" indent="0" marL="0">
+              <a:lnSpc>
+                <a:spcPts val="1300"/>
+              </a:lnSpc>
+              <a:buNone/>
+            </a:pPr>
+            <a:r>
+              <a:rPr lang="en-US" sz="1000" dirty="0">
+                <a:solidFill>
+                  <a:srgbClr val="FFB3B6"/>
+                </a:solidFill>
+                <a:latin typeface="Calibri" pitchFamily="34" charset="0"/>
+                <a:ea typeface="Calibri" pitchFamily="34" charset="-122"/>
+                <a:cs typeface="Calibri" pitchFamily="34" charset="-120"/>
+              </a:rPr>
+              <a:t>PII · injection</a:t>
+            </a:r>
+            <a:endParaRPr lang="en-US" sz="1250" dirty="0"/>
+          </a:p>
+        </p:txBody>
+      </p:sp>
+      <p:sp>
+        <p:nvSpPr>
+          <p:cNvPr id="9" name="Shape 7"/>
+          <p:cNvSpPr/>
+          <p:nvPr/>
+        </p:nvSpPr>
+        <p:spPr>
+          <a:xfrm>
+            <a:off x="3447288" y="2286000"/>
+            <a:ext cx="1371600" cy="868680"/>
+          </a:xfrm>
+          <a:prstGeom prst="roundRect">
+            <a:avLst>
+              <a:gd name="adj" fmla="val 7368"/>
+            </a:avLst>
+          </a:prstGeom>
+          <a:solidFill>
+            <a:srgbClr val="1D1D1D"/>
+          </a:solidFill>
+          <a:ln w="25400">
+            <a:solidFill>
+              <a:srgbClr val="ED1C24"/>
+            </a:solidFill>
+            <a:prstDash val="solid"/>
+          </a:ln>
+        </p:spPr>
+      </p:sp>
+      <p:sp>
+        <p:nvSpPr>
+          <p:cNvPr id="10" name="Text 8"/>
+          <p:cNvSpPr/>
+          <p:nvPr/>
+        </p:nvSpPr>
+        <p:spPr>
+          <a:xfrm>
+            <a:off x="3502152" y="2340864"/>
+            <a:ext cx="1261872" cy="758952"/>
+          </a:xfrm>
+          <a:prstGeom prst="rect">
+            <a:avLst/>
+          </a:prstGeom>
+          <a:noFill/>
+          <a:ln/>
+        </p:spPr>
+        <p:txBody>
+          <a:bodyPr wrap="square" rtlCol="0" anchor="ctr"/>
+          <a:lstStyle/>
+          <a:p>
+            <a:pPr algn="ctr" indent="0" marL="0">
+              <a:lnSpc>
+                <a:spcPts val="1300"/>
+              </a:lnSpc>
+              <a:buNone/>
+            </a:pPr>
+            <a:r>
+              <a:rPr lang="en-US" sz="1250" b="1" dirty="0">
+                <a:solidFill>
+                  <a:srgbClr val="F4F1EA"/>
+                </a:solidFill>
+                <a:latin typeface="Calibri" pitchFamily="34" charset="0"/>
+                <a:ea typeface="Calibri" pitchFamily="34" charset="-122"/>
+                <a:cs typeface="Calibri" pitchFamily="34" charset="-120"/>
+              </a:rPr>
+              <a:t>Clarity gate
+</a:t>
+            </a:r>
+            <a:pPr algn="ctr" indent="0" marL="0">
+              <a:lnSpc>
+                <a:spcPts val="1300"/>
+              </a:lnSpc>
+              <a:buNone/>
+            </a:pPr>
+            <a:r>
+              <a:rPr lang="en-US" sz="1000" dirty="0">
+                <a:solidFill>
+                  <a:srgbClr val="FFB3B6"/>
+                </a:solidFill>
+                <a:latin typeface="Calibri" pitchFamily="34" charset="0"/>
+                <a:ea typeface="Calibri" pitchFamily="34" charset="-122"/>
+                <a:cs typeface="Calibri" pitchFamily="34" charset="-120"/>
+              </a:rPr>
+              <a:t>ask, don't guess</a:t>
+            </a:r>
+            <a:endParaRPr lang="en-US" sz="1250" dirty="0"/>
+          </a:p>
+        </p:txBody>
+      </p:sp>
+      <p:sp>
+        <p:nvSpPr>
+          <p:cNvPr id="11" name="Shape 9"/>
+          <p:cNvSpPr/>
+          <p:nvPr/>
+        </p:nvSpPr>
+        <p:spPr>
+          <a:xfrm>
+            <a:off x="5120640" y="2286000"/>
+            <a:ext cx="1325880" cy="868680"/>
+          </a:xfrm>
+          <a:prstGeom prst="roundRect">
+            <a:avLst>
+              <a:gd name="adj" fmla="val 7368"/>
+            </a:avLst>
+          </a:prstGeom>
+          <a:solidFill>
+            <a:srgbClr val="1D1D1D"/>
+          </a:solidFill>
+          <a:ln w="12700">
+            <a:solidFill>
+              <a:srgbClr val="3A3A3A"/>
+            </a:solidFill>
+            <a:prstDash val="solid"/>
+          </a:ln>
+        </p:spPr>
+      </p:sp>
+      <p:sp>
+        <p:nvSpPr>
+          <p:cNvPr id="12" name="Text 10"/>
+          <p:cNvSpPr/>
+          <p:nvPr/>
+        </p:nvSpPr>
+        <p:spPr>
+          <a:xfrm>
+            <a:off x="5175504" y="2340864"/>
+            <a:ext cx="1216152" cy="758952"/>
+          </a:xfrm>
+          <a:prstGeom prst="rect">
+            <a:avLst/>
+          </a:prstGeom>
+          <a:noFill/>
+          <a:ln/>
+        </p:spPr>
+        <p:txBody>
+          <a:bodyPr wrap="square" rtlCol="0" anchor="ctr"/>
+          <a:lstStyle/>
+          <a:p>
+            <a:pPr algn="ctr" indent="0" marL="0">
+              <a:lnSpc>
+                <a:spcPts val="1300"/>
+              </a:lnSpc>
+              <a:buNone/>
+            </a:pPr>
+            <a:r>
+              <a:rPr lang="en-US" sz="1250" b="1" dirty="0">
+                <a:solidFill>
+                  <a:srgbClr val="F4F1EA"/>
+                </a:solidFill>
+                <a:latin typeface="Calibri" pitchFamily="34" charset="0"/>
+                <a:ea typeface="Calibri" pitchFamily="34" charset="-122"/>
+                <a:cs typeface="Calibri" pitchFamily="34" charset="-120"/>
+              </a:rPr>
+              <a:t>Model router
+</a:t>
+            </a:r>
+            <a:pPr algn="ctr" indent="0" marL="0">
+              <a:lnSpc>
+                <a:spcPts val="1300"/>
+              </a:lnSpc>
+              <a:buNone/>
+            </a:pPr>
+            <a:r>
+              <a:rPr lang="en-US" sz="1000" dirty="0">
+                <a:solidFill>
+                  <a:srgbClr val="A9A399"/>
+                </a:solidFill>
+                <a:latin typeface="Calibri" pitchFamily="34" charset="0"/>
+                <a:ea typeface="Calibri" pitchFamily="34" charset="-122"/>
+                <a:cs typeface="Calibri" pitchFamily="34" charset="-120"/>
+              </a:rPr>
+              <a:t>right-sized</a:t>
+            </a:r>
+            <a:endParaRPr lang="en-US" sz="1250" dirty="0"/>
+          </a:p>
+        </p:txBody>
+      </p:sp>
+      <p:sp>
+        <p:nvSpPr>
+          <p:cNvPr id="13" name="Shape 11"/>
+          <p:cNvSpPr/>
+          <p:nvPr/>
+        </p:nvSpPr>
+        <p:spPr>
+          <a:xfrm>
+            <a:off x="6812280" y="1481328"/>
+            <a:ext cx="1645920" cy="868680"/>
+          </a:xfrm>
+          <a:prstGeom prst="roundRect">
+            <a:avLst>
+              <a:gd name="adj" fmla="val 7368"/>
+            </a:avLst>
+          </a:prstGeom>
+          <a:solidFill>
+            <a:srgbClr val="1D1D1D"/>
+          </a:solidFill>
+          <a:ln w="12700">
+            <a:solidFill>
+              <a:srgbClr val="3A3A3A"/>
+            </a:solidFill>
+            <a:prstDash val="solid"/>
+          </a:ln>
+        </p:spPr>
+      </p:sp>
+      <p:sp>
+        <p:nvSpPr>
+          <p:cNvPr id="14" name="Text 12"/>
+          <p:cNvSpPr/>
+          <p:nvPr/>
+        </p:nvSpPr>
+        <p:spPr>
+          <a:xfrm>
+            <a:off x="6867144" y="1536192"/>
+            <a:ext cx="1536192" cy="758952"/>
+          </a:xfrm>
+          <a:prstGeom prst="rect">
+            <a:avLst/>
+          </a:prstGeom>
+          <a:noFill/>
+          <a:ln/>
+        </p:spPr>
+        <p:txBody>
+          <a:bodyPr wrap="square" rtlCol="0" anchor="ctr"/>
+          <a:lstStyle/>
+          <a:p>
+            <a:pPr algn="ctr" indent="0" marL="0">
+              <a:lnSpc>
+                <a:spcPts val="1300"/>
+              </a:lnSpc>
+              <a:buNone/>
+            </a:pPr>
+            <a:r>
+              <a:rPr lang="en-US" sz="1250" b="1" dirty="0">
+                <a:solidFill>
+                  <a:srgbClr val="F4F1EA"/>
+                </a:solidFill>
+                <a:latin typeface="Calibri" pitchFamily="34" charset="0"/>
+                <a:ea typeface="Calibri" pitchFamily="34" charset="-122"/>
+                <a:cs typeface="Calibri" pitchFamily="34" charset="-120"/>
+              </a:rPr>
+              <a:t>Fast lane
+</a:t>
+            </a:r>
+            <a:pPr algn="ctr" indent="0" marL="0">
+              <a:lnSpc>
+                <a:spcPts val="1300"/>
+              </a:lnSpc>
+              <a:buNone/>
+            </a:pPr>
+            <a:r>
+              <a:rPr lang="en-US" sz="1000" dirty="0">
+                <a:solidFill>
+                  <a:srgbClr val="A9A399"/>
+                </a:solidFill>
+                <a:latin typeface="Calibri" pitchFamily="34" charset="0"/>
+                <a:ea typeface="Calibri" pitchFamily="34" charset="-122"/>
+                <a:cs typeface="Calibri" pitchFamily="34" charset="-120"/>
+              </a:rPr>
+              <a:t>1.5B fine-tuned</a:t>
+            </a:r>
+            <a:endParaRPr lang="en-US" sz="1250" dirty="0"/>
+          </a:p>
+        </p:txBody>
+      </p:sp>
+      <p:sp>
+        <p:nvSpPr>
+          <p:cNvPr id="15" name="Shape 13"/>
+          <p:cNvSpPr/>
+          <p:nvPr/>
+        </p:nvSpPr>
+        <p:spPr>
+          <a:xfrm>
+            <a:off x="6812280" y="3127248"/>
+            <a:ext cx="1645920" cy="868680"/>
+          </a:xfrm>
+          <a:prstGeom prst="roundRect">
+            <a:avLst>
+              <a:gd name="adj" fmla="val 7368"/>
+            </a:avLst>
+          </a:prstGeom>
+          <a:solidFill>
+            <a:srgbClr val="1D1D1D"/>
+          </a:solidFill>
+          <a:ln w="12700">
+            <a:solidFill>
+              <a:srgbClr val="3A3A3A"/>
+            </a:solidFill>
+            <a:prstDash val="solid"/>
+          </a:ln>
+        </p:spPr>
+      </p:sp>
+      <p:sp>
+        <p:nvSpPr>
+          <p:cNvPr id="16" name="Text 14"/>
+          <p:cNvSpPr/>
+          <p:nvPr/>
+        </p:nvSpPr>
+        <p:spPr>
+          <a:xfrm>
+            <a:off x="6867144" y="3182112"/>
+            <a:ext cx="1536192" cy="758952"/>
+          </a:xfrm>
+          <a:prstGeom prst="rect">
+            <a:avLst/>
+          </a:prstGeom>
+          <a:noFill/>
+          <a:ln/>
+        </p:spPr>
+        <p:txBody>
+          <a:bodyPr wrap="square" rtlCol="0" anchor="ctr"/>
+          <a:lstStyle/>
+          <a:p>
+            <a:pPr algn="ctr" indent="0" marL="0">
+              <a:lnSpc>
+                <a:spcPts val="1300"/>
+              </a:lnSpc>
+              <a:buNone/>
+            </a:pPr>
+            <a:r>
+              <a:rPr lang="en-US" sz="1250" b="1" dirty="0">
+                <a:solidFill>
+                  <a:srgbClr val="F4F1EA"/>
+                </a:solidFill>
+                <a:latin typeface="Calibri" pitchFamily="34" charset="0"/>
+                <a:ea typeface="Calibri" pitchFamily="34" charset="-122"/>
+                <a:cs typeface="Calibri" pitchFamily="34" charset="-120"/>
+              </a:rPr>
+              <a:t>Expert lane
+</a:t>
+            </a:r>
+            <a:pPr algn="ctr" indent="0" marL="0">
+              <a:lnSpc>
+                <a:spcPts val="1300"/>
+              </a:lnSpc>
+              <a:buNone/>
+            </a:pPr>
+            <a:r>
+              <a:rPr lang="en-US" sz="1000" dirty="0">
+                <a:solidFill>
+                  <a:srgbClr val="A9A399"/>
+                </a:solidFill>
+                <a:latin typeface="Calibri" pitchFamily="34" charset="0"/>
+                <a:ea typeface="Calibri" pitchFamily="34" charset="-122"/>
+                <a:cs typeface="Calibri" pitchFamily="34" charset="-120"/>
+              </a:rPr>
+              <a:t>14B · vLLM</a:t>
+            </a:r>
+            <a:endParaRPr lang="en-US" sz="1250" dirty="0"/>
+          </a:p>
+        </p:txBody>
+      </p:sp>
+      <p:sp>
+        <p:nvSpPr>
+          <p:cNvPr id="17" name="Shape 15"/>
+          <p:cNvSpPr/>
+          <p:nvPr/>
+        </p:nvSpPr>
+        <p:spPr>
+          <a:xfrm>
+            <a:off x="8823960" y="2286000"/>
+            <a:ext cx="1325880" cy="868680"/>
+          </a:xfrm>
+          <a:prstGeom prst="roundRect">
+            <a:avLst>
+              <a:gd name="adj" fmla="val 7368"/>
+            </a:avLst>
+          </a:prstGeom>
+          <a:solidFill>
+            <a:srgbClr val="1D1D1D"/>
+          </a:solidFill>
+          <a:ln w="25400">
+            <a:solidFill>
+              <a:srgbClr val="ED1C24"/>
+            </a:solidFill>
+            <a:prstDash val="solid"/>
+          </a:ln>
+        </p:spPr>
+      </p:sp>
+      <p:sp>
+        <p:nvSpPr>
+          <p:cNvPr id="18" name="Text 16"/>
+          <p:cNvSpPr/>
+          <p:nvPr/>
+        </p:nvSpPr>
+        <p:spPr>
+          <a:xfrm>
+            <a:off x="8878824" y="2340864"/>
+            <a:ext cx="1216152" cy="758952"/>
+          </a:xfrm>
+          <a:prstGeom prst="rect">
+            <a:avLst/>
+          </a:prstGeom>
+          <a:noFill/>
+          <a:ln/>
+        </p:spPr>
+        <p:txBody>
+          <a:bodyPr wrap="square" rtlCol="0" anchor="ctr"/>
+          <a:lstStyle/>
+          <a:p>
+            <a:pPr algn="ctr" indent="0" marL="0">
+              <a:lnSpc>
+                <a:spcPts val="1300"/>
+              </a:lnSpc>
+              <a:buNone/>
+            </a:pPr>
+            <a:r>
+              <a:rPr lang="en-US" sz="1250" b="1" dirty="0">
+                <a:solidFill>
+                  <a:srgbClr val="F4F1EA"/>
+                </a:solidFill>
+                <a:latin typeface="Calibri" pitchFamily="34" charset="0"/>
+                <a:ea typeface="Calibri" pitchFamily="34" charset="-122"/>
+                <a:cs typeface="Calibri" pitchFamily="34" charset="-120"/>
+              </a:rPr>
+              <a:t>Trust gate
+</a:t>
+            </a:r>
+            <a:pPr algn="ctr" indent="0" marL="0">
+              <a:lnSpc>
+                <a:spcPts val="1300"/>
+              </a:lnSpc>
+              <a:buNone/>
+            </a:pPr>
+            <a:r>
+              <a:rPr lang="en-US" sz="1000" dirty="0">
+                <a:solidFill>
+                  <a:srgbClr val="FFB3B6"/>
+                </a:solidFill>
+                <a:latin typeface="Calibri" pitchFamily="34" charset="0"/>
+                <a:ea typeface="Calibri" pitchFamily="34" charset="-122"/>
+                <a:cs typeface="Calibri" pitchFamily="34" charset="-120"/>
+              </a:rPr>
+              <a:t>score &lt; 0.6 ↗</a:t>
+            </a:r>
+            <a:endParaRPr lang="en-US" sz="1250" dirty="0"/>
+          </a:p>
+        </p:txBody>
+      </p:sp>
+      <p:sp>
+        <p:nvSpPr>
+          <p:cNvPr id="19" name="Shape 17"/>
+          <p:cNvSpPr/>
+          <p:nvPr/>
+        </p:nvSpPr>
+        <p:spPr>
+          <a:xfrm>
+            <a:off x="10469880" y="1481328"/>
+            <a:ext cx="1554480" cy="868680"/>
+          </a:xfrm>
+          <a:prstGeom prst="roundRect">
+            <a:avLst>
+              <a:gd name="adj" fmla="val 7368"/>
+            </a:avLst>
+          </a:prstGeom>
+          <a:solidFill>
+            <a:srgbClr val="1D1D1D"/>
+          </a:solidFill>
+          <a:ln w="12700">
+            <a:solidFill>
+              <a:srgbClr val="3A3A3A"/>
+            </a:solidFill>
+            <a:prstDash val="solid"/>
+          </a:ln>
+        </p:spPr>
+      </p:sp>
+      <p:sp>
+        <p:nvSpPr>
+          <p:cNvPr id="20" name="Text 18"/>
+          <p:cNvSpPr/>
+          <p:nvPr/>
+        </p:nvSpPr>
+        <p:spPr>
+          <a:xfrm>
+            <a:off x="10561320" y="1527048"/>
+            <a:ext cx="1371600" cy="777240"/>
+          </a:xfrm>
+          <a:prstGeom prst="rect">
+            <a:avLst/>
+          </a:prstGeom>
+          <a:noFill/>
+          <a:ln/>
+        </p:spPr>
+        <p:txBody>
+          <a:bodyPr wrap="square" rtlCol="0" anchor="ctr"/>
+          <a:lstStyle/>
+          <a:p>
+            <a:pPr algn="ctr" indent="0" marL="0">
+              <a:buNone/>
+            </a:pPr>
+            <a:r>
+              <a:rPr lang="en-US" sz="1250" b="1" dirty="0">
+                <a:solidFill>
+                  <a:srgbClr val="F4F1EA"/>
+                </a:solidFill>
+                <a:latin typeface="Calibri" pitchFamily="34" charset="0"/>
+                <a:ea typeface="Calibri" pitchFamily="34" charset="-122"/>
+                <a:cs typeface="Calibri" pitchFamily="34" charset="-120"/>
+              </a:rPr>
+              <a:t>Answer</a:t>
+            </a:r>
+            <a:endParaRPr lang="en-US" sz="1250" dirty="0"/>
+          </a:p>
+        </p:txBody>
+      </p:sp>
+      <p:sp>
+        <p:nvSpPr>
+          <p:cNvPr id="21" name="Shape 19"/>
+          <p:cNvSpPr/>
+          <p:nvPr/>
+        </p:nvSpPr>
+        <p:spPr>
+          <a:xfrm>
+            <a:off x="10469880" y="3127248"/>
+            <a:ext cx="1554480" cy="868680"/>
+          </a:xfrm>
+          <a:prstGeom prst="roundRect">
+            <a:avLst>
+              <a:gd name="adj" fmla="val 7368"/>
+            </a:avLst>
+          </a:prstGeom>
+          <a:solidFill>
+            <a:srgbClr val="1D1D1D"/>
+          </a:solidFill>
+          <a:ln w="25400">
+            <a:solidFill>
+              <a:srgbClr val="ED1C24"/>
+            </a:solidFill>
+            <a:prstDash val="solid"/>
+          </a:ln>
+        </p:spPr>
+      </p:sp>
+      <p:sp>
+        <p:nvSpPr>
+          <p:cNvPr id="22" name="Text 20"/>
+          <p:cNvSpPr/>
+          <p:nvPr/>
+        </p:nvSpPr>
+        <p:spPr>
+          <a:xfrm>
+            <a:off x="10524744" y="3182112"/>
+            <a:ext cx="1444752" cy="758952"/>
+          </a:xfrm>
+          <a:prstGeom prst="rect">
+            <a:avLst/>
+          </a:prstGeom>
+          <a:noFill/>
+          <a:ln/>
+        </p:spPr>
+        <p:txBody>
+          <a:bodyPr wrap="square" rtlCol="0" anchor="ctr"/>
+          <a:lstStyle/>
+          <a:p>
+            <a:pPr algn="ctr" indent="0" marL="0">
+              <a:lnSpc>
+                <a:spcPts val="1300"/>
+              </a:lnSpc>
+              <a:buNone/>
+            </a:pPr>
+            <a:r>
+              <a:rPr lang="en-US" sz="1250" b="1" dirty="0">
+                <a:solidFill>
+                  <a:srgbClr val="F4F1EA"/>
+                </a:solidFill>
+                <a:latin typeface="Calibri" pitchFamily="34" charset="0"/>
+                <a:ea typeface="Calibri" pitchFamily="34" charset="-122"/>
+                <a:cs typeface="Calibri" pitchFamily="34" charset="-120"/>
+              </a:rPr>
+              <a:t>On-call expert
+</a:t>
+            </a:r>
+            <a:pPr algn="ctr" indent="0" marL="0">
+              <a:lnSpc>
+                <a:spcPts val="1300"/>
+              </a:lnSpc>
+              <a:buNone/>
+            </a:pPr>
+            <a:r>
+              <a:rPr lang="en-US" sz="1000" dirty="0">
+                <a:solidFill>
+                  <a:srgbClr val="FFB3B6"/>
+                </a:solidFill>
+                <a:latin typeface="Calibri" pitchFamily="34" charset="0"/>
+                <a:ea typeface="Calibri" pitchFamily="34" charset="-122"/>
+                <a:cs typeface="Calibri" pitchFamily="34" charset="-120"/>
+              </a:rPr>
+              <a:t>via MCP</a:t>
+            </a:r>
+            <a:endParaRPr lang="en-US" sz="1250" dirty="0"/>
+          </a:p>
+        </p:txBody>
+      </p:sp>
+      <p:sp>
+        <p:nvSpPr>
+          <p:cNvPr id="23" name="Shape 21"/>
+          <p:cNvSpPr/>
+          <p:nvPr/>
+        </p:nvSpPr>
+        <p:spPr>
+          <a:xfrm>
+            <a:off x="3977640" y="4434840"/>
+            <a:ext cx="5486400" cy="640080"/>
+          </a:xfrm>
+          <a:prstGeom prst="roundRect">
+            <a:avLst>
+              <a:gd name="adj" fmla="val 10000"/>
+            </a:avLst>
+          </a:prstGeom>
+          <a:solidFill>
+            <a:srgbClr val="1D1D1D"/>
+          </a:solidFill>
+          <a:ln w="12700">
+            <a:solidFill>
+              <a:srgbClr val="3A3A3A"/>
+            </a:solidFill>
+            <a:prstDash val="solid"/>
+          </a:ln>
+        </p:spPr>
+      </p:sp>
+      <p:sp>
+        <p:nvSpPr>
+          <p:cNvPr id="24" name="Text 22"/>
+          <p:cNvSpPr/>
+          <p:nvPr/>
+        </p:nvSpPr>
+        <p:spPr>
+          <a:xfrm>
+            <a:off x="4069080" y="4480560"/>
+            <a:ext cx="5303520" cy="548640"/>
+          </a:xfrm>
+          <a:prstGeom prst="rect">
+            <a:avLst/>
+          </a:prstGeom>
+          <a:noFill/>
+          <a:ln/>
+        </p:spPr>
+        <p:txBody>
+          <a:bodyPr wrap="square" rtlCol="0" anchor="ctr"/>
+          <a:lstStyle/>
+          <a:p>
+            <a:pPr algn="ctr" indent="0" marL="0">
+              <a:buNone/>
+            </a:pPr>
+            <a:r>
+              <a:rPr lang="en-US" sz="1200" b="1" dirty="0">
+                <a:solidFill>
+                  <a:srgbClr val="F4F1EA"/>
+                </a:solidFill>
+                <a:latin typeface="Calibri" pitchFamily="34" charset="0"/>
+                <a:ea typeface="Calibri" pitchFamily="34" charset="-122"/>
+                <a:cs typeface="Calibri" pitchFamily="34" charset="-120"/>
+              </a:rPr>
+              <a:t>Knowledge fabric — hybrid RAG (BM25 + vector, RRF) · MCP outage feed</a:t>
+            </a:r>
+            <a:endParaRPr lang="en-US" sz="1200" dirty="0"/>
+          </a:p>
+        </p:txBody>
+      </p:sp>
+      <p:sp>
+        <p:nvSpPr>
+          <p:cNvPr id="25" name="Shape 23"/>
+          <p:cNvSpPr/>
+          <p:nvPr/>
+        </p:nvSpPr>
+        <p:spPr>
+          <a:xfrm>
+            <a:off x="1664208" y="2720340"/>
+            <a:ext cx="228600" cy="914"/>
+          </a:xfrm>
+          <a:prstGeom prst="line">
+            <a:avLst/>
+          </a:prstGeom>
+          <a:noFill/>
+          <a:ln w="19050">
+            <a:solidFill>
+              <a:srgbClr val="ED1C24"/>
+            </a:solidFill>
+            <a:prstDash val="solid"/>
+            <a:tailEnd type="triangle"/>
+          </a:ln>
+        </p:spPr>
+      </p:sp>
+      <p:sp>
+        <p:nvSpPr>
+          <p:cNvPr id="26" name="Shape 24"/>
+          <p:cNvSpPr/>
+          <p:nvPr/>
+        </p:nvSpPr>
+        <p:spPr>
+          <a:xfrm>
+            <a:off x="3218688" y="2720340"/>
+            <a:ext cx="228600" cy="914"/>
+          </a:xfrm>
+          <a:prstGeom prst="line">
+            <a:avLst/>
+          </a:prstGeom>
+          <a:noFill/>
+          <a:ln w="19050">
+            <a:solidFill>
+              <a:srgbClr val="ED1C24"/>
+            </a:solidFill>
+            <a:prstDash val="solid"/>
+            <a:tailEnd type="triangle"/>
+          </a:ln>
+        </p:spPr>
+      </p:sp>
+      <p:sp>
+        <p:nvSpPr>
+          <p:cNvPr id="27" name="Shape 25"/>
+          <p:cNvSpPr/>
+          <p:nvPr/>
+        </p:nvSpPr>
+        <p:spPr>
+          <a:xfrm>
+            <a:off x="4818888" y="2720340"/>
+            <a:ext cx="301752" cy="914"/>
+          </a:xfrm>
+          <a:prstGeom prst="line">
+            <a:avLst/>
+          </a:prstGeom>
+          <a:noFill/>
+          <a:ln w="19050">
+            <a:solidFill>
+              <a:srgbClr val="ED1C24"/>
+            </a:solidFill>
+            <a:prstDash val="solid"/>
+            <a:tailEnd type="triangle"/>
+          </a:ln>
+        </p:spPr>
+      </p:sp>
+      <p:sp>
+        <p:nvSpPr>
+          <p:cNvPr id="28" name="Shape 26"/>
+          <p:cNvSpPr/>
+          <p:nvPr/>
+        </p:nvSpPr>
+        <p:spPr>
+          <a:xfrm flipV="1">
+            <a:off x="6446520" y="1915668"/>
+            <a:ext cx="365760" cy="694944"/>
+          </a:xfrm>
+          <a:prstGeom prst="line">
+            <a:avLst/>
+          </a:prstGeom>
+          <a:noFill/>
+          <a:ln w="19050">
+            <a:solidFill>
+              <a:srgbClr val="4A4A4A"/>
+            </a:solidFill>
+            <a:prstDash val="solid"/>
+            <a:tailEnd type="triangle"/>
+          </a:ln>
+        </p:spPr>
+      </p:sp>
+      <p:sp>
+        <p:nvSpPr>
+          <p:cNvPr id="29" name="Shape 27"/>
+          <p:cNvSpPr/>
+          <p:nvPr/>
+        </p:nvSpPr>
+        <p:spPr>
+          <a:xfrm>
+            <a:off x="6446520" y="2830068"/>
+            <a:ext cx="365760" cy="731520"/>
+          </a:xfrm>
+          <a:prstGeom prst="line">
+            <a:avLst/>
+          </a:prstGeom>
+          <a:noFill/>
+          <a:ln w="19050">
+            <a:solidFill>
+              <a:srgbClr val="4A4A4A"/>
+            </a:solidFill>
+            <a:prstDash val="solid"/>
+            <a:tailEnd type="triangle"/>
+          </a:ln>
+        </p:spPr>
+      </p:sp>
+      <p:sp>
+        <p:nvSpPr>
+          <p:cNvPr id="30" name="Shape 28"/>
+          <p:cNvSpPr/>
+          <p:nvPr/>
+        </p:nvSpPr>
+        <p:spPr>
+          <a:xfrm>
+            <a:off x="8458200" y="1915668"/>
+            <a:ext cx="365760" cy="694944"/>
+          </a:xfrm>
+          <a:prstGeom prst="line">
+            <a:avLst/>
+          </a:prstGeom>
+          <a:noFill/>
+          <a:ln w="19050">
+            <a:solidFill>
+              <a:srgbClr val="ED1C24"/>
+            </a:solidFill>
+            <a:prstDash val="solid"/>
+            <a:tailEnd type="triangle"/>
+          </a:ln>
+        </p:spPr>
+      </p:sp>
+      <p:sp>
+        <p:nvSpPr>
+          <p:cNvPr id="31" name="Shape 29"/>
+          <p:cNvSpPr/>
+          <p:nvPr/>
+        </p:nvSpPr>
+        <p:spPr>
+          <a:xfrm flipV="1">
+            <a:off x="8458200" y="2830068"/>
+            <a:ext cx="365760" cy="731520"/>
+          </a:xfrm>
+          <a:prstGeom prst="line">
+            <a:avLst/>
+          </a:prstGeom>
+          <a:noFill/>
+          <a:ln w="19050">
+            <a:solidFill>
+              <a:srgbClr val="ED1C24"/>
+            </a:solidFill>
+            <a:prstDash val="solid"/>
+            <a:tailEnd type="triangle"/>
+          </a:ln>
+        </p:spPr>
+      </p:sp>
+      <p:sp>
+        <p:nvSpPr>
+          <p:cNvPr id="32" name="Shape 30"/>
+          <p:cNvSpPr/>
+          <p:nvPr/>
+        </p:nvSpPr>
+        <p:spPr>
+          <a:xfrm flipV="1">
+            <a:off x="10149840" y="1915668"/>
+            <a:ext cx="320040" cy="694944"/>
+          </a:xfrm>
+          <a:prstGeom prst="line">
+            <a:avLst/>
+          </a:prstGeom>
+          <a:noFill/>
+          <a:ln w="19050">
+            <a:solidFill>
+              <a:srgbClr val="ED1C24"/>
+            </a:solidFill>
+            <a:prstDash val="solid"/>
+            <a:tailEnd type="triangle"/>
+          </a:ln>
+        </p:spPr>
+      </p:sp>
+      <p:sp>
+        <p:nvSpPr>
+          <p:cNvPr id="33" name="Shape 31"/>
+          <p:cNvSpPr/>
+          <p:nvPr/>
+        </p:nvSpPr>
+        <p:spPr>
+          <a:xfrm>
+            <a:off x="10149840" y="2830068"/>
+            <a:ext cx="320040" cy="731520"/>
+          </a:xfrm>
+          <a:prstGeom prst="line">
+            <a:avLst/>
+          </a:prstGeom>
+          <a:noFill/>
+          <a:ln w="19050">
+            <a:solidFill>
+              <a:srgbClr val="ED1C24"/>
+            </a:solidFill>
+            <a:prstDash val="solid"/>
+            <a:tailEnd type="triangle"/>
+          </a:ln>
+        </p:spPr>
+      </p:sp>
+      <p:sp>
+        <p:nvSpPr>
+          <p:cNvPr id="34" name="Shape 32"/>
+          <p:cNvSpPr/>
+          <p:nvPr/>
+        </p:nvSpPr>
+        <p:spPr>
+          <a:xfrm flipV="1">
+            <a:off x="7635240" y="4014216"/>
+            <a:ext cx="914" cy="420624"/>
+          </a:xfrm>
+          <a:prstGeom prst="line">
+            <a:avLst/>
+          </a:prstGeom>
+          <a:noFill/>
+          <a:ln w="19050">
+            <a:solidFill>
+              <a:srgbClr val="4A4A4A"/>
+            </a:solidFill>
+            <a:prstDash val="solid"/>
+            <a:tailEnd type="triangle"/>
+          </a:ln>
+        </p:spPr>
+      </p:sp>
+      <p:sp>
+        <p:nvSpPr>
+          <p:cNvPr id="35" name="Text 33"/>
+          <p:cNvSpPr/>
+          <p:nvPr/>
+        </p:nvSpPr>
+        <p:spPr>
+          <a:xfrm>
+            <a:off x="502920" y="6355080"/>
+            <a:ext cx="11155680" cy="457200"/>
+          </a:xfrm>
+          <a:prstGeom prst="rect">
+            <a:avLst/>
+          </a:prstGeom>
+          <a:noFill/>
+          <a:ln/>
+        </p:spPr>
+        <p:txBody>
+          <a:bodyPr wrap="square" rtlCol="0" anchor="t"/>
+          <a:lstStyle/>
+          <a:p>
+            <a:pPr indent="0" marL="0">
+              <a:buNone/>
+            </a:pPr>
+            <a:r>
+              <a:rPr lang="en-US" sz="1300" b="1" dirty="0">
+                <a:solidFill>
+                  <a:srgbClr val="ED1C24"/>
+                </a:solidFill>
+                <a:latin typeface="Calibri" pitchFamily="34" charset="0"/>
+                <a:ea typeface="Calibri" pitchFamily="34" charset="-122"/>
+                <a:cs typeface="Calibri" pitchFamily="34" charset="-120"/>
+              </a:rPr>
+              <a:t>DUTY OF CARE   </a:t>
+            </a:r>
+            <a:pPr indent="0" marL="0">
+              <a:buNone/>
+            </a:pPr>
+            <a:r>
+              <a:rPr lang="en-US" sz="1300" dirty="0">
+                <a:solidFill>
+                  <a:srgbClr val="F4F1EA"/>
+                </a:solidFill>
+                <a:latin typeface="Calibri" pitchFamily="34" charset="0"/>
+                <a:ea typeface="Calibri" pitchFamily="34" charset="-122"/>
+                <a:cs typeface="Calibri" pitchFamily="34" charset="-120"/>
+              </a:rPr>
+              <a:t>Guardrails mask PII and block injections; the clarity gate asks instead of guessing; the trust gate routes low-trust answers via MCP to the on-call domain expert — never to the customer.</a:t>
+            </a:r>
+            <a:endParaRPr lang="en-US" sz="1300" dirty="0"/>
+          </a:p>
+        </p:txBody>
+      </p:sp>
+    </p:spTree>
+  </p:cSld>
+  <p:clrMapOvr>
+    <a:masterClrMapping/>
+  </p:clrMapOvr>
+</p:sld>
+</file>
+
+<file path=ppt/slides/slide12.xml><?xml version="1.0" encoding="utf-8"?>
+<p:sld xmlns:a="http://schemas.openxmlformats.org/drawingml/2006/main" xmlns:r="http://schemas.openxmlformats.org/officeDocument/2006/relationships" xmlns:p="http://schemas.openxmlformats.org/presentationml/2006/main">
+  <p:cSld name="Slide 12">
+    <p:bg>
+      <p:bgPr>
+        <a:solidFill>
+          <a:srgbClr val="121212"/>
+        </a:solidFill>
+      </p:bgPr>
+    </p:bg>
+    <p:spTree>
+      <p:nvGrpSpPr>
+        <p:cNvPr id="1" name=""/>
+        <p:cNvGrpSpPr/>
+        <p:nvPr/>
+      </p:nvGrpSpPr>
+      <p:grpSpPr>
+        <a:xfrm>
+          <a:off x="0" y="0"/>
+          <a:ext cx="0" cy="0"/>
+          <a:chOff x="0" y="0"/>
+          <a:chExt cx="0" cy="0"/>
+        </a:xfrm>
+      </p:grpSpPr>
+      <p:sp>
+        <p:nvSpPr>
+          <p:cNvPr id="2" name="Shape 0"/>
+          <p:cNvSpPr/>
+          <p:nvPr/>
+        </p:nvSpPr>
+        <p:spPr>
+          <a:xfrm>
+            <a:off x="502920" y="429768"/>
+            <a:ext cx="128016" cy="128016"/>
+          </a:xfrm>
+          <a:prstGeom prst="rect">
+            <a:avLst/>
+          </a:prstGeom>
+          <a:solidFill>
+            <a:srgbClr val="ED1C24"/>
+          </a:solidFill>
+          <a:ln/>
+        </p:spPr>
+      </p:sp>
+      <p:sp>
+        <p:nvSpPr>
+          <p:cNvPr id="3" name="Text 1"/>
+          <p:cNvSpPr/>
+          <p:nvPr/>
+        </p:nvSpPr>
+        <p:spPr>
+          <a:xfrm>
+            <a:off x="722376" y="329184"/>
+            <a:ext cx="10058400" cy="310896"/>
+          </a:xfrm>
+          <a:prstGeom prst="rect">
+            <a:avLst/>
+          </a:prstGeom>
+          <a:noFill/>
+          <a:ln/>
+        </p:spPr>
+        <p:txBody>
+          <a:bodyPr wrap="square" rtlCol="0" anchor="ctr"/>
+          <a:lstStyle/>
+          <a:p>
+            <a:pPr indent="0" marL="0">
+              <a:buNone/>
+            </a:pPr>
+            <a:r>
+              <a:rPr lang="en-US" sz="1150" b="1" spc="300" kern="0" dirty="0">
+                <a:solidFill>
+                  <a:srgbClr val="A9A399"/>
+                </a:solidFill>
+                <a:latin typeface="Calibri" pitchFamily="34" charset="0"/>
+                <a:ea typeface="Calibri" pitchFamily="34" charset="-122"/>
+                <a:cs typeface="Calibri" pitchFamily="34" charset="-120"/>
+              </a:rPr>
+              <a:t>ARCHITECTURE · STEP 6 OF 6</a:t>
+            </a:r>
+            <a:endParaRPr lang="en-US" sz="1150" dirty="0"/>
+          </a:p>
+        </p:txBody>
+      </p:sp>
+      <p:sp>
+        <p:nvSpPr>
+          <p:cNvPr id="4" name="Text 2"/>
+          <p:cNvSpPr/>
+          <p:nvPr/>
+        </p:nvSpPr>
+        <p:spPr>
+          <a:xfrm>
+            <a:off x="457200" y="658368"/>
+            <a:ext cx="11247120" cy="548640"/>
+          </a:xfrm>
+          <a:prstGeom prst="rect">
+            <a:avLst/>
+          </a:prstGeom>
+          <a:noFill/>
+          <a:ln/>
+        </p:spPr>
+        <p:txBody>
+          <a:bodyPr wrap="square" rtlCol="0" anchor="ctr"/>
+          <a:lstStyle/>
+          <a:p>
+            <a:pPr indent="0" marL="0">
+              <a:buNone/>
+            </a:pPr>
+            <a:r>
+              <a:rPr lang="en-US" sz="2500" b="1" dirty="0">
+                <a:solidFill>
+                  <a:srgbClr val="F4F1EA"/>
+                </a:solidFill>
+                <a:latin typeface="Arial Black" pitchFamily="34" charset="0"/>
+                <a:ea typeface="Arial Black" pitchFamily="34" charset="-122"/>
+                <a:cs typeface="Arial Black" pitchFamily="34" charset="-120"/>
+              </a:rPr>
+              <a:t>Six decisions that kill hallucination</a:t>
+            </a:r>
+            <a:endParaRPr lang="en-US" sz="2500" dirty="0"/>
+          </a:p>
+        </p:txBody>
+      </p:sp>
+      <p:sp>
+        <p:nvSpPr>
+          <p:cNvPr id="5" name="Shape 3"/>
+          <p:cNvSpPr/>
+          <p:nvPr/>
+        </p:nvSpPr>
+        <p:spPr>
+          <a:xfrm>
+            <a:off x="457200" y="2286000"/>
+            <a:ext cx="1207008" cy="868680"/>
+          </a:xfrm>
+          <a:prstGeom prst="roundRect">
+            <a:avLst>
+              <a:gd name="adj" fmla="val 7368"/>
+            </a:avLst>
+          </a:prstGeom>
+          <a:solidFill>
+            <a:srgbClr val="1D1D1D"/>
+          </a:solidFill>
+          <a:ln w="12700">
+            <a:solidFill>
+              <a:srgbClr val="3A3A3A"/>
+            </a:solidFill>
+            <a:prstDash val="solid"/>
+          </a:ln>
+        </p:spPr>
+      </p:sp>
+      <p:sp>
+        <p:nvSpPr>
+          <p:cNvPr id="6" name="Text 4"/>
+          <p:cNvSpPr/>
+          <p:nvPr/>
+        </p:nvSpPr>
+        <p:spPr>
+          <a:xfrm>
+            <a:off x="512064" y="2340864"/>
+            <a:ext cx="1097280" cy="758952"/>
+          </a:xfrm>
+          <a:prstGeom prst="rect">
+            <a:avLst/>
+          </a:prstGeom>
+          <a:noFill/>
+          <a:ln/>
+        </p:spPr>
+        <p:txBody>
+          <a:bodyPr wrap="square" rtlCol="0" anchor="ctr"/>
+          <a:lstStyle/>
+          <a:p>
+            <a:pPr algn="ctr" indent="0" marL="0">
+              <a:lnSpc>
+                <a:spcPts val="1300"/>
+              </a:lnSpc>
+              <a:buNone/>
+            </a:pPr>
+            <a:r>
+              <a:rPr lang="en-US" sz="1250" b="1" dirty="0">
+                <a:solidFill>
+                  <a:srgbClr val="F4F1EA"/>
+                </a:solidFill>
+                <a:latin typeface="Calibri" pitchFamily="34" charset="0"/>
+                <a:ea typeface="Calibri" pitchFamily="34" charset="-122"/>
+                <a:cs typeface="Calibri" pitchFamily="34" charset="-120"/>
+              </a:rPr>
+              <a:t>Customer
+</a:t>
+            </a:r>
+            <a:pPr algn="ctr" indent="0" marL="0">
+              <a:lnSpc>
+                <a:spcPts val="1300"/>
+              </a:lnSpc>
+              <a:buNone/>
+            </a:pPr>
+            <a:r>
+              <a:rPr lang="en-US" sz="1000" dirty="0">
+                <a:solidFill>
+                  <a:srgbClr val="A9A399"/>
+                </a:solidFill>
+                <a:latin typeface="Calibri" pitchFamily="34" charset="0"/>
+                <a:ea typeface="Calibri" pitchFamily="34" charset="-122"/>
+                <a:cs typeface="Calibri" pitchFamily="34" charset="-120"/>
+              </a:rPr>
+              <a:t>query</a:t>
+            </a:r>
+            <a:endParaRPr lang="en-US" sz="1250" dirty="0"/>
+          </a:p>
+        </p:txBody>
+      </p:sp>
+      <p:sp>
+        <p:nvSpPr>
+          <p:cNvPr id="7" name="Shape 5"/>
+          <p:cNvSpPr/>
+          <p:nvPr/>
+        </p:nvSpPr>
+        <p:spPr>
+          <a:xfrm>
+            <a:off x="1892808" y="2286000"/>
+            <a:ext cx="1325880" cy="868680"/>
+          </a:xfrm>
+          <a:prstGeom prst="roundRect">
+            <a:avLst>
+              <a:gd name="adj" fmla="val 7368"/>
+            </a:avLst>
+          </a:prstGeom>
+          <a:solidFill>
+            <a:srgbClr val="1D1D1D"/>
+          </a:solidFill>
+          <a:ln w="12700">
+            <a:solidFill>
+              <a:srgbClr val="3A3A3A"/>
+            </a:solidFill>
+            <a:prstDash val="solid"/>
+          </a:ln>
+        </p:spPr>
+      </p:sp>
+      <p:sp>
+        <p:nvSpPr>
+          <p:cNvPr id="8" name="Text 6"/>
+          <p:cNvSpPr/>
+          <p:nvPr/>
+        </p:nvSpPr>
+        <p:spPr>
+          <a:xfrm>
+            <a:off x="1947672" y="2340864"/>
+            <a:ext cx="1216152" cy="758952"/>
+          </a:xfrm>
+          <a:prstGeom prst="rect">
+            <a:avLst/>
+          </a:prstGeom>
+          <a:noFill/>
+          <a:ln/>
+        </p:spPr>
+        <p:txBody>
+          <a:bodyPr wrap="square" rtlCol="0" anchor="ctr"/>
+          <a:lstStyle/>
+          <a:p>
+            <a:pPr algn="ctr" indent="0" marL="0">
+              <a:lnSpc>
+                <a:spcPts val="1300"/>
+              </a:lnSpc>
+              <a:buNone/>
+            </a:pPr>
+            <a:r>
+              <a:rPr lang="en-US" sz="1250" b="1" dirty="0">
+                <a:solidFill>
+                  <a:srgbClr val="F4F1EA"/>
+                </a:solidFill>
+                <a:latin typeface="Calibri" pitchFamily="34" charset="0"/>
+                <a:ea typeface="Calibri" pitchFamily="34" charset="-122"/>
+                <a:cs typeface="Calibri" pitchFamily="34" charset="-120"/>
+              </a:rPr>
+              <a:t>Guardrails
+</a:t>
+            </a:r>
+            <a:pPr algn="ctr" indent="0" marL="0">
+              <a:lnSpc>
+                <a:spcPts val="1300"/>
+              </a:lnSpc>
+              <a:buNone/>
+            </a:pPr>
+            <a:r>
+              <a:rPr lang="en-US" sz="1000" dirty="0">
+                <a:solidFill>
+                  <a:srgbClr val="A9A399"/>
+                </a:solidFill>
+                <a:latin typeface="Calibri" pitchFamily="34" charset="0"/>
+                <a:ea typeface="Calibri" pitchFamily="34" charset="-122"/>
+                <a:cs typeface="Calibri" pitchFamily="34" charset="-120"/>
+              </a:rPr>
+              <a:t>PII · injection</a:t>
+            </a:r>
+            <a:endParaRPr lang="en-US" sz="1250" dirty="0"/>
+          </a:p>
+        </p:txBody>
+      </p:sp>
+      <p:sp>
+        <p:nvSpPr>
+          <p:cNvPr id="9" name="Shape 7"/>
+          <p:cNvSpPr/>
+          <p:nvPr/>
+        </p:nvSpPr>
+        <p:spPr>
+          <a:xfrm>
+            <a:off x="3447288" y="2286000"/>
+            <a:ext cx="1371600" cy="868680"/>
+          </a:xfrm>
+          <a:prstGeom prst="roundRect">
+            <a:avLst>
+              <a:gd name="adj" fmla="val 7368"/>
+            </a:avLst>
+          </a:prstGeom>
+          <a:solidFill>
+            <a:srgbClr val="1D1D1D"/>
+          </a:solidFill>
+          <a:ln w="12700">
+            <a:solidFill>
+              <a:srgbClr val="3A3A3A"/>
+            </a:solidFill>
+            <a:prstDash val="solid"/>
+          </a:ln>
+        </p:spPr>
+      </p:sp>
+      <p:sp>
+        <p:nvSpPr>
+          <p:cNvPr id="10" name="Text 8"/>
+          <p:cNvSpPr/>
+          <p:nvPr/>
+        </p:nvSpPr>
+        <p:spPr>
+          <a:xfrm>
+            <a:off x="3502152" y="2340864"/>
+            <a:ext cx="1261872" cy="758952"/>
+          </a:xfrm>
+          <a:prstGeom prst="rect">
+            <a:avLst/>
+          </a:prstGeom>
+          <a:noFill/>
+          <a:ln/>
+        </p:spPr>
+        <p:txBody>
+          <a:bodyPr wrap="square" rtlCol="0" anchor="ctr"/>
+          <a:lstStyle/>
+          <a:p>
+            <a:pPr algn="ctr" indent="0" marL="0">
+              <a:lnSpc>
+                <a:spcPts val="1300"/>
+              </a:lnSpc>
+              <a:buNone/>
+            </a:pPr>
+            <a:r>
+              <a:rPr lang="en-US" sz="1250" b="1" dirty="0">
+                <a:solidFill>
+                  <a:srgbClr val="F4F1EA"/>
+                </a:solidFill>
+                <a:latin typeface="Calibri" pitchFamily="34" charset="0"/>
+                <a:ea typeface="Calibri" pitchFamily="34" charset="-122"/>
+                <a:cs typeface="Calibri" pitchFamily="34" charset="-120"/>
+              </a:rPr>
+              <a:t>Clarity gate
+</a:t>
+            </a:r>
+            <a:pPr algn="ctr" indent="0" marL="0">
+              <a:lnSpc>
+                <a:spcPts val="1300"/>
+              </a:lnSpc>
+              <a:buNone/>
+            </a:pPr>
+            <a:r>
+              <a:rPr lang="en-US" sz="1000" dirty="0">
+                <a:solidFill>
+                  <a:srgbClr val="A9A399"/>
+                </a:solidFill>
+                <a:latin typeface="Calibri" pitchFamily="34" charset="0"/>
+                <a:ea typeface="Calibri" pitchFamily="34" charset="-122"/>
+                <a:cs typeface="Calibri" pitchFamily="34" charset="-120"/>
+              </a:rPr>
+              <a:t>ask, don't guess</a:t>
+            </a:r>
+            <a:endParaRPr lang="en-US" sz="1250" dirty="0"/>
+          </a:p>
+        </p:txBody>
+      </p:sp>
+      <p:sp>
+        <p:nvSpPr>
+          <p:cNvPr id="11" name="Shape 9"/>
+          <p:cNvSpPr/>
+          <p:nvPr/>
+        </p:nvSpPr>
+        <p:spPr>
+          <a:xfrm>
+            <a:off x="5120640" y="2286000"/>
+            <a:ext cx="1325880" cy="868680"/>
+          </a:xfrm>
+          <a:prstGeom prst="roundRect">
+            <a:avLst>
+              <a:gd name="adj" fmla="val 7368"/>
+            </a:avLst>
+          </a:prstGeom>
+          <a:solidFill>
+            <a:srgbClr val="1D1D1D"/>
+          </a:solidFill>
+          <a:ln w="12700">
+            <a:solidFill>
+              <a:srgbClr val="3A3A3A"/>
+            </a:solidFill>
+            <a:prstDash val="solid"/>
+          </a:ln>
+        </p:spPr>
+      </p:sp>
+      <p:sp>
+        <p:nvSpPr>
+          <p:cNvPr id="12" name="Text 10"/>
+          <p:cNvSpPr/>
+          <p:nvPr/>
+        </p:nvSpPr>
+        <p:spPr>
+          <a:xfrm>
+            <a:off x="5175504" y="2340864"/>
+            <a:ext cx="1216152" cy="758952"/>
+          </a:xfrm>
+          <a:prstGeom prst="rect">
+            <a:avLst/>
+          </a:prstGeom>
+          <a:noFill/>
+          <a:ln/>
+        </p:spPr>
+        <p:txBody>
+          <a:bodyPr wrap="square" rtlCol="0" anchor="ctr"/>
+          <a:lstStyle/>
+          <a:p>
+            <a:pPr algn="ctr" indent="0" marL="0">
+              <a:lnSpc>
+                <a:spcPts val="1300"/>
+              </a:lnSpc>
+              <a:buNone/>
+            </a:pPr>
+            <a:r>
+              <a:rPr lang="en-US" sz="1250" b="1" dirty="0">
+                <a:solidFill>
+                  <a:srgbClr val="F4F1EA"/>
+                </a:solidFill>
+                <a:latin typeface="Calibri" pitchFamily="34" charset="0"/>
+                <a:ea typeface="Calibri" pitchFamily="34" charset="-122"/>
+                <a:cs typeface="Calibri" pitchFamily="34" charset="-120"/>
+              </a:rPr>
+              <a:t>Model router
+</a:t>
+            </a:r>
+            <a:pPr algn="ctr" indent="0" marL="0">
+              <a:lnSpc>
+                <a:spcPts val="1300"/>
+              </a:lnSpc>
+              <a:buNone/>
+            </a:pPr>
+            <a:r>
+              <a:rPr lang="en-US" sz="1000" dirty="0">
+                <a:solidFill>
+                  <a:srgbClr val="A9A399"/>
+                </a:solidFill>
+                <a:latin typeface="Calibri" pitchFamily="34" charset="0"/>
+                <a:ea typeface="Calibri" pitchFamily="34" charset="-122"/>
+                <a:cs typeface="Calibri" pitchFamily="34" charset="-120"/>
+              </a:rPr>
+              <a:t>right-sized</a:t>
+            </a:r>
+            <a:endParaRPr lang="en-US" sz="1250" dirty="0"/>
+          </a:p>
+        </p:txBody>
+      </p:sp>
+      <p:sp>
+        <p:nvSpPr>
+          <p:cNvPr id="13" name="Shape 11"/>
+          <p:cNvSpPr/>
+          <p:nvPr/>
+        </p:nvSpPr>
+        <p:spPr>
+          <a:xfrm>
+            <a:off x="6812280" y="1481328"/>
+            <a:ext cx="1645920" cy="868680"/>
+          </a:xfrm>
+          <a:prstGeom prst="roundRect">
+            <a:avLst>
+              <a:gd name="adj" fmla="val 7368"/>
+            </a:avLst>
+          </a:prstGeom>
+          <a:solidFill>
+            <a:srgbClr val="1D1D1D"/>
+          </a:solidFill>
+          <a:ln w="12700">
+            <a:solidFill>
+              <a:srgbClr val="3A3A3A"/>
+            </a:solidFill>
+            <a:prstDash val="solid"/>
+          </a:ln>
+        </p:spPr>
+      </p:sp>
+      <p:sp>
+        <p:nvSpPr>
+          <p:cNvPr id="14" name="Text 12"/>
+          <p:cNvSpPr/>
+          <p:nvPr/>
+        </p:nvSpPr>
+        <p:spPr>
+          <a:xfrm>
+            <a:off x="6867144" y="1536192"/>
+            <a:ext cx="1536192" cy="758952"/>
+          </a:xfrm>
+          <a:prstGeom prst="rect">
+            <a:avLst/>
+          </a:prstGeom>
+          <a:noFill/>
+          <a:ln/>
+        </p:spPr>
+        <p:txBody>
+          <a:bodyPr wrap="square" rtlCol="0" anchor="ctr"/>
+          <a:lstStyle/>
+          <a:p>
+            <a:pPr algn="ctr" indent="0" marL="0">
+              <a:lnSpc>
+                <a:spcPts val="1300"/>
+              </a:lnSpc>
+              <a:buNone/>
+            </a:pPr>
+            <a:r>
+              <a:rPr lang="en-US" sz="1250" b="1" dirty="0">
+                <a:solidFill>
+                  <a:srgbClr val="F4F1EA"/>
+                </a:solidFill>
+                <a:latin typeface="Calibri" pitchFamily="34" charset="0"/>
+                <a:ea typeface="Calibri" pitchFamily="34" charset="-122"/>
+                <a:cs typeface="Calibri" pitchFamily="34" charset="-120"/>
+              </a:rPr>
+              <a:t>Fast lane
+</a:t>
+            </a:r>
+            <a:pPr algn="ctr" indent="0" marL="0">
+              <a:lnSpc>
+                <a:spcPts val="1300"/>
+              </a:lnSpc>
+              <a:buNone/>
+            </a:pPr>
+            <a:r>
+              <a:rPr lang="en-US" sz="1000" dirty="0">
+                <a:solidFill>
+                  <a:srgbClr val="A9A399"/>
+                </a:solidFill>
+                <a:latin typeface="Calibri" pitchFamily="34" charset="0"/>
+                <a:ea typeface="Calibri" pitchFamily="34" charset="-122"/>
+                <a:cs typeface="Calibri" pitchFamily="34" charset="-120"/>
+              </a:rPr>
+              <a:t>1.5B fine-tuned</a:t>
+            </a:r>
+            <a:endParaRPr lang="en-US" sz="1250" dirty="0"/>
+          </a:p>
+        </p:txBody>
+      </p:sp>
+      <p:sp>
+        <p:nvSpPr>
+          <p:cNvPr id="15" name="Shape 13"/>
+          <p:cNvSpPr/>
+          <p:nvPr/>
+        </p:nvSpPr>
+        <p:spPr>
+          <a:xfrm>
+            <a:off x="6812280" y="3127248"/>
+            <a:ext cx="1645920" cy="868680"/>
+          </a:xfrm>
+          <a:prstGeom prst="roundRect">
+            <a:avLst>
+              <a:gd name="adj" fmla="val 7368"/>
+            </a:avLst>
+          </a:prstGeom>
+          <a:solidFill>
+            <a:srgbClr val="1D1D1D"/>
+          </a:solidFill>
+          <a:ln w="12700">
+            <a:solidFill>
+              <a:srgbClr val="3A3A3A"/>
+            </a:solidFill>
+            <a:prstDash val="solid"/>
+          </a:ln>
+        </p:spPr>
+      </p:sp>
+      <p:sp>
+        <p:nvSpPr>
+          <p:cNvPr id="16" name="Text 14"/>
+          <p:cNvSpPr/>
+          <p:nvPr/>
+        </p:nvSpPr>
+        <p:spPr>
+          <a:xfrm>
+            <a:off x="6867144" y="3182112"/>
+            <a:ext cx="1536192" cy="758952"/>
+          </a:xfrm>
+          <a:prstGeom prst="rect">
+            <a:avLst/>
+          </a:prstGeom>
+          <a:noFill/>
+          <a:ln/>
+        </p:spPr>
+        <p:txBody>
+          <a:bodyPr wrap="square" rtlCol="0" anchor="ctr"/>
+          <a:lstStyle/>
+          <a:p>
+            <a:pPr algn="ctr" indent="0" marL="0">
+              <a:lnSpc>
+                <a:spcPts val="1300"/>
+              </a:lnSpc>
+              <a:buNone/>
+            </a:pPr>
+            <a:r>
+              <a:rPr lang="en-US" sz="1250" b="1" dirty="0">
+                <a:solidFill>
+                  <a:srgbClr val="F4F1EA"/>
+                </a:solidFill>
+                <a:latin typeface="Calibri" pitchFamily="34" charset="0"/>
+                <a:ea typeface="Calibri" pitchFamily="34" charset="-122"/>
+                <a:cs typeface="Calibri" pitchFamily="34" charset="-120"/>
+              </a:rPr>
+              <a:t>Expert lane
+</a:t>
+            </a:r>
+            <a:pPr algn="ctr" indent="0" marL="0">
+              <a:lnSpc>
+                <a:spcPts val="1300"/>
+              </a:lnSpc>
+              <a:buNone/>
+            </a:pPr>
+            <a:r>
+              <a:rPr lang="en-US" sz="1000" dirty="0">
+                <a:solidFill>
+                  <a:srgbClr val="A9A399"/>
+                </a:solidFill>
+                <a:latin typeface="Calibri" pitchFamily="34" charset="0"/>
+                <a:ea typeface="Calibri" pitchFamily="34" charset="-122"/>
+                <a:cs typeface="Calibri" pitchFamily="34" charset="-120"/>
+              </a:rPr>
+              <a:t>14B · vLLM</a:t>
+            </a:r>
+            <a:endParaRPr lang="en-US" sz="1250" dirty="0"/>
+          </a:p>
+        </p:txBody>
+      </p:sp>
+      <p:sp>
+        <p:nvSpPr>
+          <p:cNvPr id="17" name="Shape 15"/>
+          <p:cNvSpPr/>
+          <p:nvPr/>
+        </p:nvSpPr>
+        <p:spPr>
+          <a:xfrm>
+            <a:off x="8823960" y="2286000"/>
+            <a:ext cx="1325880" cy="868680"/>
+          </a:xfrm>
+          <a:prstGeom prst="roundRect">
+            <a:avLst>
+              <a:gd name="adj" fmla="val 7368"/>
+            </a:avLst>
+          </a:prstGeom>
+          <a:solidFill>
+            <a:srgbClr val="1D1D1D"/>
+          </a:solidFill>
+          <a:ln w="12700">
+            <a:solidFill>
+              <a:srgbClr val="3A3A3A"/>
+            </a:solidFill>
+            <a:prstDash val="solid"/>
+          </a:ln>
+        </p:spPr>
+      </p:sp>
+      <p:sp>
+        <p:nvSpPr>
+          <p:cNvPr id="18" name="Text 16"/>
+          <p:cNvSpPr/>
+          <p:nvPr/>
+        </p:nvSpPr>
+        <p:spPr>
+          <a:xfrm>
+            <a:off x="8878824" y="2340864"/>
+            <a:ext cx="1216152" cy="758952"/>
+          </a:xfrm>
+          <a:prstGeom prst="rect">
+            <a:avLst/>
+          </a:prstGeom>
+          <a:noFill/>
+          <a:ln/>
+        </p:spPr>
+        <p:txBody>
+          <a:bodyPr wrap="square" rtlCol="0" anchor="ctr"/>
+          <a:lstStyle/>
+          <a:p>
+            <a:pPr algn="ctr" indent="0" marL="0">
+              <a:lnSpc>
+                <a:spcPts val="1300"/>
+              </a:lnSpc>
+              <a:buNone/>
+            </a:pPr>
+            <a:r>
+              <a:rPr lang="en-US" sz="1250" b="1" dirty="0">
+                <a:solidFill>
+                  <a:srgbClr val="F4F1EA"/>
+                </a:solidFill>
+                <a:latin typeface="Calibri" pitchFamily="34" charset="0"/>
+                <a:ea typeface="Calibri" pitchFamily="34" charset="-122"/>
+                <a:cs typeface="Calibri" pitchFamily="34" charset="-120"/>
+              </a:rPr>
+              <a:t>Trust gate
+</a:t>
+            </a:r>
+            <a:pPr algn="ctr" indent="0" marL="0">
+              <a:lnSpc>
+                <a:spcPts val="1300"/>
+              </a:lnSpc>
+              <a:buNone/>
+            </a:pPr>
+            <a:r>
+              <a:rPr lang="en-US" sz="1000" dirty="0">
+                <a:solidFill>
+                  <a:srgbClr val="A9A399"/>
+                </a:solidFill>
+                <a:latin typeface="Calibri" pitchFamily="34" charset="0"/>
+                <a:ea typeface="Calibri" pitchFamily="34" charset="-122"/>
+                <a:cs typeface="Calibri" pitchFamily="34" charset="-120"/>
+              </a:rPr>
+              <a:t>score &lt; 0.6 ↗</a:t>
+            </a:r>
+            <a:endParaRPr lang="en-US" sz="1250" dirty="0"/>
+          </a:p>
+        </p:txBody>
+      </p:sp>
+      <p:sp>
+        <p:nvSpPr>
+          <p:cNvPr id="19" name="Shape 17"/>
+          <p:cNvSpPr/>
+          <p:nvPr/>
+        </p:nvSpPr>
+        <p:spPr>
+          <a:xfrm>
+            <a:off x="10469880" y="1481328"/>
+            <a:ext cx="1554480" cy="868680"/>
+          </a:xfrm>
+          <a:prstGeom prst="roundRect">
+            <a:avLst>
+              <a:gd name="adj" fmla="val 7368"/>
+            </a:avLst>
+          </a:prstGeom>
+          <a:solidFill>
+            <a:srgbClr val="1D1D1D"/>
+          </a:solidFill>
+          <a:ln w="12700">
+            <a:solidFill>
+              <a:srgbClr val="3A3A3A"/>
+            </a:solidFill>
+            <a:prstDash val="solid"/>
+          </a:ln>
+        </p:spPr>
+      </p:sp>
+      <p:sp>
+        <p:nvSpPr>
+          <p:cNvPr id="20" name="Text 18"/>
+          <p:cNvSpPr/>
+          <p:nvPr/>
+        </p:nvSpPr>
+        <p:spPr>
+          <a:xfrm>
+            <a:off x="10561320" y="1527048"/>
+            <a:ext cx="1371600" cy="777240"/>
+          </a:xfrm>
+          <a:prstGeom prst="rect">
+            <a:avLst/>
+          </a:prstGeom>
+          <a:noFill/>
+          <a:ln/>
+        </p:spPr>
+        <p:txBody>
+          <a:bodyPr wrap="square" rtlCol="0" anchor="ctr"/>
+          <a:lstStyle/>
+          <a:p>
+            <a:pPr algn="ctr" indent="0" marL="0">
+              <a:buNone/>
+            </a:pPr>
+            <a:r>
+              <a:rPr lang="en-US" sz="1250" b="1" dirty="0">
+                <a:solidFill>
+                  <a:srgbClr val="F4F1EA"/>
+                </a:solidFill>
+                <a:latin typeface="Calibri" pitchFamily="34" charset="0"/>
+                <a:ea typeface="Calibri" pitchFamily="34" charset="-122"/>
+                <a:cs typeface="Calibri" pitchFamily="34" charset="-120"/>
+              </a:rPr>
+              <a:t>Answer</a:t>
+            </a:r>
+            <a:endParaRPr lang="en-US" sz="1250" dirty="0"/>
+          </a:p>
+        </p:txBody>
+      </p:sp>
+      <p:sp>
+        <p:nvSpPr>
+          <p:cNvPr id="21" name="Shape 19"/>
+          <p:cNvSpPr/>
+          <p:nvPr/>
+        </p:nvSpPr>
+        <p:spPr>
+          <a:xfrm>
+            <a:off x="10469880" y="3127248"/>
+            <a:ext cx="1554480" cy="868680"/>
+          </a:xfrm>
+          <a:prstGeom prst="roundRect">
+            <a:avLst>
+              <a:gd name="adj" fmla="val 7368"/>
+            </a:avLst>
+          </a:prstGeom>
+          <a:solidFill>
+            <a:srgbClr val="1D1D1D"/>
+          </a:solidFill>
+          <a:ln w="12700">
+            <a:solidFill>
+              <a:srgbClr val="3A3A3A"/>
+            </a:solidFill>
+            <a:prstDash val="solid"/>
+          </a:ln>
+        </p:spPr>
+      </p:sp>
+      <p:sp>
+        <p:nvSpPr>
+          <p:cNvPr id="22" name="Text 20"/>
+          <p:cNvSpPr/>
+          <p:nvPr/>
+        </p:nvSpPr>
+        <p:spPr>
+          <a:xfrm>
+            <a:off x="10524744" y="3182112"/>
+            <a:ext cx="1444752" cy="758952"/>
+          </a:xfrm>
+          <a:prstGeom prst="rect">
+            <a:avLst/>
+          </a:prstGeom>
+          <a:noFill/>
+          <a:ln/>
+        </p:spPr>
+        <p:txBody>
+          <a:bodyPr wrap="square" rtlCol="0" anchor="ctr"/>
+          <a:lstStyle/>
+          <a:p>
+            <a:pPr algn="ctr" indent="0" marL="0">
+              <a:lnSpc>
+                <a:spcPts val="1300"/>
+              </a:lnSpc>
+              <a:buNone/>
+            </a:pPr>
+            <a:r>
+              <a:rPr lang="en-US" sz="1250" b="1" dirty="0">
+                <a:solidFill>
+                  <a:srgbClr val="F4F1EA"/>
+                </a:solidFill>
+                <a:latin typeface="Calibri" pitchFamily="34" charset="0"/>
+                <a:ea typeface="Calibri" pitchFamily="34" charset="-122"/>
+                <a:cs typeface="Calibri" pitchFamily="34" charset="-120"/>
+              </a:rPr>
+              <a:t>On-call expert
+</a:t>
+            </a:r>
+            <a:pPr algn="ctr" indent="0" marL="0">
+              <a:lnSpc>
+                <a:spcPts val="1300"/>
+              </a:lnSpc>
+              <a:buNone/>
+            </a:pPr>
+            <a:r>
+              <a:rPr lang="en-US" sz="1000" dirty="0">
+                <a:solidFill>
+                  <a:srgbClr val="A9A399"/>
+                </a:solidFill>
+                <a:latin typeface="Calibri" pitchFamily="34" charset="0"/>
+                <a:ea typeface="Calibri" pitchFamily="34" charset="-122"/>
+                <a:cs typeface="Calibri" pitchFamily="34" charset="-120"/>
+              </a:rPr>
+              <a:t>via MCP</a:t>
+            </a:r>
+            <a:endParaRPr lang="en-US" sz="1250" dirty="0"/>
+          </a:p>
+        </p:txBody>
+      </p:sp>
+      <p:sp>
+        <p:nvSpPr>
+          <p:cNvPr id="23" name="Shape 21"/>
+          <p:cNvSpPr/>
+          <p:nvPr/>
+        </p:nvSpPr>
+        <p:spPr>
+          <a:xfrm>
+            <a:off x="3977640" y="4434840"/>
+            <a:ext cx="5486400" cy="640080"/>
+          </a:xfrm>
+          <a:prstGeom prst="roundRect">
+            <a:avLst>
+              <a:gd name="adj" fmla="val 10000"/>
+            </a:avLst>
+          </a:prstGeom>
+          <a:solidFill>
+            <a:srgbClr val="1D1D1D"/>
+          </a:solidFill>
+          <a:ln w="12700">
+            <a:solidFill>
+              <a:srgbClr val="3A3A3A"/>
+            </a:solidFill>
+            <a:prstDash val="solid"/>
+          </a:ln>
+        </p:spPr>
+      </p:sp>
+      <p:sp>
+        <p:nvSpPr>
+          <p:cNvPr id="24" name="Text 22"/>
+          <p:cNvSpPr/>
+          <p:nvPr/>
+        </p:nvSpPr>
+        <p:spPr>
+          <a:xfrm>
+            <a:off x="4069080" y="4480560"/>
+            <a:ext cx="5303520" cy="548640"/>
+          </a:xfrm>
+          <a:prstGeom prst="rect">
+            <a:avLst/>
+          </a:prstGeom>
+          <a:noFill/>
+          <a:ln/>
+        </p:spPr>
+        <p:txBody>
+          <a:bodyPr wrap="square" rtlCol="0" anchor="ctr"/>
+          <a:lstStyle/>
+          <a:p>
+            <a:pPr algn="ctr" indent="0" marL="0">
+              <a:buNone/>
+            </a:pPr>
+            <a:r>
+              <a:rPr lang="en-US" sz="1200" b="1" dirty="0">
+                <a:solidFill>
+                  <a:srgbClr val="F4F1EA"/>
+                </a:solidFill>
+                <a:latin typeface="Calibri" pitchFamily="34" charset="0"/>
+                <a:ea typeface="Calibri" pitchFamily="34" charset="-122"/>
+                <a:cs typeface="Calibri" pitchFamily="34" charset="-120"/>
+              </a:rPr>
+              <a:t>Knowledge fabric — hybrid RAG (BM25 + vector, RRF) · MCP outage feed</a:t>
+            </a:r>
+            <a:endParaRPr lang="en-US" sz="1200" dirty="0"/>
+          </a:p>
+        </p:txBody>
+      </p:sp>
+      <p:sp>
+        <p:nvSpPr>
+          <p:cNvPr id="25" name="Shape 23"/>
+          <p:cNvSpPr/>
+          <p:nvPr/>
+        </p:nvSpPr>
+        <p:spPr>
+          <a:xfrm>
+            <a:off x="1828800" y="5440680"/>
+            <a:ext cx="2011680" cy="731520"/>
+          </a:xfrm>
+          <a:prstGeom prst="roundRect">
+            <a:avLst>
+              <a:gd name="adj" fmla="val 8750"/>
+            </a:avLst>
+          </a:prstGeom>
+          <a:solidFill>
+            <a:srgbClr val="1D1D1D"/>
+          </a:solidFill>
+          <a:ln w="25400">
+            <a:solidFill>
+              <a:srgbClr val="ED1C24"/>
+            </a:solidFill>
+            <a:prstDash val="solid"/>
+          </a:ln>
+        </p:spPr>
+      </p:sp>
+      <p:sp>
+        <p:nvSpPr>
+          <p:cNvPr id="26" name="Text 24"/>
+          <p:cNvSpPr/>
+          <p:nvPr/>
+        </p:nvSpPr>
+        <p:spPr>
+          <a:xfrm>
+            <a:off x="1883664" y="5495544"/>
+            <a:ext cx="1901952" cy="758952"/>
+          </a:xfrm>
+          <a:prstGeom prst="rect">
+            <a:avLst/>
+          </a:prstGeom>
+          <a:noFill/>
+          <a:ln/>
+        </p:spPr>
+        <p:txBody>
+          <a:bodyPr wrap="square" rtlCol="0" anchor="ctr"/>
+          <a:lstStyle/>
+          <a:p>
+            <a:pPr algn="ctr" indent="0" marL="0">
+              <a:lnSpc>
+                <a:spcPts val="1300"/>
+              </a:lnSpc>
+              <a:buNone/>
+            </a:pPr>
+            <a:r>
+              <a:rPr lang="en-US" sz="1250" b="1" dirty="0">
+                <a:solidFill>
+                  <a:srgbClr val="F4F1EA"/>
+                </a:solidFill>
+                <a:latin typeface="Calibri" pitchFamily="34" charset="0"/>
+                <a:ea typeface="Calibri" pitchFamily="34" charset="-122"/>
+                <a:cs typeface="Calibri" pitchFamily="34" charset="-120"/>
+              </a:rPr>
+              <a:t>Ground-truth DB
+</a:t>
+            </a:r>
+            <a:pPr algn="ctr" indent="0" marL="0">
+              <a:lnSpc>
+                <a:spcPts val="1300"/>
+              </a:lnSpc>
+              <a:buNone/>
+            </a:pPr>
+            <a:r>
+              <a:rPr lang="en-US" sz="1000" dirty="0">
+                <a:solidFill>
+                  <a:srgbClr val="FFB3B6"/>
+                </a:solidFill>
+                <a:latin typeface="Calibri" pitchFamily="34" charset="0"/>
+                <a:ea typeface="Calibri" pitchFamily="34" charset="-122"/>
+                <a:cs typeface="Calibri" pitchFamily="34" charset="-120"/>
+              </a:rPr>
+              <a:t>approved pairs</a:t>
+            </a:r>
+            <a:endParaRPr lang="en-US" sz="1250" dirty="0"/>
+          </a:p>
+        </p:txBody>
+      </p:sp>
+      <p:sp>
+        <p:nvSpPr>
+          <p:cNvPr id="27" name="Shape 25"/>
+          <p:cNvSpPr/>
+          <p:nvPr/>
+        </p:nvSpPr>
+        <p:spPr>
+          <a:xfrm>
+            <a:off x="4572000" y="5440680"/>
+            <a:ext cx="1920240" cy="731520"/>
+          </a:xfrm>
+          <a:prstGeom prst="roundRect">
+            <a:avLst>
+              <a:gd name="adj" fmla="val 8750"/>
+            </a:avLst>
+          </a:prstGeom>
+          <a:solidFill>
+            <a:srgbClr val="1D1D1D"/>
+          </a:solidFill>
+          <a:ln w="25400">
+            <a:solidFill>
+              <a:srgbClr val="ED1C24"/>
+            </a:solidFill>
+            <a:prstDash val="solid"/>
+          </a:ln>
+        </p:spPr>
+      </p:sp>
+      <p:sp>
+        <p:nvSpPr>
+          <p:cNvPr id="28" name="Text 26"/>
+          <p:cNvSpPr/>
+          <p:nvPr/>
+        </p:nvSpPr>
+        <p:spPr>
+          <a:xfrm>
+            <a:off x="4626864" y="5495544"/>
+            <a:ext cx="1810512" cy="758952"/>
+          </a:xfrm>
+          <a:prstGeom prst="rect">
+            <a:avLst/>
+          </a:prstGeom>
+          <a:noFill/>
+          <a:ln/>
+        </p:spPr>
+        <p:txBody>
+          <a:bodyPr wrap="square" rtlCol="0" anchor="ctr"/>
+          <a:lstStyle/>
+          <a:p>
+            <a:pPr algn="ctr" indent="0" marL="0">
+              <a:lnSpc>
+                <a:spcPts val="1300"/>
+              </a:lnSpc>
+              <a:buNone/>
+            </a:pPr>
+            <a:r>
+              <a:rPr lang="en-US" sz="1250" b="1" dirty="0">
+                <a:solidFill>
+                  <a:srgbClr val="F4F1EA"/>
+                </a:solidFill>
+                <a:latin typeface="Calibri" pitchFamily="34" charset="0"/>
+                <a:ea typeface="Calibri" pitchFamily="34" charset="-122"/>
+                <a:cs typeface="Calibri" pitchFamily="34" charset="-120"/>
+              </a:rPr>
+              <a:t>Tier-zero cache
+</a:t>
+            </a:r>
+            <a:pPr algn="ctr" indent="0" marL="0">
+              <a:lnSpc>
+                <a:spcPts val="1300"/>
+              </a:lnSpc>
+              <a:buNone/>
+            </a:pPr>
+            <a:r>
+              <a:rPr lang="en-US" sz="1000" dirty="0">
+                <a:solidFill>
+                  <a:srgbClr val="FFB3B6"/>
+                </a:solidFill>
+                <a:latin typeface="Calibri" pitchFamily="34" charset="0"/>
+                <a:ea typeface="Calibri" pitchFamily="34" charset="-122"/>
+                <a:cs typeface="Calibri" pitchFamily="34" charset="-120"/>
+              </a:rPr>
+              <a:t>0 GPU · 10 ms</a:t>
+            </a:r>
+            <a:endParaRPr lang="en-US" sz="1250" dirty="0"/>
+          </a:p>
+        </p:txBody>
+      </p:sp>
+      <p:sp>
+        <p:nvSpPr>
+          <p:cNvPr id="29" name="Shape 27"/>
+          <p:cNvSpPr/>
+          <p:nvPr/>
+        </p:nvSpPr>
+        <p:spPr>
+          <a:xfrm>
+            <a:off x="7223760" y="5440680"/>
+            <a:ext cx="2011680" cy="731520"/>
+          </a:xfrm>
+          <a:prstGeom prst="roundRect">
+            <a:avLst>
+              <a:gd name="adj" fmla="val 8750"/>
+            </a:avLst>
+          </a:prstGeom>
+          <a:solidFill>
+            <a:srgbClr val="1D1D1D"/>
+          </a:solidFill>
+          <a:ln w="25400">
+            <a:solidFill>
+              <a:srgbClr val="ED1C24"/>
+            </a:solidFill>
+            <a:prstDash val="solid"/>
+          </a:ln>
+        </p:spPr>
+      </p:sp>
+      <p:sp>
+        <p:nvSpPr>
+          <p:cNvPr id="30" name="Text 28"/>
+          <p:cNvSpPr/>
+          <p:nvPr/>
+        </p:nvSpPr>
+        <p:spPr>
+          <a:xfrm>
+            <a:off x="7278624" y="5495544"/>
+            <a:ext cx="1901952" cy="758952"/>
+          </a:xfrm>
+          <a:prstGeom prst="rect">
+            <a:avLst/>
+          </a:prstGeom>
+          <a:noFill/>
+          <a:ln/>
+        </p:spPr>
+        <p:txBody>
+          <a:bodyPr wrap="square" rtlCol="0" anchor="ctr"/>
+          <a:lstStyle/>
+          <a:p>
+            <a:pPr algn="ctr" indent="0" marL="0">
+              <a:lnSpc>
+                <a:spcPts val="1300"/>
+              </a:lnSpc>
+              <a:buNone/>
+            </a:pPr>
+            <a:r>
+              <a:rPr lang="en-US" sz="1250" b="1" dirty="0">
+                <a:solidFill>
+                  <a:srgbClr val="F4F1EA"/>
+                </a:solidFill>
+                <a:latin typeface="Calibri" pitchFamily="34" charset="0"/>
+                <a:ea typeface="Calibri" pitchFamily="34" charset="-122"/>
+                <a:cs typeface="Calibri" pitchFamily="34" charset="-120"/>
+              </a:rPr>
+              <a:t>60 s LoRA retrain
+</a:t>
+            </a:r>
+            <a:pPr algn="ctr" indent="0" marL="0">
+              <a:lnSpc>
+                <a:spcPts val="1300"/>
+              </a:lnSpc>
+              <a:buNone/>
+            </a:pPr>
+            <a:r>
+              <a:rPr lang="en-US" sz="1000" dirty="0">
+                <a:solidFill>
+                  <a:srgbClr val="FFB3B6"/>
+                </a:solidFill>
+                <a:latin typeface="Calibri" pitchFamily="34" charset="0"/>
+                <a:ea typeface="Calibri" pitchFamily="34" charset="-122"/>
+                <a:cs typeface="Calibri" pitchFamily="34" charset="-120"/>
+              </a:rPr>
+              <a:t>on MI300X</a:t>
+            </a:r>
+            <a:endParaRPr lang="en-US" sz="1250" dirty="0"/>
+          </a:p>
+        </p:txBody>
+      </p:sp>
+      <p:sp>
+        <p:nvSpPr>
+          <p:cNvPr id="31" name="Shape 29"/>
+          <p:cNvSpPr/>
+          <p:nvPr/>
+        </p:nvSpPr>
+        <p:spPr>
+          <a:xfrm>
+            <a:off x="1664208" y="2720340"/>
+            <a:ext cx="228600" cy="914"/>
+          </a:xfrm>
+          <a:prstGeom prst="line">
+            <a:avLst/>
+          </a:prstGeom>
+          <a:noFill/>
+          <a:ln w="19050">
+            <a:solidFill>
+              <a:srgbClr val="4A4A4A"/>
+            </a:solidFill>
+            <a:prstDash val="solid"/>
+            <a:tailEnd type="triangle"/>
+          </a:ln>
+        </p:spPr>
+      </p:sp>
+      <p:sp>
+        <p:nvSpPr>
+          <p:cNvPr id="32" name="Shape 30"/>
+          <p:cNvSpPr/>
+          <p:nvPr/>
+        </p:nvSpPr>
+        <p:spPr>
+          <a:xfrm>
+            <a:off x="3218688" y="2720340"/>
+            <a:ext cx="228600" cy="914"/>
+          </a:xfrm>
+          <a:prstGeom prst="line">
+            <a:avLst/>
+          </a:prstGeom>
+          <a:noFill/>
+          <a:ln w="19050">
+            <a:solidFill>
+              <a:srgbClr val="4A4A4A"/>
+            </a:solidFill>
+            <a:prstDash val="solid"/>
+            <a:tailEnd type="triangle"/>
+          </a:ln>
+        </p:spPr>
+      </p:sp>
+      <p:sp>
+        <p:nvSpPr>
+          <p:cNvPr id="33" name="Shape 31"/>
+          <p:cNvSpPr/>
+          <p:nvPr/>
+        </p:nvSpPr>
+        <p:spPr>
+          <a:xfrm>
+            <a:off x="4818888" y="2720340"/>
+            <a:ext cx="301752" cy="914"/>
+          </a:xfrm>
+          <a:prstGeom prst="line">
+            <a:avLst/>
+          </a:prstGeom>
+          <a:noFill/>
+          <a:ln w="19050">
+            <a:solidFill>
+              <a:srgbClr val="4A4A4A"/>
+            </a:solidFill>
+            <a:prstDash val="solid"/>
+            <a:tailEnd type="triangle"/>
+          </a:ln>
+        </p:spPr>
+      </p:sp>
+      <p:sp>
+        <p:nvSpPr>
+          <p:cNvPr id="34" name="Shape 32"/>
+          <p:cNvSpPr/>
+          <p:nvPr/>
+        </p:nvSpPr>
+        <p:spPr>
+          <a:xfrm flipV="1">
+            <a:off x="6446520" y="1915668"/>
+            <a:ext cx="365760" cy="694944"/>
+          </a:xfrm>
+          <a:prstGeom prst="line">
+            <a:avLst/>
+          </a:prstGeom>
+          <a:noFill/>
+          <a:ln w="19050">
+            <a:solidFill>
+              <a:srgbClr val="4A4A4A"/>
+            </a:solidFill>
+            <a:prstDash val="solid"/>
+            <a:tailEnd type="triangle"/>
+          </a:ln>
+        </p:spPr>
+      </p:sp>
+      <p:sp>
+        <p:nvSpPr>
+          <p:cNvPr id="35" name="Shape 33"/>
+          <p:cNvSpPr/>
+          <p:nvPr/>
+        </p:nvSpPr>
+        <p:spPr>
+          <a:xfrm>
+            <a:off x="6446520" y="2830068"/>
+            <a:ext cx="365760" cy="731520"/>
+          </a:xfrm>
+          <a:prstGeom prst="line">
+            <a:avLst/>
+          </a:prstGeom>
+          <a:noFill/>
+          <a:ln w="19050">
+            <a:solidFill>
+              <a:srgbClr val="4A4A4A"/>
+            </a:solidFill>
+            <a:prstDash val="solid"/>
+            <a:tailEnd type="triangle"/>
+          </a:ln>
+        </p:spPr>
+      </p:sp>
+      <p:sp>
+        <p:nvSpPr>
+          <p:cNvPr id="36" name="Shape 34"/>
+          <p:cNvSpPr/>
+          <p:nvPr/>
+        </p:nvSpPr>
+        <p:spPr>
+          <a:xfrm>
+            <a:off x="8458200" y="1915668"/>
+            <a:ext cx="365760" cy="694944"/>
+          </a:xfrm>
+          <a:prstGeom prst="line">
+            <a:avLst/>
+          </a:prstGeom>
+          <a:noFill/>
+          <a:ln w="19050">
+            <a:solidFill>
+              <a:srgbClr val="4A4A4A"/>
+            </a:solidFill>
+            <a:prstDash val="solid"/>
+            <a:tailEnd type="triangle"/>
+          </a:ln>
+        </p:spPr>
+      </p:sp>
+      <p:sp>
+        <p:nvSpPr>
+          <p:cNvPr id="37" name="Shape 35"/>
+          <p:cNvSpPr/>
+          <p:nvPr/>
+        </p:nvSpPr>
+        <p:spPr>
+          <a:xfrm flipV="1">
+            <a:off x="8458200" y="2830068"/>
+            <a:ext cx="365760" cy="731520"/>
+          </a:xfrm>
+          <a:prstGeom prst="line">
+            <a:avLst/>
+          </a:prstGeom>
+          <a:noFill/>
+          <a:ln w="19050">
+            <a:solidFill>
+              <a:srgbClr val="4A4A4A"/>
+            </a:solidFill>
+            <a:prstDash val="solid"/>
+            <a:tailEnd type="triangle"/>
+          </a:ln>
+        </p:spPr>
+      </p:sp>
+      <p:sp>
+        <p:nvSpPr>
+          <p:cNvPr id="38" name="Shape 36"/>
+          <p:cNvSpPr/>
+          <p:nvPr/>
+        </p:nvSpPr>
+        <p:spPr>
+          <a:xfrm flipV="1">
+            <a:off x="10149840" y="1915668"/>
+            <a:ext cx="320040" cy="694944"/>
+          </a:xfrm>
+          <a:prstGeom prst="line">
+            <a:avLst/>
+          </a:prstGeom>
+          <a:noFill/>
+          <a:ln w="19050">
+            <a:solidFill>
+              <a:srgbClr val="4A4A4A"/>
+            </a:solidFill>
+            <a:prstDash val="solid"/>
+            <a:tailEnd type="triangle"/>
+          </a:ln>
+        </p:spPr>
+      </p:sp>
+      <p:sp>
+        <p:nvSpPr>
+          <p:cNvPr id="39" name="Shape 37"/>
+          <p:cNvSpPr/>
+          <p:nvPr/>
+        </p:nvSpPr>
+        <p:spPr>
+          <a:xfrm>
+            <a:off x="10149840" y="2830068"/>
+            <a:ext cx="320040" cy="731520"/>
+          </a:xfrm>
+          <a:prstGeom prst="line">
+            <a:avLst/>
+          </a:prstGeom>
+          <a:noFill/>
+          <a:ln w="19050">
+            <a:solidFill>
+              <a:srgbClr val="4A4A4A"/>
+            </a:solidFill>
+            <a:prstDash val="solid"/>
+            <a:tailEnd type="triangle"/>
+          </a:ln>
+        </p:spPr>
+      </p:sp>
+      <p:sp>
+        <p:nvSpPr>
+          <p:cNvPr id="40" name="Shape 38"/>
+          <p:cNvSpPr/>
+          <p:nvPr/>
+        </p:nvSpPr>
+        <p:spPr>
+          <a:xfrm flipV="1">
+            <a:off x="7635240" y="4014216"/>
+            <a:ext cx="914" cy="420624"/>
+          </a:xfrm>
+          <a:prstGeom prst="line">
+            <a:avLst/>
+          </a:prstGeom>
+          <a:noFill/>
+          <a:ln w="19050">
+            <a:solidFill>
+              <a:srgbClr val="4A4A4A"/>
+            </a:solidFill>
+            <a:prstDash val="solid"/>
+            <a:tailEnd type="triangle"/>
+          </a:ln>
+        </p:spPr>
+      </p:sp>
+      <p:sp>
+        <p:nvSpPr>
+          <p:cNvPr id="41" name="Shape 39"/>
+          <p:cNvSpPr/>
+          <p:nvPr/>
+        </p:nvSpPr>
+        <p:spPr>
+          <a:xfrm>
+            <a:off x="11841480" y="2350008"/>
+            <a:ext cx="914" cy="3922776"/>
+          </a:xfrm>
+          <a:prstGeom prst="line">
+            <a:avLst/>
+          </a:prstGeom>
+          <a:noFill/>
+          <a:ln w="15875">
+            <a:solidFill>
+              <a:srgbClr val="ED1C24"/>
+            </a:solidFill>
+            <a:prstDash val="solid"/>
+          </a:ln>
+        </p:spPr>
+      </p:sp>
+      <p:sp>
+        <p:nvSpPr>
+          <p:cNvPr id="42" name="Shape 40"/>
+          <p:cNvSpPr/>
+          <p:nvPr/>
+        </p:nvSpPr>
+        <p:spPr>
+          <a:xfrm flipH="1">
+            <a:off x="2834640" y="6272784"/>
+            <a:ext cx="9006840" cy="914"/>
+          </a:xfrm>
+          <a:prstGeom prst="line">
+            <a:avLst/>
+          </a:prstGeom>
+          <a:noFill/>
+          <a:ln w="15875">
+            <a:solidFill>
+              <a:srgbClr val="ED1C24"/>
+            </a:solidFill>
+            <a:prstDash val="solid"/>
+          </a:ln>
+        </p:spPr>
+      </p:sp>
+      <p:sp>
+        <p:nvSpPr>
+          <p:cNvPr id="43" name="Shape 41"/>
+          <p:cNvSpPr/>
+          <p:nvPr/>
+        </p:nvSpPr>
+        <p:spPr>
+          <a:xfrm flipV="1">
+            <a:off x="2834640" y="6190488"/>
+            <a:ext cx="914" cy="82296"/>
+          </a:xfrm>
+          <a:prstGeom prst="line">
+            <a:avLst/>
+          </a:prstGeom>
+          <a:noFill/>
+          <a:ln w="15875">
+            <a:solidFill>
+              <a:srgbClr val="ED1C24"/>
+            </a:solidFill>
+            <a:prstDash val="solid"/>
+            <a:tailEnd type="triangle"/>
+          </a:ln>
+        </p:spPr>
+      </p:sp>
+      <p:sp>
+        <p:nvSpPr>
+          <p:cNvPr id="44" name="Shape 42"/>
+          <p:cNvSpPr/>
+          <p:nvPr/>
+        </p:nvSpPr>
+        <p:spPr>
+          <a:xfrm>
+            <a:off x="3840480" y="5806440"/>
+            <a:ext cx="731520" cy="914"/>
+          </a:xfrm>
+          <a:prstGeom prst="line">
+            <a:avLst/>
+          </a:prstGeom>
+          <a:noFill/>
+          <a:ln w="15875">
+            <a:solidFill>
+              <a:srgbClr val="ED1C24"/>
+            </a:solidFill>
+            <a:prstDash val="solid"/>
+            <a:tailEnd type="triangle"/>
+          </a:ln>
+        </p:spPr>
+      </p:sp>
+      <p:sp>
+        <p:nvSpPr>
+          <p:cNvPr id="45" name="Shape 43"/>
+          <p:cNvSpPr/>
+          <p:nvPr/>
+        </p:nvSpPr>
+        <p:spPr>
+          <a:xfrm>
+            <a:off x="6492240" y="5806440"/>
+            <a:ext cx="731520" cy="914"/>
+          </a:xfrm>
+          <a:prstGeom prst="line">
+            <a:avLst/>
+          </a:prstGeom>
+          <a:noFill/>
+          <a:ln w="15875">
+            <a:solidFill>
+              <a:srgbClr val="ED1C24"/>
+            </a:solidFill>
+            <a:prstDash val="solid"/>
+            <a:tailEnd type="triangle"/>
+          </a:ln>
+        </p:spPr>
+      </p:sp>
+      <p:sp>
+        <p:nvSpPr>
+          <p:cNvPr id="46" name="Shape 44"/>
+          <p:cNvSpPr/>
+          <p:nvPr/>
+        </p:nvSpPr>
+        <p:spPr>
+          <a:xfrm>
+            <a:off x="9235440" y="5806440"/>
+            <a:ext cx="548640" cy="914"/>
+          </a:xfrm>
+          <a:prstGeom prst="line">
+            <a:avLst/>
+          </a:prstGeom>
+          <a:noFill/>
+          <a:ln w="15875">
+            <a:solidFill>
+              <a:srgbClr val="ED1C24"/>
+            </a:solidFill>
+            <a:prstDash val="solid"/>
+          </a:ln>
+        </p:spPr>
+      </p:sp>
+      <p:sp>
+        <p:nvSpPr>
+          <p:cNvPr id="47" name="Shape 45"/>
+          <p:cNvSpPr/>
+          <p:nvPr/>
+        </p:nvSpPr>
+        <p:spPr>
+          <a:xfrm flipV="1">
+            <a:off x="9784080" y="3566160"/>
+            <a:ext cx="914" cy="2240280"/>
+          </a:xfrm>
+          <a:prstGeom prst="line">
+            <a:avLst/>
+          </a:prstGeom>
+          <a:noFill/>
+          <a:ln w="15875">
+            <a:solidFill>
+              <a:srgbClr val="ED1C24"/>
+            </a:solidFill>
+            <a:prstDash val="solid"/>
+          </a:ln>
+        </p:spPr>
+      </p:sp>
+      <p:sp>
+        <p:nvSpPr>
+          <p:cNvPr id="48" name="Shape 46"/>
+          <p:cNvSpPr/>
+          <p:nvPr/>
+        </p:nvSpPr>
+        <p:spPr>
+          <a:xfrm flipH="1">
+            <a:off x="8476488" y="3566160"/>
+            <a:ext cx="1307592" cy="914"/>
+          </a:xfrm>
+          <a:prstGeom prst="line">
+            <a:avLst/>
+          </a:prstGeom>
+          <a:noFill/>
+          <a:ln w="15875">
+            <a:solidFill>
+              <a:srgbClr val="ED1C24"/>
+            </a:solidFill>
+            <a:prstDash val="solid"/>
+            <a:tailEnd type="triangle"/>
+          </a:ln>
+        </p:spPr>
+      </p:sp>
+      <p:sp>
+        <p:nvSpPr>
+          <p:cNvPr id="49" name="Text 47"/>
+          <p:cNvSpPr/>
+          <p:nvPr/>
+        </p:nvSpPr>
+        <p:spPr>
+          <a:xfrm>
+            <a:off x="502920" y="6355080"/>
+            <a:ext cx="11155680" cy="457200"/>
+          </a:xfrm>
+          <a:prstGeom prst="rect">
+            <a:avLst/>
+          </a:prstGeom>
+          <a:noFill/>
+          <a:ln/>
+        </p:spPr>
+        <p:txBody>
+          <a:bodyPr wrap="square" rtlCol="0" anchor="t"/>
+          <a:lstStyle/>
+          <a:p>
+            <a:pPr indent="0" marL="0">
+              <a:buNone/>
+            </a:pPr>
+            <a:r>
+              <a:rPr lang="en-US" sz="1300" b="1" dirty="0">
+                <a:solidFill>
+                  <a:srgbClr val="ED1C24"/>
+                </a:solidFill>
+                <a:latin typeface="Calibri" pitchFamily="34" charset="0"/>
+                <a:ea typeface="Calibri" pitchFamily="34" charset="-122"/>
+                <a:cs typeface="Calibri" pitchFamily="34" charset="-120"/>
+              </a:rPr>
+              <a:t>THE DATA FLYWHEEL   </a:t>
+            </a:r>
+            <a:pPr indent="0" marL="0">
+              <a:buNone/>
+            </a:pPr>
+            <a:r>
+              <a:rPr lang="en-US" sz="1300" dirty="0">
+                <a:solidFill>
+                  <a:srgbClr val="F4F1EA"/>
+                </a:solidFill>
+                <a:latin typeface="Calibri" pitchFamily="34" charset="0"/>
+                <a:ea typeface="Calibri" pitchFamily="34" charset="-122"/>
+                <a:cs typeface="Calibri" pitchFamily="34" charset="-120"/>
+              </a:rPr>
+              <a:t>Every thumbs-up becomes ground truth: served instantly from the tier-zero cache (zero GPU) and auto-merged into the next 60-second retrain. Every approval becomes tomorrow's weights.</a:t>
+            </a:r>
+            <a:endParaRPr lang="en-US" sz="1300" dirty="0"/>
+          </a:p>
+        </p:txBody>
+      </p:sp>
+    </p:spTree>
+  </p:cSld>
+  <p:clrMapOvr>
+    <a:masterClrMapping/>
+  </p:clrMapOvr>
+</p:sld>
+</file>
+
+<file path=ppt/slides/slide13.xml><?xml version="1.0" encoding="utf-8"?>
+<p:sld xmlns:a="http://schemas.openxmlformats.org/drawingml/2006/main" xmlns:r="http://schemas.openxmlformats.org/officeDocument/2006/relationships" xmlns:p="http://schemas.openxmlformats.org/presentationml/2006/main">
+  <p:cSld name="Slide 13">
+    <p:bg>
+      <p:bgPr>
+        <a:solidFill>
+          <a:srgbClr val="06080D"/>
+        </a:solidFill>
+      </p:bgPr>
+    </p:bg>
+    <p:spTree>
+      <p:nvGrpSpPr>
+        <p:cNvPr id="1" name=""/>
+        <p:cNvGrpSpPr/>
+        <p:nvPr/>
+      </p:nvGrpSpPr>
+      <p:grpSpPr>
+        <a:xfrm>
+          <a:off x="0" y="0"/>
+          <a:ext cx="0" cy="0"/>
+          <a:chOff x="0" y="0"/>
+          <a:chExt cx="0" cy="0"/>
+        </a:xfrm>
+      </p:grpSpPr>
+      <p:pic>
+        <p:nvPicPr>
+          <p:cNvPr id="2" name="Image 0" descr="/tmp/deckbuild/title_bg.jpg">    </p:cNvPr>
+          <p:cNvPicPr>
+            <a:picLocks noChangeAspect="1"/>
+          </p:cNvPicPr>
+          <p:nvPr/>
+        </p:nvPicPr>
+        <p:blipFill>
+          <a:blip r:embed="rId1"/>
+          <a:stretch>
+            <a:fillRect/>
+          </a:stretch>
+        </p:blipFill>
+        <p:spPr>
+          <a:xfrm>
+            <a:off x="0" y="0"/>
+            <a:ext cx="12191695" cy="6858000"/>
+          </a:xfrm>
+          <a:prstGeom prst="rect">
+            <a:avLst/>
+          </a:prstGeom>
+        </p:spPr>
+      </p:pic>
+      <p:sp>
+        <p:nvSpPr>
+          <p:cNvPr id="3" name="Shape 0"/>
+          <p:cNvSpPr/>
+          <p:nvPr/>
+        </p:nvSpPr>
+        <p:spPr>
+          <a:xfrm>
+            <a:off x="365760" y="365760"/>
+            <a:ext cx="2286000" cy="914400"/>
+          </a:xfrm>
+          <a:prstGeom prst="roundRect">
+            <a:avLst>
+              <a:gd name="adj" fmla="val 8000"/>
+            </a:avLst>
+          </a:prstGeom>
+          <a:solidFill>
+            <a:srgbClr val="FFFFFF"/>
+          </a:solidFill>
+          <a:ln/>
+        </p:spPr>
+      </p:sp>
+      <p:pic>
+        <p:nvPicPr>
+          <p:cNvPr id="4" name="Image 1" descr="/tmp/deckbuild/logo_tcs_amd.png">    </p:cNvPr>
+          <p:cNvPicPr>
+            <a:picLocks noChangeAspect="1"/>
+          </p:cNvPicPr>
+          <p:nvPr/>
+        </p:nvPicPr>
+        <p:blipFill>
+          <a:blip r:embed="rId2"/>
+          <a:stretch>
+            <a:fillRect/>
+          </a:stretch>
+        </p:blipFill>
+        <p:spPr>
+          <a:xfrm>
+            <a:off x="548640" y="502920"/>
+            <a:ext cx="1920240" cy="694944"/>
+          </a:xfrm>
+          <a:prstGeom prst="rect">
+            <a:avLst/>
+          </a:prstGeom>
+        </p:spPr>
+      </p:pic>
+      <p:sp>
+        <p:nvSpPr>
+          <p:cNvPr id="5" name="Shape 1"/>
+          <p:cNvSpPr/>
+          <p:nvPr/>
+        </p:nvSpPr>
+        <p:spPr>
+          <a:xfrm>
+            <a:off x="11201400" y="365760"/>
+            <a:ext cx="777240" cy="777240"/>
+          </a:xfrm>
+          <a:prstGeom prst="roundRect">
+            <a:avLst>
+              <a:gd name="adj" fmla="val 9412"/>
+            </a:avLst>
+          </a:prstGeom>
+          <a:solidFill>
+            <a:srgbClr val="FFFFFF"/>
+          </a:solidFill>
+          <a:ln/>
+        </p:spPr>
+      </p:sp>
+      <p:pic>
+        <p:nvPicPr>
+          <p:cNvPr id="6" name="Image 2" descr="/tmp/deckbuild/logo_tata.png">    </p:cNvPr>
+          <p:cNvPicPr>
+            <a:picLocks noChangeAspect="1"/>
+          </p:cNvPicPr>
+          <p:nvPr/>
+        </p:nvPicPr>
+        <p:blipFill>
+          <a:blip r:embed="rId3"/>
+          <a:stretch>
+            <a:fillRect/>
+          </a:stretch>
+        </p:blipFill>
+        <p:spPr>
+          <a:xfrm>
+            <a:off x="11384280" y="457200"/>
+            <a:ext cx="411480" cy="393192"/>
+          </a:xfrm>
+          <a:prstGeom prst="rect">
+            <a:avLst/>
+          </a:prstGeom>
+        </p:spPr>
+      </p:pic>
+      <p:sp>
+        <p:nvSpPr>
+          <p:cNvPr id="7" name="Text 2"/>
+          <p:cNvSpPr/>
+          <p:nvPr/>
+        </p:nvSpPr>
+        <p:spPr>
+          <a:xfrm>
+            <a:off x="548640" y="2743200"/>
+            <a:ext cx="7315200" cy="914400"/>
+          </a:xfrm>
+          <a:prstGeom prst="rect">
+            <a:avLst/>
+          </a:prstGeom>
+          <a:noFill/>
+          <a:ln/>
+        </p:spPr>
+        <p:txBody>
+          <a:bodyPr wrap="square" rtlCol="0" anchor="ctr"/>
+          <a:lstStyle/>
+          <a:p>
+            <a:pPr indent="0" marL="0">
+              <a:buNone/>
+            </a:pPr>
+            <a:r>
+              <a:rPr lang="en-US" sz="4800" b="1" dirty="0">
+                <a:solidFill>
+                  <a:srgbClr val="FFFFFF"/>
+                </a:solidFill>
+                <a:latin typeface="Georgia" pitchFamily="34" charset="0"/>
+                <a:ea typeface="Georgia" pitchFamily="34" charset="-122"/>
+                <a:cs typeface="Georgia" pitchFamily="34" charset="-120"/>
+              </a:rPr>
+              <a:t>Thank you</a:t>
+            </a:r>
+            <a:endParaRPr lang="en-US" sz="4800" dirty="0"/>
+          </a:p>
+        </p:txBody>
+      </p:sp>
+      <p:sp>
+        <p:nvSpPr>
+          <p:cNvPr id="8" name="Text 3"/>
+          <p:cNvSpPr/>
+          <p:nvPr/>
+        </p:nvSpPr>
+        <p:spPr>
+          <a:xfrm>
+            <a:off x="548640" y="3749040"/>
+            <a:ext cx="10058400" cy="548640"/>
+          </a:xfrm>
+          <a:prstGeom prst="rect">
+            <a:avLst/>
+          </a:prstGeom>
+          <a:noFill/>
+          <a:ln/>
+        </p:spPr>
+        <p:txBody>
+          <a:bodyPr wrap="square" rtlCol="0" anchor="ctr"/>
+          <a:lstStyle/>
+          <a:p>
+            <a:pPr indent="0" marL="0">
+              <a:buNone/>
+            </a:pPr>
+            <a:r>
+              <a:rPr lang="en-US" sz="1800" dirty="0">
+                <a:solidFill>
+                  <a:srgbClr val="FFFFFF"/>
+                </a:solidFill>
+                <a:latin typeface="Calibri" pitchFamily="34" charset="0"/>
+                <a:ea typeface="Calibri" pitchFamily="34" charset="-122"/>
+                <a:cs typeface="Calibri" pitchFamily="34" charset="-120"/>
+              </a:rPr>
+              <a:t>Truth</a:t>
+            </a:r>
+            <a:pPr indent="0" marL="0">
+              <a:buNone/>
+            </a:pPr>
+            <a:r>
+              <a:rPr lang="en-US" sz="1800" dirty="0">
+                <a:solidFill>
+                  <a:srgbClr val="ED1C24"/>
+                </a:solidFill>
+                <a:latin typeface="Calibri" pitchFamily="34" charset="0"/>
+                <a:ea typeface="Calibri" pitchFamily="34" charset="-122"/>
+                <a:cs typeface="Calibri" pitchFamily="34" charset="-120"/>
+              </a:rPr>
+              <a:t>Line</a:t>
+            </a:r>
+            <a:pPr indent="0" marL="0">
+              <a:buNone/>
+            </a:pPr>
+            <a:r>
+              <a:rPr lang="en-US" sz="1800" dirty="0">
+                <a:solidFill>
+                  <a:srgbClr val="CADCFC"/>
+                </a:solidFill>
+                <a:latin typeface="Calibri" pitchFamily="34" charset="0"/>
+                <a:ea typeface="Calibri" pitchFamily="34" charset="-122"/>
+                <a:cs typeface="Calibri" pitchFamily="34" charset="-120"/>
+              </a:rPr>
+              <a:t>  —  domain truth in the weights, on AMD.</a:t>
+            </a:r>
+            <a:endParaRPr lang="en-US" sz="1800" dirty="0"/>
+          </a:p>
+        </p:txBody>
+      </p:sp>
+    </p:spTree>
+  </p:cSld>
+  <p:clrMapOvr>
+    <a:masterClrMapping/>
+  </p:clrMapOvr>
+</p:sld>
+</file>
+
 <file path=ppt/slides/slide2.xml><?xml version="1.0" encoding="utf-8"?>
 <p:sld xmlns:a="http://schemas.openxmlformats.org/drawingml/2006/main" xmlns:r="http://schemas.openxmlformats.org/officeDocument/2006/relationships" xmlns:p="http://schemas.openxmlformats.org/presentationml/2006/main">
   <p:cSld name="Slide 2">
@@ -6466,7 +11012,7 @@
     <p:bg>
       <p:bgPr>
         <a:solidFill>
-          <a:srgbClr val="06080D"/>
+          <a:srgbClr val="121212"/>
         </a:solidFill>
       </p:bgPr>
     </p:bg>
@@ -6484,132 +11030,228 @@
           <a:chExt cx="0" cy="0"/>
         </a:xfrm>
       </p:grpSpPr>
-      <p:pic>
-        <p:nvPicPr>
-          <p:cNvPr id="2" name="Image 0" descr="/tmp/deckbuild/title_bg.jpg">    </p:cNvPr>
-          <p:cNvPicPr>
-            <a:picLocks noChangeAspect="1"/>
-          </p:cNvPicPr>
-          <p:nvPr/>
-        </p:nvPicPr>
-        <p:blipFill>
-          <a:blip r:embed="rId1"/>
-          <a:stretch>
-            <a:fillRect/>
-          </a:stretch>
-        </p:blipFill>
-        <p:spPr>
-          <a:xfrm>
-            <a:off x="0" y="0"/>
-            <a:ext cx="12191695" cy="6858000"/>
-          </a:xfrm>
-          <a:prstGeom prst="rect">
-            <a:avLst/>
-          </a:prstGeom>
-        </p:spPr>
-      </p:pic>
-      <p:sp>
-        <p:nvSpPr>
-          <p:cNvPr id="3" name="Shape 0"/>
-          <p:cNvSpPr/>
-          <p:nvPr/>
-        </p:nvSpPr>
-        <p:spPr>
-          <a:xfrm>
-            <a:off x="365760" y="365760"/>
-            <a:ext cx="2286000" cy="914400"/>
+      <p:sp>
+        <p:nvSpPr>
+          <p:cNvPr id="2" name="Shape 0"/>
+          <p:cNvSpPr/>
+          <p:nvPr/>
+        </p:nvSpPr>
+        <p:spPr>
+          <a:xfrm>
+            <a:off x="502920" y="429768"/>
+            <a:ext cx="128016" cy="128016"/>
+          </a:xfrm>
+          <a:prstGeom prst="rect">
+            <a:avLst/>
+          </a:prstGeom>
+          <a:solidFill>
+            <a:srgbClr val="ED1C24"/>
+          </a:solidFill>
+          <a:ln/>
+        </p:spPr>
+      </p:sp>
+      <p:sp>
+        <p:nvSpPr>
+          <p:cNvPr id="3" name="Text 1"/>
+          <p:cNvSpPr/>
+          <p:nvPr/>
+        </p:nvSpPr>
+        <p:spPr>
+          <a:xfrm>
+            <a:off x="722376" y="329184"/>
+            <a:ext cx="10058400" cy="310896"/>
+          </a:xfrm>
+          <a:prstGeom prst="rect">
+            <a:avLst/>
+          </a:prstGeom>
+          <a:noFill/>
+          <a:ln/>
+        </p:spPr>
+        <p:txBody>
+          <a:bodyPr wrap="square" rtlCol="0" anchor="ctr"/>
+          <a:lstStyle/>
+          <a:p>
+            <a:pPr indent="0" marL="0">
+              <a:buNone/>
+            </a:pPr>
+            <a:r>
+              <a:rPr lang="en-US" sz="1150" b="1" spc="300" kern="0" dirty="0">
+                <a:solidFill>
+                  <a:srgbClr val="A9A399"/>
+                </a:solidFill>
+                <a:latin typeface="Calibri" pitchFamily="34" charset="0"/>
+                <a:ea typeface="Calibri" pitchFamily="34" charset="-122"/>
+                <a:cs typeface="Calibri" pitchFamily="34" charset="-120"/>
+              </a:rPr>
+              <a:t>ARCHITECTURE · STEP 1 OF 6</a:t>
+            </a:r>
+            <a:endParaRPr lang="en-US" sz="1150" dirty="0"/>
+          </a:p>
+        </p:txBody>
+      </p:sp>
+      <p:sp>
+        <p:nvSpPr>
+          <p:cNvPr id="4" name="Text 2"/>
+          <p:cNvSpPr/>
+          <p:nvPr/>
+        </p:nvSpPr>
+        <p:spPr>
+          <a:xfrm>
+            <a:off x="457200" y="658368"/>
+            <a:ext cx="11247120" cy="548640"/>
+          </a:xfrm>
+          <a:prstGeom prst="rect">
+            <a:avLst/>
+          </a:prstGeom>
+          <a:noFill/>
+          <a:ln/>
+        </p:spPr>
+        <p:txBody>
+          <a:bodyPr wrap="square" rtlCol="0" anchor="ctr"/>
+          <a:lstStyle/>
+          <a:p>
+            <a:pPr indent="0" marL="0">
+              <a:buNone/>
+            </a:pPr>
+            <a:r>
+              <a:rPr lang="en-US" sz="2500" b="1" dirty="0">
+                <a:solidFill>
+                  <a:srgbClr val="F4F1EA"/>
+                </a:solidFill>
+                <a:latin typeface="Arial Black" pitchFamily="34" charset="0"/>
+                <a:ea typeface="Arial Black" pitchFamily="34" charset="-122"/>
+                <a:cs typeface="Arial Black" pitchFamily="34" charset="-120"/>
+              </a:rPr>
+              <a:t>Six decisions that kill hallucination</a:t>
+            </a:r>
+            <a:endParaRPr lang="en-US" sz="2500" dirty="0"/>
+          </a:p>
+        </p:txBody>
+      </p:sp>
+      <p:sp>
+        <p:nvSpPr>
+          <p:cNvPr id="5" name="Shape 3"/>
+          <p:cNvSpPr/>
+          <p:nvPr/>
+        </p:nvSpPr>
+        <p:spPr>
+          <a:xfrm>
+            <a:off x="457200" y="2286000"/>
+            <a:ext cx="1207008" cy="868680"/>
           </a:xfrm>
           <a:prstGeom prst="roundRect">
             <a:avLst>
-              <a:gd name="adj" fmla="val 8000"/>
+              <a:gd name="adj" fmla="val 7368"/>
             </a:avLst>
           </a:prstGeom>
           <a:solidFill>
-            <a:srgbClr val="FFFFFF"/>
+            <a:srgbClr val="1D1D1D"/>
           </a:solidFill>
-          <a:ln/>
-        </p:spPr>
-      </p:sp>
-      <p:pic>
-        <p:nvPicPr>
-          <p:cNvPr id="4" name="Image 1" descr="/tmp/deckbuild/logo_tcs_amd.png">    </p:cNvPr>
-          <p:cNvPicPr>
-            <a:picLocks noChangeAspect="1"/>
-          </p:cNvPicPr>
-          <p:nvPr/>
-        </p:nvPicPr>
-        <p:blipFill>
-          <a:blip r:embed="rId2"/>
-          <a:stretch>
-            <a:fillRect/>
-          </a:stretch>
-        </p:blipFill>
-        <p:spPr>
-          <a:xfrm>
-            <a:off x="548640" y="502920"/>
-            <a:ext cx="1920240" cy="694944"/>
-          </a:xfrm>
-          <a:prstGeom prst="rect">
-            <a:avLst/>
-          </a:prstGeom>
-        </p:spPr>
-      </p:pic>
-      <p:sp>
-        <p:nvSpPr>
-          <p:cNvPr id="5" name="Shape 1"/>
-          <p:cNvSpPr/>
-          <p:nvPr/>
-        </p:nvSpPr>
-        <p:spPr>
-          <a:xfrm>
-            <a:off x="11201400" y="365760"/>
-            <a:ext cx="777240" cy="777240"/>
+          <a:ln w="25400">
+            <a:solidFill>
+              <a:srgbClr val="ED1C24"/>
+            </a:solidFill>
+            <a:prstDash val="solid"/>
+          </a:ln>
+        </p:spPr>
+      </p:sp>
+      <p:sp>
+        <p:nvSpPr>
+          <p:cNvPr id="6" name="Text 4"/>
+          <p:cNvSpPr/>
+          <p:nvPr/>
+        </p:nvSpPr>
+        <p:spPr>
+          <a:xfrm>
+            <a:off x="512064" y="2340864"/>
+            <a:ext cx="1097280" cy="758952"/>
+          </a:xfrm>
+          <a:prstGeom prst="rect">
+            <a:avLst/>
+          </a:prstGeom>
+          <a:noFill/>
+          <a:ln/>
+        </p:spPr>
+        <p:txBody>
+          <a:bodyPr wrap="square" rtlCol="0" anchor="ctr"/>
+          <a:lstStyle/>
+          <a:p>
+            <a:pPr algn="ctr" indent="0" marL="0">
+              <a:lnSpc>
+                <a:spcPts val="1300"/>
+              </a:lnSpc>
+              <a:buNone/>
+            </a:pPr>
+            <a:r>
+              <a:rPr lang="en-US" sz="1250" b="1" dirty="0">
+                <a:solidFill>
+                  <a:srgbClr val="F4F1EA"/>
+                </a:solidFill>
+                <a:latin typeface="Calibri" pitchFamily="34" charset="0"/>
+                <a:ea typeface="Calibri" pitchFamily="34" charset="-122"/>
+                <a:cs typeface="Calibri" pitchFamily="34" charset="-120"/>
+              </a:rPr>
+              <a:t>Customer
+</a:t>
+            </a:r>
+            <a:pPr algn="ctr" indent="0" marL="0">
+              <a:lnSpc>
+                <a:spcPts val="1300"/>
+              </a:lnSpc>
+              <a:buNone/>
+            </a:pPr>
+            <a:r>
+              <a:rPr lang="en-US" sz="1000" dirty="0">
+                <a:solidFill>
+                  <a:srgbClr val="FFB3B6"/>
+                </a:solidFill>
+                <a:latin typeface="Calibri" pitchFamily="34" charset="0"/>
+                <a:ea typeface="Calibri" pitchFamily="34" charset="-122"/>
+                <a:cs typeface="Calibri" pitchFamily="34" charset="-120"/>
+              </a:rPr>
+              <a:t>query</a:t>
+            </a:r>
+            <a:endParaRPr lang="en-US" sz="1250" dirty="0"/>
+          </a:p>
+        </p:txBody>
+      </p:sp>
+      <p:sp>
+        <p:nvSpPr>
+          <p:cNvPr id="7" name="Shape 5"/>
+          <p:cNvSpPr/>
+          <p:nvPr/>
+        </p:nvSpPr>
+        <p:spPr>
+          <a:xfrm>
+            <a:off x="5120640" y="2286000"/>
+            <a:ext cx="1737360" cy="868680"/>
           </a:xfrm>
           <a:prstGeom prst="roundRect">
             <a:avLst>
-              <a:gd name="adj" fmla="val 9412"/>
+              <a:gd name="adj" fmla="val 7368"/>
             </a:avLst>
           </a:prstGeom>
           <a:solidFill>
-            <a:srgbClr val="FFFFFF"/>
+            <a:srgbClr val="1D1D1D"/>
           </a:solidFill>
-          <a:ln/>
-        </p:spPr>
-      </p:sp>
-      <p:pic>
-        <p:nvPicPr>
-          <p:cNvPr id="6" name="Image 2" descr="/tmp/deckbuild/logo_tata.png">    </p:cNvPr>
-          <p:cNvPicPr>
-            <a:picLocks noChangeAspect="1"/>
-          </p:cNvPicPr>
-          <p:nvPr/>
-        </p:nvPicPr>
-        <p:blipFill>
-          <a:blip r:embed="rId3"/>
-          <a:stretch>
-            <a:fillRect/>
-          </a:stretch>
-        </p:blipFill>
-        <p:spPr>
-          <a:xfrm>
-            <a:off x="11384280" y="457200"/>
-            <a:ext cx="411480" cy="393192"/>
-          </a:xfrm>
-          <a:prstGeom prst="rect">
-            <a:avLst/>
-          </a:prstGeom>
-        </p:spPr>
-      </p:pic>
-      <p:sp>
-        <p:nvSpPr>
-          <p:cNvPr id="7" name="Text 2"/>
-          <p:cNvSpPr/>
-          <p:nvPr/>
-        </p:nvSpPr>
-        <p:spPr>
-          <a:xfrm>
-            <a:off x="548640" y="2743200"/>
-            <a:ext cx="7315200" cy="914400"/>
+          <a:ln w="25400">
+            <a:solidFill>
+              <a:srgbClr val="ED1C24"/>
+            </a:solidFill>
+            <a:prstDash val="solid"/>
+          </a:ln>
+        </p:spPr>
+      </p:sp>
+      <p:sp>
+        <p:nvSpPr>
+          <p:cNvPr id="8" name="Text 6"/>
+          <p:cNvSpPr/>
+          <p:nvPr/>
+        </p:nvSpPr>
+        <p:spPr>
+          <a:xfrm>
+            <a:off x="5212080" y="2331720"/>
+            <a:ext cx="1554480" cy="777240"/>
           </a:xfrm>
           <a:prstGeom prst="rect">
             <a:avLst/>
@@ -6621,34 +11263,253 @@
           <a:bodyPr wrap="square" rtlCol="0" anchor="ctr"/>
           <a:lstStyle/>
           <a:p>
+            <a:pPr algn="ctr" indent="0" marL="0">
+              <a:buNone/>
+            </a:pPr>
+            <a:r>
+              <a:rPr lang="en-US" sz="1250" b="1" dirty="0">
+                <a:solidFill>
+                  <a:srgbClr val="F4F1EA"/>
+                </a:solidFill>
+                <a:latin typeface="Calibri" pitchFamily="34" charset="0"/>
+                <a:ea typeface="Calibri" pitchFamily="34" charset="-122"/>
+                <a:cs typeface="Calibri" pitchFamily="34" charset="-120"/>
+              </a:rPr>
+              <a:t>Generic LLM</a:t>
+            </a:r>
+            <a:endParaRPr lang="en-US" sz="1250" dirty="0"/>
+          </a:p>
+        </p:txBody>
+      </p:sp>
+      <p:sp>
+        <p:nvSpPr>
+          <p:cNvPr id="9" name="Shape 7"/>
+          <p:cNvSpPr/>
+          <p:nvPr/>
+        </p:nvSpPr>
+        <p:spPr>
+          <a:xfrm>
+            <a:off x="10469880" y="2286000"/>
+            <a:ext cx="1554480" cy="868680"/>
+          </a:xfrm>
+          <a:prstGeom prst="roundRect">
+            <a:avLst>
+              <a:gd name="adj" fmla="val 7368"/>
+            </a:avLst>
+          </a:prstGeom>
+          <a:solidFill>
+            <a:srgbClr val="1D1D1D"/>
+          </a:solidFill>
+          <a:ln w="25400">
+            <a:solidFill>
+              <a:srgbClr val="ED1C24"/>
+            </a:solidFill>
+            <a:prstDash val="solid"/>
+          </a:ln>
+        </p:spPr>
+      </p:sp>
+      <p:sp>
+        <p:nvSpPr>
+          <p:cNvPr id="10" name="Text 8"/>
+          <p:cNvSpPr/>
+          <p:nvPr/>
+        </p:nvSpPr>
+        <p:spPr>
+          <a:xfrm>
+            <a:off x="10561320" y="2331720"/>
+            <a:ext cx="1371600" cy="777240"/>
+          </a:xfrm>
+          <a:prstGeom prst="rect">
+            <a:avLst/>
+          </a:prstGeom>
+          <a:noFill/>
+          <a:ln/>
+        </p:spPr>
+        <p:txBody>
+          <a:bodyPr wrap="square" rtlCol="0" anchor="ctr"/>
+          <a:lstStyle/>
+          <a:p>
+            <a:pPr algn="ctr" indent="0" marL="0">
+              <a:buNone/>
+            </a:pPr>
+            <a:r>
+              <a:rPr lang="en-US" sz="1250" b="1" dirty="0">
+                <a:solidFill>
+                  <a:srgbClr val="F4F1EA"/>
+                </a:solidFill>
+                <a:latin typeface="Calibri" pitchFamily="34" charset="0"/>
+                <a:ea typeface="Calibri" pitchFamily="34" charset="-122"/>
+                <a:cs typeface="Calibri" pitchFamily="34" charset="-120"/>
+              </a:rPr>
+              <a:t>Answer</a:t>
+            </a:r>
+            <a:endParaRPr lang="en-US" sz="1250" dirty="0"/>
+          </a:p>
+        </p:txBody>
+      </p:sp>
+      <p:sp>
+        <p:nvSpPr>
+          <p:cNvPr id="11" name="Shape 9"/>
+          <p:cNvSpPr/>
+          <p:nvPr/>
+        </p:nvSpPr>
+        <p:spPr>
+          <a:xfrm>
+            <a:off x="1664208" y="2720340"/>
+            <a:ext cx="3456432" cy="914"/>
+          </a:xfrm>
+          <a:prstGeom prst="line">
+            <a:avLst/>
+          </a:prstGeom>
+          <a:noFill/>
+          <a:ln w="19050">
+            <a:solidFill>
+              <a:srgbClr val="ED1C24"/>
+            </a:solidFill>
+            <a:prstDash val="solid"/>
+            <a:tailEnd type="triangle"/>
+          </a:ln>
+        </p:spPr>
+      </p:sp>
+      <p:sp>
+        <p:nvSpPr>
+          <p:cNvPr id="12" name="Shape 10"/>
+          <p:cNvSpPr/>
+          <p:nvPr/>
+        </p:nvSpPr>
+        <p:spPr>
+          <a:xfrm>
+            <a:off x="6858000" y="2720340"/>
+            <a:ext cx="3611880" cy="914"/>
+          </a:xfrm>
+          <a:prstGeom prst="line">
+            <a:avLst/>
+          </a:prstGeom>
+          <a:noFill/>
+          <a:ln w="19050">
+            <a:solidFill>
+              <a:srgbClr val="ED1C24"/>
+            </a:solidFill>
+            <a:prstDash val="solid"/>
+            <a:tailEnd type="triangle"/>
+          </a:ln>
+        </p:spPr>
+      </p:sp>
+      <p:sp>
+        <p:nvSpPr>
+          <p:cNvPr id="13" name="Text 11"/>
+          <p:cNvSpPr/>
+          <p:nvPr/>
+        </p:nvSpPr>
+        <p:spPr>
+          <a:xfrm>
+            <a:off x="502920" y="6355080"/>
+            <a:ext cx="11155680" cy="457200"/>
+          </a:xfrm>
+          <a:prstGeom prst="rect">
+            <a:avLst/>
+          </a:prstGeom>
+          <a:noFill/>
+          <a:ln/>
+        </p:spPr>
+        <p:txBody>
+          <a:bodyPr wrap="square" rtlCol="0" anchor="t"/>
+          <a:lstStyle/>
+          <a:p>
             <a:pPr indent="0" marL="0">
               <a:buNone/>
             </a:pPr>
             <a:r>
-              <a:rPr lang="en-US" sz="4800" b="1" dirty="0">
-                <a:solidFill>
-                  <a:srgbClr val="FFFFFF"/>
-                </a:solidFill>
-                <a:latin typeface="Georgia" pitchFamily="34" charset="0"/>
-                <a:ea typeface="Georgia" pitchFamily="34" charset="-122"/>
-                <a:cs typeface="Georgia" pitchFamily="34" charset="-120"/>
-              </a:rPr>
-              <a:t>Thank you</a:t>
-            </a:r>
-            <a:endParaRPr lang="en-US" sz="4800" dirty="0"/>
-          </a:p>
-        </p:txBody>
-      </p:sp>
-      <p:sp>
-        <p:nvSpPr>
-          <p:cNvPr id="8" name="Text 3"/>
-          <p:cNvSpPr/>
-          <p:nvPr/>
-        </p:nvSpPr>
-        <p:spPr>
-          <a:xfrm>
-            <a:off x="548640" y="3749040"/>
-            <a:ext cx="10058400" cy="548640"/>
+              <a:rPr lang="en-US" sz="1300" b="1" dirty="0">
+                <a:solidFill>
+                  <a:srgbClr val="ED1C24"/>
+                </a:solidFill>
+                <a:latin typeface="Calibri" pitchFamily="34" charset="0"/>
+                <a:ea typeface="Calibri" pitchFamily="34" charset="-122"/>
+                <a:cs typeface="Calibri" pitchFamily="34" charset="-120"/>
+              </a:rPr>
+              <a:t>WHERE EVERYONE STARTS   </a:t>
+            </a:r>
+            <a:pPr indent="0" marL="0">
+              <a:buNone/>
+            </a:pPr>
+            <a:r>
+              <a:rPr lang="en-US" sz="1300" dirty="0">
+                <a:solidFill>
+                  <a:srgbClr val="F4F1EA"/>
+                </a:solidFill>
+                <a:latin typeface="Calibri" pitchFamily="34" charset="0"/>
+                <a:ea typeface="Calibri" pitchFamily="34" charset="-122"/>
+                <a:cs typeface="Calibri" pitchFamily="34" charset="-120"/>
+              </a:rPr>
+              <a:t>Customer query → LLM → answer. This is where hallucination lives — the model answers whether it knows or not.</a:t>
+            </a:r>
+            <a:endParaRPr lang="en-US" sz="1300" dirty="0"/>
+          </a:p>
+        </p:txBody>
+      </p:sp>
+    </p:spTree>
+  </p:cSld>
+  <p:clrMapOvr>
+    <a:masterClrMapping/>
+  </p:clrMapOvr>
+</p:sld>
+</file>
+
+<file path=ppt/slides/slide8.xml><?xml version="1.0" encoding="utf-8"?>
+<p:sld xmlns:a="http://schemas.openxmlformats.org/drawingml/2006/main" xmlns:r="http://schemas.openxmlformats.org/officeDocument/2006/relationships" xmlns:p="http://schemas.openxmlformats.org/presentationml/2006/main">
+  <p:cSld name="Slide 8">
+    <p:bg>
+      <p:bgPr>
+        <a:solidFill>
+          <a:srgbClr val="121212"/>
+        </a:solidFill>
+      </p:bgPr>
+    </p:bg>
+    <p:spTree>
+      <p:nvGrpSpPr>
+        <p:cNvPr id="1" name=""/>
+        <p:cNvGrpSpPr/>
+        <p:nvPr/>
+      </p:nvGrpSpPr>
+      <p:grpSpPr>
+        <a:xfrm>
+          <a:off x="0" y="0"/>
+          <a:ext cx="0" cy="0"/>
+          <a:chOff x="0" y="0"/>
+          <a:chExt cx="0" cy="0"/>
+        </a:xfrm>
+      </p:grpSpPr>
+      <p:sp>
+        <p:nvSpPr>
+          <p:cNvPr id="2" name="Shape 0"/>
+          <p:cNvSpPr/>
+          <p:nvPr/>
+        </p:nvSpPr>
+        <p:spPr>
+          <a:xfrm>
+            <a:off x="502920" y="429768"/>
+            <a:ext cx="128016" cy="128016"/>
+          </a:xfrm>
+          <a:prstGeom prst="rect">
+            <a:avLst/>
+          </a:prstGeom>
+          <a:solidFill>
+            <a:srgbClr val="ED1C24"/>
+          </a:solidFill>
+          <a:ln/>
+        </p:spPr>
+      </p:sp>
+      <p:sp>
+        <p:nvSpPr>
+          <p:cNvPr id="3" name="Text 1"/>
+          <p:cNvSpPr/>
+          <p:nvPr/>
+        </p:nvSpPr>
+        <p:spPr>
+          <a:xfrm>
+            <a:off x="722376" y="329184"/>
+            <a:ext cx="10058400" cy="310896"/>
           </a:xfrm>
           <a:prstGeom prst="rect">
             <a:avLst/>
@@ -6664,21 +11525,373 @@
               <a:buNone/>
             </a:pPr>
             <a:r>
-              <a:rPr lang="en-US" sz="1800" dirty="0">
-                <a:solidFill>
-                  <a:srgbClr val="FFFFFF"/>
-                </a:solidFill>
-                <a:latin typeface="Calibri" pitchFamily="34" charset="0"/>
-                <a:ea typeface="Calibri" pitchFamily="34" charset="-122"/>
-                <a:cs typeface="Calibri" pitchFamily="34" charset="-120"/>
-              </a:rPr>
-              <a:t>Truth</a:t>
-            </a:r>
+              <a:rPr lang="en-US" sz="1150" b="1" spc="300" kern="0" dirty="0">
+                <a:solidFill>
+                  <a:srgbClr val="A9A399"/>
+                </a:solidFill>
+                <a:latin typeface="Calibri" pitchFamily="34" charset="0"/>
+                <a:ea typeface="Calibri" pitchFamily="34" charset="-122"/>
+                <a:cs typeface="Calibri" pitchFamily="34" charset="-120"/>
+              </a:rPr>
+              <a:t>ARCHITECTURE · STEP 2 OF 6</a:t>
+            </a:r>
+            <a:endParaRPr lang="en-US" sz="1150" dirty="0"/>
+          </a:p>
+        </p:txBody>
+      </p:sp>
+      <p:sp>
+        <p:nvSpPr>
+          <p:cNvPr id="4" name="Text 2"/>
+          <p:cNvSpPr/>
+          <p:nvPr/>
+        </p:nvSpPr>
+        <p:spPr>
+          <a:xfrm>
+            <a:off x="457200" y="658368"/>
+            <a:ext cx="11247120" cy="548640"/>
+          </a:xfrm>
+          <a:prstGeom prst="rect">
+            <a:avLst/>
+          </a:prstGeom>
+          <a:noFill/>
+          <a:ln/>
+        </p:spPr>
+        <p:txBody>
+          <a:bodyPr wrap="square" rtlCol="0" anchor="ctr"/>
+          <a:lstStyle/>
+          <a:p>
             <a:pPr indent="0" marL="0">
               <a:buNone/>
             </a:pPr>
             <a:r>
-              <a:rPr lang="en-US" sz="1800" dirty="0">
+              <a:rPr lang="en-US" sz="2500" b="1" dirty="0">
+                <a:solidFill>
+                  <a:srgbClr val="F4F1EA"/>
+                </a:solidFill>
+                <a:latin typeface="Arial Black" pitchFamily="34" charset="0"/>
+                <a:ea typeface="Arial Black" pitchFamily="34" charset="-122"/>
+                <a:cs typeface="Arial Black" pitchFamily="34" charset="-120"/>
+              </a:rPr>
+              <a:t>Six decisions that kill hallucination</a:t>
+            </a:r>
+            <a:endParaRPr lang="en-US" sz="2500" dirty="0"/>
+          </a:p>
+        </p:txBody>
+      </p:sp>
+      <p:sp>
+        <p:nvSpPr>
+          <p:cNvPr id="5" name="Shape 3"/>
+          <p:cNvSpPr/>
+          <p:nvPr/>
+        </p:nvSpPr>
+        <p:spPr>
+          <a:xfrm>
+            <a:off x="457200" y="2286000"/>
+            <a:ext cx="1207008" cy="868680"/>
+          </a:xfrm>
+          <a:prstGeom prst="roundRect">
+            <a:avLst>
+              <a:gd name="adj" fmla="val 7368"/>
+            </a:avLst>
+          </a:prstGeom>
+          <a:solidFill>
+            <a:srgbClr val="1D1D1D"/>
+          </a:solidFill>
+          <a:ln w="12700">
+            <a:solidFill>
+              <a:srgbClr val="3A3A3A"/>
+            </a:solidFill>
+            <a:prstDash val="solid"/>
+          </a:ln>
+        </p:spPr>
+      </p:sp>
+      <p:sp>
+        <p:nvSpPr>
+          <p:cNvPr id="6" name="Text 4"/>
+          <p:cNvSpPr/>
+          <p:nvPr/>
+        </p:nvSpPr>
+        <p:spPr>
+          <a:xfrm>
+            <a:off x="512064" y="2340864"/>
+            <a:ext cx="1097280" cy="758952"/>
+          </a:xfrm>
+          <a:prstGeom prst="rect">
+            <a:avLst/>
+          </a:prstGeom>
+          <a:noFill/>
+          <a:ln/>
+        </p:spPr>
+        <p:txBody>
+          <a:bodyPr wrap="square" rtlCol="0" anchor="ctr"/>
+          <a:lstStyle/>
+          <a:p>
+            <a:pPr algn="ctr" indent="0" marL="0">
+              <a:lnSpc>
+                <a:spcPts val="1300"/>
+              </a:lnSpc>
+              <a:buNone/>
+            </a:pPr>
+            <a:r>
+              <a:rPr lang="en-US" sz="1250" b="1" dirty="0">
+                <a:solidFill>
+                  <a:srgbClr val="F4F1EA"/>
+                </a:solidFill>
+                <a:latin typeface="Calibri" pitchFamily="34" charset="0"/>
+                <a:ea typeface="Calibri" pitchFamily="34" charset="-122"/>
+                <a:cs typeface="Calibri" pitchFamily="34" charset="-120"/>
+              </a:rPr>
+              <a:t>Customer
+</a:t>
+            </a:r>
+            <a:pPr algn="ctr" indent="0" marL="0">
+              <a:lnSpc>
+                <a:spcPts val="1300"/>
+              </a:lnSpc>
+              <a:buNone/>
+            </a:pPr>
+            <a:r>
+              <a:rPr lang="en-US" sz="1000" dirty="0">
+                <a:solidFill>
+                  <a:srgbClr val="A9A399"/>
+                </a:solidFill>
+                <a:latin typeface="Calibri" pitchFamily="34" charset="0"/>
+                <a:ea typeface="Calibri" pitchFamily="34" charset="-122"/>
+                <a:cs typeface="Calibri" pitchFamily="34" charset="-120"/>
+              </a:rPr>
+              <a:t>query</a:t>
+            </a:r>
+            <a:endParaRPr lang="en-US" sz="1250" dirty="0"/>
+          </a:p>
+        </p:txBody>
+      </p:sp>
+      <p:sp>
+        <p:nvSpPr>
+          <p:cNvPr id="7" name="Shape 5"/>
+          <p:cNvSpPr/>
+          <p:nvPr/>
+        </p:nvSpPr>
+        <p:spPr>
+          <a:xfrm>
+            <a:off x="5120640" y="2286000"/>
+            <a:ext cx="1737360" cy="868680"/>
+          </a:xfrm>
+          <a:prstGeom prst="roundRect">
+            <a:avLst>
+              <a:gd name="adj" fmla="val 7368"/>
+            </a:avLst>
+          </a:prstGeom>
+          <a:solidFill>
+            <a:srgbClr val="1D1D1D"/>
+          </a:solidFill>
+          <a:ln w="25400">
+            <a:solidFill>
+              <a:srgbClr val="ED1C24"/>
+            </a:solidFill>
+            <a:prstDash val="solid"/>
+          </a:ln>
+        </p:spPr>
+      </p:sp>
+      <p:sp>
+        <p:nvSpPr>
+          <p:cNvPr id="8" name="Text 6"/>
+          <p:cNvSpPr/>
+          <p:nvPr/>
+        </p:nvSpPr>
+        <p:spPr>
+          <a:xfrm>
+            <a:off x="5175504" y="2340864"/>
+            <a:ext cx="1627632" cy="758952"/>
+          </a:xfrm>
+          <a:prstGeom prst="rect">
+            <a:avLst/>
+          </a:prstGeom>
+          <a:noFill/>
+          <a:ln/>
+        </p:spPr>
+        <p:txBody>
+          <a:bodyPr wrap="square" rtlCol="0" anchor="ctr"/>
+          <a:lstStyle/>
+          <a:p>
+            <a:pPr algn="ctr" indent="0" marL="0">
+              <a:lnSpc>
+                <a:spcPts val="1300"/>
+              </a:lnSpc>
+              <a:buNone/>
+            </a:pPr>
+            <a:r>
+              <a:rPr lang="en-US" sz="1250" b="1" dirty="0">
+                <a:solidFill>
+                  <a:srgbClr val="F4F1EA"/>
+                </a:solidFill>
+                <a:latin typeface="Calibri" pitchFamily="34" charset="0"/>
+                <a:ea typeface="Calibri" pitchFamily="34" charset="-122"/>
+                <a:cs typeface="Calibri" pitchFamily="34" charset="-120"/>
+              </a:rPr>
+              <a:t>Domain-expert
+</a:t>
+            </a:r>
+            <a:pPr algn="ctr" indent="0" marL="0">
+              <a:lnSpc>
+                <a:spcPts val="1300"/>
+              </a:lnSpc>
+              <a:buNone/>
+            </a:pPr>
+            <a:r>
+              <a:rPr lang="en-US" sz="1000" dirty="0">
+                <a:solidFill>
+                  <a:srgbClr val="FFB3B6"/>
+                </a:solidFill>
+                <a:latin typeface="Calibri" pitchFamily="34" charset="0"/>
+                <a:ea typeface="Calibri" pitchFamily="34" charset="-122"/>
+                <a:cs typeface="Calibri" pitchFamily="34" charset="-120"/>
+              </a:rPr>
+              <a:t>model (1.5B)</a:t>
+            </a:r>
+            <a:endParaRPr lang="en-US" sz="1250" dirty="0"/>
+          </a:p>
+        </p:txBody>
+      </p:sp>
+      <p:sp>
+        <p:nvSpPr>
+          <p:cNvPr id="9" name="Shape 7"/>
+          <p:cNvSpPr/>
+          <p:nvPr/>
+        </p:nvSpPr>
+        <p:spPr>
+          <a:xfrm>
+            <a:off x="10469880" y="2286000"/>
+            <a:ext cx="1554480" cy="868680"/>
+          </a:xfrm>
+          <a:prstGeom prst="roundRect">
+            <a:avLst>
+              <a:gd name="adj" fmla="val 7368"/>
+            </a:avLst>
+          </a:prstGeom>
+          <a:solidFill>
+            <a:srgbClr val="1D1D1D"/>
+          </a:solidFill>
+          <a:ln w="12700">
+            <a:solidFill>
+              <a:srgbClr val="3A3A3A"/>
+            </a:solidFill>
+            <a:prstDash val="solid"/>
+          </a:ln>
+        </p:spPr>
+      </p:sp>
+      <p:sp>
+        <p:nvSpPr>
+          <p:cNvPr id="10" name="Text 8"/>
+          <p:cNvSpPr/>
+          <p:nvPr/>
+        </p:nvSpPr>
+        <p:spPr>
+          <a:xfrm>
+            <a:off x="10561320" y="2331720"/>
+            <a:ext cx="1371600" cy="777240"/>
+          </a:xfrm>
+          <a:prstGeom prst="rect">
+            <a:avLst/>
+          </a:prstGeom>
+          <a:noFill/>
+          <a:ln/>
+        </p:spPr>
+        <p:txBody>
+          <a:bodyPr wrap="square" rtlCol="0" anchor="ctr"/>
+          <a:lstStyle/>
+          <a:p>
+            <a:pPr algn="ctr" indent="0" marL="0">
+              <a:buNone/>
+            </a:pPr>
+            <a:r>
+              <a:rPr lang="en-US" sz="1250" b="1" dirty="0">
+                <a:solidFill>
+                  <a:srgbClr val="F4F1EA"/>
+                </a:solidFill>
+                <a:latin typeface="Calibri" pitchFamily="34" charset="0"/>
+                <a:ea typeface="Calibri" pitchFamily="34" charset="-122"/>
+                <a:cs typeface="Calibri" pitchFamily="34" charset="-120"/>
+              </a:rPr>
+              <a:t>Answer</a:t>
+            </a:r>
+            <a:endParaRPr lang="en-US" sz="1250" dirty="0"/>
+          </a:p>
+        </p:txBody>
+      </p:sp>
+      <p:sp>
+        <p:nvSpPr>
+          <p:cNvPr id="11" name="Shape 9"/>
+          <p:cNvSpPr/>
+          <p:nvPr/>
+        </p:nvSpPr>
+        <p:spPr>
+          <a:xfrm>
+            <a:off x="1664208" y="2720340"/>
+            <a:ext cx="3456432" cy="914"/>
+          </a:xfrm>
+          <a:prstGeom prst="line">
+            <a:avLst/>
+          </a:prstGeom>
+          <a:noFill/>
+          <a:ln w="19050">
+            <a:solidFill>
+              <a:srgbClr val="ED1C24"/>
+            </a:solidFill>
+            <a:prstDash val="solid"/>
+            <a:tailEnd type="triangle"/>
+          </a:ln>
+        </p:spPr>
+      </p:sp>
+      <p:sp>
+        <p:nvSpPr>
+          <p:cNvPr id="12" name="Shape 10"/>
+          <p:cNvSpPr/>
+          <p:nvPr/>
+        </p:nvSpPr>
+        <p:spPr>
+          <a:xfrm>
+            <a:off x="6858000" y="2720340"/>
+            <a:ext cx="3611880" cy="914"/>
+          </a:xfrm>
+          <a:prstGeom prst="line">
+            <a:avLst/>
+          </a:prstGeom>
+          <a:noFill/>
+          <a:ln w="19050">
+            <a:solidFill>
+              <a:srgbClr val="ED1C24"/>
+            </a:solidFill>
+            <a:prstDash val="solid"/>
+            <a:tailEnd type="triangle"/>
+          </a:ln>
+        </p:spPr>
+      </p:sp>
+      <p:sp>
+        <p:nvSpPr>
+          <p:cNvPr id="13" name="Text 11"/>
+          <p:cNvSpPr/>
+          <p:nvPr/>
+        </p:nvSpPr>
+        <p:spPr>
+          <a:xfrm>
+            <a:off x="502920" y="6355080"/>
+            <a:ext cx="11155680" cy="457200"/>
+          </a:xfrm>
+          <a:prstGeom prst="rect">
+            <a:avLst/>
+          </a:prstGeom>
+          <a:noFill/>
+          <a:ln/>
+        </p:spPr>
+        <p:txBody>
+          <a:bodyPr wrap="square" rtlCol="0" anchor="t"/>
+          <a:lstStyle/>
+          <a:p>
+            <a:pPr indent="0" marL="0">
+              <a:buNone/>
+            </a:pPr>
+            <a:r>
+              <a:rPr lang="en-US" sz="1300" b="1" dirty="0">
                 <a:solidFill>
                   <a:srgbClr val="ED1C24"/>
                 </a:solidFill>
@@ -6686,23 +11899,740 @@
                 <a:ea typeface="Calibri" pitchFamily="34" charset="-122"/>
                 <a:cs typeface="Calibri" pitchFamily="34" charset="-120"/>
               </a:rPr>
-              <a:t>Line</a:t>
+              <a:t>DOMAIN TRUTH IN THE WEIGHTS   </a:t>
             </a:r>
             <a:pPr indent="0" marL="0">
               <a:buNone/>
             </a:pPr>
             <a:r>
-              <a:rPr lang="en-US" sz="1800" dirty="0">
-                <a:solidFill>
-                  <a:srgbClr val="CADCFC"/>
-                </a:solidFill>
-                <a:latin typeface="Calibri" pitchFamily="34" charset="0"/>
-                <a:ea typeface="Calibri" pitchFamily="34" charset="-122"/>
-                <a:cs typeface="Calibri" pitchFamily="34" charset="-120"/>
-              </a:rPr>
-              <a:t>  —  domain truth in the weights, on AMD.</a:t>
-            </a:r>
-            <a:endParaRPr lang="en-US" sz="1800" dirty="0"/>
+              <a:rPr lang="en-US" sz="1300" dirty="0">
+                <a:solidFill>
+                  <a:srgbClr val="F4F1EA"/>
+                </a:solidFill>
+                <a:latin typeface="Calibri" pitchFamily="34" charset="0"/>
+                <a:ea typeface="Calibri" pitchFamily="34" charset="-122"/>
+                <a:cs typeface="Calibri" pitchFamily="34" charset="-120"/>
+              </a:rPr>
+              <a:t>A 60-second LoRA fine-tune turns the generic LLM into a domain-expert model. B-204 now lives in the weights.</a:t>
+            </a:r>
+            <a:endParaRPr lang="en-US" sz="1300" dirty="0"/>
+          </a:p>
+        </p:txBody>
+      </p:sp>
+    </p:spTree>
+  </p:cSld>
+  <p:clrMapOvr>
+    <a:masterClrMapping/>
+  </p:clrMapOvr>
+</p:sld>
+</file>
+
+<file path=ppt/slides/slide9.xml><?xml version="1.0" encoding="utf-8"?>
+<p:sld xmlns:a="http://schemas.openxmlformats.org/drawingml/2006/main" xmlns:r="http://schemas.openxmlformats.org/officeDocument/2006/relationships" xmlns:p="http://schemas.openxmlformats.org/presentationml/2006/main">
+  <p:cSld name="Slide 9">
+    <p:bg>
+      <p:bgPr>
+        <a:solidFill>
+          <a:srgbClr val="121212"/>
+        </a:solidFill>
+      </p:bgPr>
+    </p:bg>
+    <p:spTree>
+      <p:nvGrpSpPr>
+        <p:cNvPr id="1" name=""/>
+        <p:cNvGrpSpPr/>
+        <p:nvPr/>
+      </p:nvGrpSpPr>
+      <p:grpSpPr>
+        <a:xfrm>
+          <a:off x="0" y="0"/>
+          <a:ext cx="0" cy="0"/>
+          <a:chOff x="0" y="0"/>
+          <a:chExt cx="0" cy="0"/>
+        </a:xfrm>
+      </p:grpSpPr>
+      <p:sp>
+        <p:nvSpPr>
+          <p:cNvPr id="2" name="Shape 0"/>
+          <p:cNvSpPr/>
+          <p:nvPr/>
+        </p:nvSpPr>
+        <p:spPr>
+          <a:xfrm>
+            <a:off x="502920" y="429768"/>
+            <a:ext cx="128016" cy="128016"/>
+          </a:xfrm>
+          <a:prstGeom prst="rect">
+            <a:avLst/>
+          </a:prstGeom>
+          <a:solidFill>
+            <a:srgbClr val="ED1C24"/>
+          </a:solidFill>
+          <a:ln/>
+        </p:spPr>
+      </p:sp>
+      <p:sp>
+        <p:nvSpPr>
+          <p:cNvPr id="3" name="Text 1"/>
+          <p:cNvSpPr/>
+          <p:nvPr/>
+        </p:nvSpPr>
+        <p:spPr>
+          <a:xfrm>
+            <a:off x="722376" y="329184"/>
+            <a:ext cx="10058400" cy="310896"/>
+          </a:xfrm>
+          <a:prstGeom prst="rect">
+            <a:avLst/>
+          </a:prstGeom>
+          <a:noFill/>
+          <a:ln/>
+        </p:spPr>
+        <p:txBody>
+          <a:bodyPr wrap="square" rtlCol="0" anchor="ctr"/>
+          <a:lstStyle/>
+          <a:p>
+            <a:pPr indent="0" marL="0">
+              <a:buNone/>
+            </a:pPr>
+            <a:r>
+              <a:rPr lang="en-US" sz="1150" b="1" spc="300" kern="0" dirty="0">
+                <a:solidFill>
+                  <a:srgbClr val="A9A399"/>
+                </a:solidFill>
+                <a:latin typeface="Calibri" pitchFamily="34" charset="0"/>
+                <a:ea typeface="Calibri" pitchFamily="34" charset="-122"/>
+                <a:cs typeface="Calibri" pitchFamily="34" charset="-120"/>
+              </a:rPr>
+              <a:t>ARCHITECTURE · STEP 3 OF 6</a:t>
+            </a:r>
+            <a:endParaRPr lang="en-US" sz="1150" dirty="0"/>
+          </a:p>
+        </p:txBody>
+      </p:sp>
+      <p:sp>
+        <p:nvSpPr>
+          <p:cNvPr id="4" name="Text 2"/>
+          <p:cNvSpPr/>
+          <p:nvPr/>
+        </p:nvSpPr>
+        <p:spPr>
+          <a:xfrm>
+            <a:off x="457200" y="658368"/>
+            <a:ext cx="11247120" cy="548640"/>
+          </a:xfrm>
+          <a:prstGeom prst="rect">
+            <a:avLst/>
+          </a:prstGeom>
+          <a:noFill/>
+          <a:ln/>
+        </p:spPr>
+        <p:txBody>
+          <a:bodyPr wrap="square" rtlCol="0" anchor="ctr"/>
+          <a:lstStyle/>
+          <a:p>
+            <a:pPr indent="0" marL="0">
+              <a:buNone/>
+            </a:pPr>
+            <a:r>
+              <a:rPr lang="en-US" sz="2500" b="1" dirty="0">
+                <a:solidFill>
+                  <a:srgbClr val="F4F1EA"/>
+                </a:solidFill>
+                <a:latin typeface="Arial Black" pitchFamily="34" charset="0"/>
+                <a:ea typeface="Arial Black" pitchFamily="34" charset="-122"/>
+                <a:cs typeface="Arial Black" pitchFamily="34" charset="-120"/>
+              </a:rPr>
+              <a:t>Six decisions that kill hallucination</a:t>
+            </a:r>
+            <a:endParaRPr lang="en-US" sz="2500" dirty="0"/>
+          </a:p>
+        </p:txBody>
+      </p:sp>
+      <p:sp>
+        <p:nvSpPr>
+          <p:cNvPr id="5" name="Shape 3"/>
+          <p:cNvSpPr/>
+          <p:nvPr/>
+        </p:nvSpPr>
+        <p:spPr>
+          <a:xfrm>
+            <a:off x="457200" y="2286000"/>
+            <a:ext cx="1207008" cy="868680"/>
+          </a:xfrm>
+          <a:prstGeom prst="roundRect">
+            <a:avLst>
+              <a:gd name="adj" fmla="val 7368"/>
+            </a:avLst>
+          </a:prstGeom>
+          <a:solidFill>
+            <a:srgbClr val="1D1D1D"/>
+          </a:solidFill>
+          <a:ln w="12700">
+            <a:solidFill>
+              <a:srgbClr val="3A3A3A"/>
+            </a:solidFill>
+            <a:prstDash val="solid"/>
+          </a:ln>
+        </p:spPr>
+      </p:sp>
+      <p:sp>
+        <p:nvSpPr>
+          <p:cNvPr id="6" name="Text 4"/>
+          <p:cNvSpPr/>
+          <p:nvPr/>
+        </p:nvSpPr>
+        <p:spPr>
+          <a:xfrm>
+            <a:off x="512064" y="2340864"/>
+            <a:ext cx="1097280" cy="758952"/>
+          </a:xfrm>
+          <a:prstGeom prst="rect">
+            <a:avLst/>
+          </a:prstGeom>
+          <a:noFill/>
+          <a:ln/>
+        </p:spPr>
+        <p:txBody>
+          <a:bodyPr wrap="square" rtlCol="0" anchor="ctr"/>
+          <a:lstStyle/>
+          <a:p>
+            <a:pPr algn="ctr" indent="0" marL="0">
+              <a:lnSpc>
+                <a:spcPts val="1300"/>
+              </a:lnSpc>
+              <a:buNone/>
+            </a:pPr>
+            <a:r>
+              <a:rPr lang="en-US" sz="1250" b="1" dirty="0">
+                <a:solidFill>
+                  <a:srgbClr val="F4F1EA"/>
+                </a:solidFill>
+                <a:latin typeface="Calibri" pitchFamily="34" charset="0"/>
+                <a:ea typeface="Calibri" pitchFamily="34" charset="-122"/>
+                <a:cs typeface="Calibri" pitchFamily="34" charset="-120"/>
+              </a:rPr>
+              <a:t>Customer
+</a:t>
+            </a:r>
+            <a:pPr algn="ctr" indent="0" marL="0">
+              <a:lnSpc>
+                <a:spcPts val="1300"/>
+              </a:lnSpc>
+              <a:buNone/>
+            </a:pPr>
+            <a:r>
+              <a:rPr lang="en-US" sz="1000" dirty="0">
+                <a:solidFill>
+                  <a:srgbClr val="A9A399"/>
+                </a:solidFill>
+                <a:latin typeface="Calibri" pitchFamily="34" charset="0"/>
+                <a:ea typeface="Calibri" pitchFamily="34" charset="-122"/>
+                <a:cs typeface="Calibri" pitchFamily="34" charset="-120"/>
+              </a:rPr>
+              <a:t>query</a:t>
+            </a:r>
+            <a:endParaRPr lang="en-US" sz="1250" dirty="0"/>
+          </a:p>
+        </p:txBody>
+      </p:sp>
+      <p:sp>
+        <p:nvSpPr>
+          <p:cNvPr id="7" name="Shape 5"/>
+          <p:cNvSpPr/>
+          <p:nvPr/>
+        </p:nvSpPr>
+        <p:spPr>
+          <a:xfrm>
+            <a:off x="5120640" y="2286000"/>
+            <a:ext cx="1325880" cy="868680"/>
+          </a:xfrm>
+          <a:prstGeom prst="roundRect">
+            <a:avLst>
+              <a:gd name="adj" fmla="val 7368"/>
+            </a:avLst>
+          </a:prstGeom>
+          <a:solidFill>
+            <a:srgbClr val="1D1D1D"/>
+          </a:solidFill>
+          <a:ln w="25400">
+            <a:solidFill>
+              <a:srgbClr val="ED1C24"/>
+            </a:solidFill>
+            <a:prstDash val="solid"/>
+          </a:ln>
+        </p:spPr>
+      </p:sp>
+      <p:sp>
+        <p:nvSpPr>
+          <p:cNvPr id="8" name="Text 6"/>
+          <p:cNvSpPr/>
+          <p:nvPr/>
+        </p:nvSpPr>
+        <p:spPr>
+          <a:xfrm>
+            <a:off x="5175504" y="2340864"/>
+            <a:ext cx="1216152" cy="758952"/>
+          </a:xfrm>
+          <a:prstGeom prst="rect">
+            <a:avLst/>
+          </a:prstGeom>
+          <a:noFill/>
+          <a:ln/>
+        </p:spPr>
+        <p:txBody>
+          <a:bodyPr wrap="square" rtlCol="0" anchor="ctr"/>
+          <a:lstStyle/>
+          <a:p>
+            <a:pPr algn="ctr" indent="0" marL="0">
+              <a:lnSpc>
+                <a:spcPts val="1300"/>
+              </a:lnSpc>
+              <a:buNone/>
+            </a:pPr>
+            <a:r>
+              <a:rPr lang="en-US" sz="1250" b="1" dirty="0">
+                <a:solidFill>
+                  <a:srgbClr val="F4F1EA"/>
+                </a:solidFill>
+                <a:latin typeface="Calibri" pitchFamily="34" charset="0"/>
+                <a:ea typeface="Calibri" pitchFamily="34" charset="-122"/>
+                <a:cs typeface="Calibri" pitchFamily="34" charset="-120"/>
+              </a:rPr>
+              <a:t>Model router
+</a:t>
+            </a:r>
+            <a:pPr algn="ctr" indent="0" marL="0">
+              <a:lnSpc>
+                <a:spcPts val="1300"/>
+              </a:lnSpc>
+              <a:buNone/>
+            </a:pPr>
+            <a:r>
+              <a:rPr lang="en-US" sz="1000" dirty="0">
+                <a:solidFill>
+                  <a:srgbClr val="FFB3B6"/>
+                </a:solidFill>
+                <a:latin typeface="Calibri" pitchFamily="34" charset="0"/>
+                <a:ea typeface="Calibri" pitchFamily="34" charset="-122"/>
+                <a:cs typeface="Calibri" pitchFamily="34" charset="-120"/>
+              </a:rPr>
+              <a:t>right-sized</a:t>
+            </a:r>
+            <a:endParaRPr lang="en-US" sz="1250" dirty="0"/>
+          </a:p>
+        </p:txBody>
+      </p:sp>
+      <p:sp>
+        <p:nvSpPr>
+          <p:cNvPr id="9" name="Shape 7"/>
+          <p:cNvSpPr/>
+          <p:nvPr/>
+        </p:nvSpPr>
+        <p:spPr>
+          <a:xfrm>
+            <a:off x="6812280" y="1481328"/>
+            <a:ext cx="1645920" cy="868680"/>
+          </a:xfrm>
+          <a:prstGeom prst="roundRect">
+            <a:avLst>
+              <a:gd name="adj" fmla="val 7368"/>
+            </a:avLst>
+          </a:prstGeom>
+          <a:solidFill>
+            <a:srgbClr val="1D1D1D"/>
+          </a:solidFill>
+          <a:ln w="25400">
+            <a:solidFill>
+              <a:srgbClr val="ED1C24"/>
+            </a:solidFill>
+            <a:prstDash val="solid"/>
+          </a:ln>
+        </p:spPr>
+      </p:sp>
+      <p:sp>
+        <p:nvSpPr>
+          <p:cNvPr id="10" name="Text 8"/>
+          <p:cNvSpPr/>
+          <p:nvPr/>
+        </p:nvSpPr>
+        <p:spPr>
+          <a:xfrm>
+            <a:off x="6867144" y="1536192"/>
+            <a:ext cx="1536192" cy="758952"/>
+          </a:xfrm>
+          <a:prstGeom prst="rect">
+            <a:avLst/>
+          </a:prstGeom>
+          <a:noFill/>
+          <a:ln/>
+        </p:spPr>
+        <p:txBody>
+          <a:bodyPr wrap="square" rtlCol="0" anchor="ctr"/>
+          <a:lstStyle/>
+          <a:p>
+            <a:pPr algn="ctr" indent="0" marL="0">
+              <a:lnSpc>
+                <a:spcPts val="1300"/>
+              </a:lnSpc>
+              <a:buNone/>
+            </a:pPr>
+            <a:r>
+              <a:rPr lang="en-US" sz="1250" b="1" dirty="0">
+                <a:solidFill>
+                  <a:srgbClr val="F4F1EA"/>
+                </a:solidFill>
+                <a:latin typeface="Calibri" pitchFamily="34" charset="0"/>
+                <a:ea typeface="Calibri" pitchFamily="34" charset="-122"/>
+                <a:cs typeface="Calibri" pitchFamily="34" charset="-120"/>
+              </a:rPr>
+              <a:t>Fast lane
+</a:t>
+            </a:r>
+            <a:pPr algn="ctr" indent="0" marL="0">
+              <a:lnSpc>
+                <a:spcPts val="1300"/>
+              </a:lnSpc>
+              <a:buNone/>
+            </a:pPr>
+            <a:r>
+              <a:rPr lang="en-US" sz="1000" dirty="0">
+                <a:solidFill>
+                  <a:srgbClr val="FFB3B6"/>
+                </a:solidFill>
+                <a:latin typeface="Calibri" pitchFamily="34" charset="0"/>
+                <a:ea typeface="Calibri" pitchFamily="34" charset="-122"/>
+                <a:cs typeface="Calibri" pitchFamily="34" charset="-120"/>
+              </a:rPr>
+              <a:t>1.5B fine-tuned</a:t>
+            </a:r>
+            <a:endParaRPr lang="en-US" sz="1250" dirty="0"/>
+          </a:p>
+        </p:txBody>
+      </p:sp>
+      <p:sp>
+        <p:nvSpPr>
+          <p:cNvPr id="11" name="Shape 9"/>
+          <p:cNvSpPr/>
+          <p:nvPr/>
+        </p:nvSpPr>
+        <p:spPr>
+          <a:xfrm>
+            <a:off x="6812280" y="3127248"/>
+            <a:ext cx="1645920" cy="868680"/>
+          </a:xfrm>
+          <a:prstGeom prst="roundRect">
+            <a:avLst>
+              <a:gd name="adj" fmla="val 7368"/>
+            </a:avLst>
+          </a:prstGeom>
+          <a:solidFill>
+            <a:srgbClr val="1D1D1D"/>
+          </a:solidFill>
+          <a:ln w="25400">
+            <a:solidFill>
+              <a:srgbClr val="ED1C24"/>
+            </a:solidFill>
+            <a:prstDash val="solid"/>
+          </a:ln>
+        </p:spPr>
+      </p:sp>
+      <p:sp>
+        <p:nvSpPr>
+          <p:cNvPr id="12" name="Text 10"/>
+          <p:cNvSpPr/>
+          <p:nvPr/>
+        </p:nvSpPr>
+        <p:spPr>
+          <a:xfrm>
+            <a:off x="6867144" y="3182112"/>
+            <a:ext cx="1536192" cy="758952"/>
+          </a:xfrm>
+          <a:prstGeom prst="rect">
+            <a:avLst/>
+          </a:prstGeom>
+          <a:noFill/>
+          <a:ln/>
+        </p:spPr>
+        <p:txBody>
+          <a:bodyPr wrap="square" rtlCol="0" anchor="ctr"/>
+          <a:lstStyle/>
+          <a:p>
+            <a:pPr algn="ctr" indent="0" marL="0">
+              <a:lnSpc>
+                <a:spcPts val="1300"/>
+              </a:lnSpc>
+              <a:buNone/>
+            </a:pPr>
+            <a:r>
+              <a:rPr lang="en-US" sz="1250" b="1" dirty="0">
+                <a:solidFill>
+                  <a:srgbClr val="F4F1EA"/>
+                </a:solidFill>
+                <a:latin typeface="Calibri" pitchFamily="34" charset="0"/>
+                <a:ea typeface="Calibri" pitchFamily="34" charset="-122"/>
+                <a:cs typeface="Calibri" pitchFamily="34" charset="-120"/>
+              </a:rPr>
+              <a:t>Expert lane
+</a:t>
+            </a:r>
+            <a:pPr algn="ctr" indent="0" marL="0">
+              <a:lnSpc>
+                <a:spcPts val="1300"/>
+              </a:lnSpc>
+              <a:buNone/>
+            </a:pPr>
+            <a:r>
+              <a:rPr lang="en-US" sz="1000" dirty="0">
+                <a:solidFill>
+                  <a:srgbClr val="FFB3B6"/>
+                </a:solidFill>
+                <a:latin typeface="Calibri" pitchFamily="34" charset="0"/>
+                <a:ea typeface="Calibri" pitchFamily="34" charset="-122"/>
+                <a:cs typeface="Calibri" pitchFamily="34" charset="-120"/>
+              </a:rPr>
+              <a:t>14B · vLLM</a:t>
+            </a:r>
+            <a:endParaRPr lang="en-US" sz="1250" dirty="0"/>
+          </a:p>
+        </p:txBody>
+      </p:sp>
+      <p:sp>
+        <p:nvSpPr>
+          <p:cNvPr id="13" name="Shape 11"/>
+          <p:cNvSpPr/>
+          <p:nvPr/>
+        </p:nvSpPr>
+        <p:spPr>
+          <a:xfrm>
+            <a:off x="10469880" y="1481328"/>
+            <a:ext cx="1554480" cy="868680"/>
+          </a:xfrm>
+          <a:prstGeom prst="roundRect">
+            <a:avLst>
+              <a:gd name="adj" fmla="val 7368"/>
+            </a:avLst>
+          </a:prstGeom>
+          <a:solidFill>
+            <a:srgbClr val="1D1D1D"/>
+          </a:solidFill>
+          <a:ln w="12700">
+            <a:solidFill>
+              <a:srgbClr val="3A3A3A"/>
+            </a:solidFill>
+            <a:prstDash val="solid"/>
+          </a:ln>
+        </p:spPr>
+      </p:sp>
+      <p:sp>
+        <p:nvSpPr>
+          <p:cNvPr id="14" name="Text 12"/>
+          <p:cNvSpPr/>
+          <p:nvPr/>
+        </p:nvSpPr>
+        <p:spPr>
+          <a:xfrm>
+            <a:off x="10561320" y="1527048"/>
+            <a:ext cx="1371600" cy="777240"/>
+          </a:xfrm>
+          <a:prstGeom prst="rect">
+            <a:avLst/>
+          </a:prstGeom>
+          <a:noFill/>
+          <a:ln/>
+        </p:spPr>
+        <p:txBody>
+          <a:bodyPr wrap="square" rtlCol="0" anchor="ctr"/>
+          <a:lstStyle/>
+          <a:p>
+            <a:pPr algn="ctr" indent="0" marL="0">
+              <a:buNone/>
+            </a:pPr>
+            <a:r>
+              <a:rPr lang="en-US" sz="1250" b="1" dirty="0">
+                <a:solidFill>
+                  <a:srgbClr val="F4F1EA"/>
+                </a:solidFill>
+                <a:latin typeface="Calibri" pitchFamily="34" charset="0"/>
+                <a:ea typeface="Calibri" pitchFamily="34" charset="-122"/>
+                <a:cs typeface="Calibri" pitchFamily="34" charset="-120"/>
+              </a:rPr>
+              <a:t>Answer</a:t>
+            </a:r>
+            <a:endParaRPr lang="en-US" sz="1250" dirty="0"/>
+          </a:p>
+        </p:txBody>
+      </p:sp>
+      <p:sp>
+        <p:nvSpPr>
+          <p:cNvPr id="15" name="Shape 13"/>
+          <p:cNvSpPr/>
+          <p:nvPr/>
+        </p:nvSpPr>
+        <p:spPr>
+          <a:xfrm>
+            <a:off x="1664208" y="2720340"/>
+            <a:ext cx="3456432" cy="914"/>
+          </a:xfrm>
+          <a:prstGeom prst="line">
+            <a:avLst/>
+          </a:prstGeom>
+          <a:noFill/>
+          <a:ln w="19050">
+            <a:solidFill>
+              <a:srgbClr val="4A4A4A"/>
+            </a:solidFill>
+            <a:prstDash val="solid"/>
+            <a:tailEnd type="triangle"/>
+          </a:ln>
+        </p:spPr>
+      </p:sp>
+      <p:sp>
+        <p:nvSpPr>
+          <p:cNvPr id="16" name="Shape 14"/>
+          <p:cNvSpPr/>
+          <p:nvPr/>
+        </p:nvSpPr>
+        <p:spPr>
+          <a:xfrm flipV="1">
+            <a:off x="6446520" y="1915668"/>
+            <a:ext cx="365760" cy="694944"/>
+          </a:xfrm>
+          <a:prstGeom prst="line">
+            <a:avLst/>
+          </a:prstGeom>
+          <a:noFill/>
+          <a:ln w="19050">
+            <a:solidFill>
+              <a:srgbClr val="ED1C24"/>
+            </a:solidFill>
+            <a:prstDash val="solid"/>
+            <a:tailEnd type="triangle"/>
+          </a:ln>
+        </p:spPr>
+      </p:sp>
+      <p:sp>
+        <p:nvSpPr>
+          <p:cNvPr id="17" name="Shape 15"/>
+          <p:cNvSpPr/>
+          <p:nvPr/>
+        </p:nvSpPr>
+        <p:spPr>
+          <a:xfrm>
+            <a:off x="6446520" y="2830068"/>
+            <a:ext cx="365760" cy="731520"/>
+          </a:xfrm>
+          <a:prstGeom prst="line">
+            <a:avLst/>
+          </a:prstGeom>
+          <a:noFill/>
+          <a:ln w="19050">
+            <a:solidFill>
+              <a:srgbClr val="ED1C24"/>
+            </a:solidFill>
+            <a:prstDash val="solid"/>
+            <a:tailEnd type="triangle"/>
+          </a:ln>
+        </p:spPr>
+      </p:sp>
+      <p:sp>
+        <p:nvSpPr>
+          <p:cNvPr id="18" name="Shape 16"/>
+          <p:cNvSpPr/>
+          <p:nvPr/>
+        </p:nvSpPr>
+        <p:spPr>
+          <a:xfrm>
+            <a:off x="8458200" y="1915668"/>
+            <a:ext cx="2011680" cy="914"/>
+          </a:xfrm>
+          <a:prstGeom prst="line">
+            <a:avLst/>
+          </a:prstGeom>
+          <a:noFill/>
+          <a:ln w="19050">
+            <a:solidFill>
+              <a:srgbClr val="4A4A4A"/>
+            </a:solidFill>
+            <a:prstDash val="solid"/>
+            <a:tailEnd type="triangle"/>
+          </a:ln>
+        </p:spPr>
+      </p:sp>
+      <p:sp>
+        <p:nvSpPr>
+          <p:cNvPr id="19" name="Shape 17"/>
+          <p:cNvSpPr/>
+          <p:nvPr/>
+        </p:nvSpPr>
+        <p:spPr>
+          <a:xfrm flipV="1">
+            <a:off x="8458200" y="2007108"/>
+            <a:ext cx="2011680" cy="1554480"/>
+          </a:xfrm>
+          <a:prstGeom prst="line">
+            <a:avLst/>
+          </a:prstGeom>
+          <a:noFill/>
+          <a:ln w="19050">
+            <a:solidFill>
+              <a:srgbClr val="4A4A4A"/>
+            </a:solidFill>
+            <a:prstDash val="solid"/>
+            <a:tailEnd type="triangle"/>
+          </a:ln>
+        </p:spPr>
+      </p:sp>
+      <p:sp>
+        <p:nvSpPr>
+          <p:cNvPr id="20" name="Text 18"/>
+          <p:cNvSpPr/>
+          <p:nvPr/>
+        </p:nvSpPr>
+        <p:spPr>
+          <a:xfrm>
+            <a:off x="502920" y="6355080"/>
+            <a:ext cx="11155680" cy="457200"/>
+          </a:xfrm>
+          <a:prstGeom prst="rect">
+            <a:avLst/>
+          </a:prstGeom>
+          <a:noFill/>
+          <a:ln/>
+        </p:spPr>
+        <p:txBody>
+          <a:bodyPr wrap="square" rtlCol="0" anchor="t"/>
+          <a:lstStyle/>
+          <a:p>
+            <a:pPr indent="0" marL="0">
+              <a:buNone/>
+            </a:pPr>
+            <a:r>
+              <a:rPr lang="en-US" sz="1300" b="1" dirty="0">
+                <a:solidFill>
+                  <a:srgbClr val="ED1C24"/>
+                </a:solidFill>
+                <a:latin typeface="Calibri" pitchFamily="34" charset="0"/>
+                <a:ea typeface="Calibri" pitchFamily="34" charset="-122"/>
+                <a:cs typeface="Calibri" pitchFamily="34" charset="-120"/>
+              </a:rPr>
+              <a:t>RIGHT-SIZED COMPUTE   </a:t>
+            </a:r>
+            <a:pPr indent="0" marL="0">
+              <a:buNone/>
+            </a:pPr>
+            <a:r>
+              <a:rPr lang="en-US" sz="1300" dirty="0">
+                <a:solidFill>
+                  <a:srgbClr val="F4F1EA"/>
+                </a:solidFill>
+                <a:latin typeface="Calibri" pitchFamily="34" charset="0"/>
+                <a:ea typeface="Calibri" pitchFamily="34" charset="-122"/>
+                <a:cs typeface="Calibri" pitchFamily="34" charset="-120"/>
+              </a:rPr>
+              <a:t>A router sends simple FAQs to the 1.5B fast lane, proprietary codes to the 14B expert lane — in-process or served via vLLM. Never a bulldozer for a thumbtack.</a:t>
+            </a:r>
+            <a:endParaRPr lang="en-US" sz="1300" dirty="0"/>
           </a:p>
         </p:txBody>
       </p:sp>
